--- a/report/slides.pptx
+++ b/report/slides.pptx
@@ -20,9 +20,11 @@
     <p:sldId id="268" r:id="rId14"/>
     <p:sldId id="269" r:id="rId15"/>
     <p:sldId id="270" r:id="rId16"/>
+    <p:sldId id="271" r:id="rId17"/>
+    <p:sldId id="272" r:id="rId18"/>
   </p:sldIdLst>
   <p:notesMasterIdLst>
-    <p:notesMasterId r:id="rId17"/>
+    <p:notesMasterId r:id="rId19"/>
   </p:notesMasterIdLst>
   <p:sldSz cx="12192000" cy="6858000"/>
   <p:notesSz cx="6858000" cy="12192000"/>
@@ -180,9 +182,9 @@
           </c:dLbls>
           <c:cat>
             <c:multiLvlStrRef>
-              <c:f>Sheet1!$A$2:$A$7</c:f>
+              <c:f>Sheet1!$A$2:$A$9</c:f>
               <c:multiLvlStrCache>
-                <c:ptCount val="6"/>
+                <c:ptCount val="8"/>
                 <c:lvl>
                   <c:pt idx="0">
                     <c:v>Baseline</c:v>
@@ -197,10 +199,16 @@
                     <c:v>ROS+Aug</c:v>
                   </c:pt>
                   <c:pt idx="4">
-                    <c:v>Bal. Batch</c:v>
+                    <c:v>Bal.Batch</c:v>
                   </c:pt>
                   <c:pt idx="5">
-                    <c:v>Combined</c:v>
+                    <c:v>Combo(50%)</c:v>
+                  </c:pt>
+                  <c:pt idx="6">
+                    <c:v>Combo(25%)</c:v>
+                  </c:pt>
+                  <c:pt idx="7">
+                    <c:v>Combo(B+A)</c:v>
                   </c:pt>
                 </c:lvl>
               </c:multiLvlStrCache>
@@ -208,27 +216,33 @@
           </c:cat>
           <c:val>
             <c:numRef>
-              <c:f>Sheet1!$B$2:$B$7</c:f>
+              <c:f>Sheet1!$B$2:$B$9</c:f>
               <c:numCache>
                 <c:formatCode>General</c:formatCode>
-                <c:ptCount val="6"/>
+                <c:ptCount val="8"/>
                 <c:pt idx="0">
-                  <c:v>0.844</c:v>
+                  <c:v>0.922</c:v>
                 </c:pt>
                 <c:pt idx="1">
-                  <c:v>0.779</c:v>
+                  <c:v>0.928</c:v>
                 </c:pt>
                 <c:pt idx="2">
-                  <c:v>0.923</c:v>
+                  <c:v>0.936</c:v>
                 </c:pt>
                 <c:pt idx="3">
-                  <c:v>0.887</c:v>
+                  <c:v>0.917</c:v>
                 </c:pt>
                 <c:pt idx="4">
-                  <c:v>0.945</c:v>
+                  <c:v>0.937</c:v>
                 </c:pt>
                 <c:pt idx="5">
-                  <c:v>0.926</c:v>
+                  <c:v>0.924</c:v>
+                </c:pt>
+                <c:pt idx="6">
+                  <c:v>0.931</c:v>
+                </c:pt>
+                <c:pt idx="7">
+                  <c:v>0.934</c:v>
                 </c:pt>
               </c:numCache>
             </c:numRef>
@@ -281,9 +295,9 @@
           </c:dLbls>
           <c:cat>
             <c:multiLvlStrRef>
-              <c:f>Sheet1!$A$2:$A$7</c:f>
+              <c:f>Sheet1!$A$2:$A$9</c:f>
               <c:multiLvlStrCache>
-                <c:ptCount val="6"/>
+                <c:ptCount val="8"/>
                 <c:lvl>
                   <c:pt idx="0">
                     <c:v>Baseline</c:v>
@@ -298,10 +312,16 @@
                     <c:v>ROS+Aug</c:v>
                   </c:pt>
                   <c:pt idx="4">
-                    <c:v>Bal. Batch</c:v>
+                    <c:v>Bal.Batch</c:v>
                   </c:pt>
                   <c:pt idx="5">
-                    <c:v>Combined</c:v>
+                    <c:v>Combo(50%)</c:v>
+                  </c:pt>
+                  <c:pt idx="6">
+                    <c:v>Combo(25%)</c:v>
+                  </c:pt>
+                  <c:pt idx="7">
+                    <c:v>Combo(B+A)</c:v>
                   </c:pt>
                 </c:lvl>
               </c:multiLvlStrCache>
@@ -309,27 +329,33 @@
           </c:cat>
           <c:val>
             <c:numRef>
-              <c:f>Sheet1!$C$2:$C$7</c:f>
+              <c:f>Sheet1!$C$2:$C$9</c:f>
               <c:numCache>
                 <c:formatCode>General</c:formatCode>
-                <c:ptCount val="6"/>
+                <c:ptCount val="8"/>
                 <c:pt idx="0">
-                  <c:v>0.781</c:v>
+                  <c:v>0.94</c:v>
                 </c:pt>
                 <c:pt idx="1">
-                  <c:v>0.642</c:v>
+                  <c:v>0.974</c:v>
                 </c:pt>
                 <c:pt idx="2">
-                  <c:v>0.949</c:v>
+                  <c:v>0.967</c:v>
                 </c:pt>
                 <c:pt idx="3">
-                  <c:v>0.871</c:v>
+                  <c:v>0.926</c:v>
                 </c:pt>
                 <c:pt idx="4">
-                  <c:v>0.98</c:v>
+                  <c:v>0.971</c:v>
                 </c:pt>
                 <c:pt idx="5">
-                  <c:v>0.939</c:v>
+                  <c:v>0.952</c:v>
+                </c:pt>
+                <c:pt idx="6">
+                  <c:v>0.957</c:v>
+                </c:pt>
+                <c:pt idx="7">
+                  <c:v>0.96</c:v>
                 </c:pt>
               </c:numCache>
             </c:numRef>
@@ -382,9 +408,9 @@
           </c:dLbls>
           <c:cat>
             <c:multiLvlStrRef>
-              <c:f>Sheet1!$A$2:$A$7</c:f>
+              <c:f>Sheet1!$A$2:$A$9</c:f>
               <c:multiLvlStrCache>
-                <c:ptCount val="6"/>
+                <c:ptCount val="8"/>
                 <c:lvl>
                   <c:pt idx="0">
                     <c:v>Baseline</c:v>
@@ -399,10 +425,16 @@
                     <c:v>ROS+Aug</c:v>
                   </c:pt>
                   <c:pt idx="4">
-                    <c:v>Bal. Batch</c:v>
+                    <c:v>Bal.Batch</c:v>
                   </c:pt>
                   <c:pt idx="5">
-                    <c:v>Combined</c:v>
+                    <c:v>Combo(50%)</c:v>
+                  </c:pt>
+                  <c:pt idx="6">
+                    <c:v>Combo(25%)</c:v>
+                  </c:pt>
+                  <c:pt idx="7">
+                    <c:v>Combo(B+A)</c:v>
                   </c:pt>
                 </c:lvl>
               </c:multiLvlStrCache>
@@ -410,27 +442,33 @@
           </c:cat>
           <c:val>
             <c:numRef>
-              <c:f>Sheet1!$D$2:$D$7</c:f>
+              <c:f>Sheet1!$D$2:$D$9</c:f>
               <c:numCache>
                 <c:formatCode>General</c:formatCode>
-                <c:ptCount val="6"/>
+                <c:ptCount val="8"/>
                 <c:pt idx="0">
-                  <c:v>0.906</c:v>
+                  <c:v>0.905</c:v>
                 </c:pt>
                 <c:pt idx="1">
-                  <c:v>0.915</c:v>
+                  <c:v>0.883</c:v>
                 </c:pt>
                 <c:pt idx="2">
-                  <c:v>0.897</c:v>
+                  <c:v>0.905</c:v>
                 </c:pt>
                 <c:pt idx="3">
+                  <c:v>0.908</c:v>
+                </c:pt>
+                <c:pt idx="4">
                   <c:v>0.903</c:v>
                 </c:pt>
-                <c:pt idx="4">
-                  <c:v>0.909</c:v>
+                <c:pt idx="5">
+                  <c:v>0.895</c:v>
                 </c:pt>
-                <c:pt idx="5">
-                  <c:v>0.913</c:v>
+                <c:pt idx="6">
+                  <c:v>0.904</c:v>
+                </c:pt>
+                <c:pt idx="7">
+                  <c:v>0.908</c:v>
                 </c:pt>
               </c:numCache>
             </c:numRef>
@@ -445,7 +483,7 @@
               <c:strCache>
                 <c:ptCount val="1"/>
                 <c:pt idx="0">
-                  <c:v>F1-score</c:v>
+                  <c:v>PR-AUC</c:v>
                 </c:pt>
               </c:strCache>
             </c:strRef>
@@ -483,9 +521,9 @@
           </c:dLbls>
           <c:cat>
             <c:multiLvlStrRef>
-              <c:f>Sheet1!$A$2:$A$7</c:f>
+              <c:f>Sheet1!$A$2:$A$9</c:f>
               <c:multiLvlStrCache>
-                <c:ptCount val="6"/>
+                <c:ptCount val="8"/>
                 <c:lvl>
                   <c:pt idx="0">
                     <c:v>Baseline</c:v>
@@ -500,10 +538,16 @@
                     <c:v>ROS+Aug</c:v>
                   </c:pt>
                   <c:pt idx="4">
-                    <c:v>Bal. Batch</c:v>
+                    <c:v>Bal.Batch</c:v>
                   </c:pt>
                   <c:pt idx="5">
-                    <c:v>Combined</c:v>
+                    <c:v>Combo(50%)</c:v>
+                  </c:pt>
+                  <c:pt idx="6">
+                    <c:v>Combo(25%)</c:v>
+                  </c:pt>
+                  <c:pt idx="7">
+                    <c:v>Combo(B+A)</c:v>
                   </c:pt>
                 </c:lvl>
               </c:multiLvlStrCache>
@@ -511,27 +555,33 @@
           </c:cat>
           <c:val>
             <c:numRef>
-              <c:f>Sheet1!$E$2:$E$7</c:f>
+              <c:f>Sheet1!$E$2:$E$9</c:f>
               <c:numCache>
                 <c:formatCode>General</c:formatCode>
-                <c:ptCount val="6"/>
+                <c:ptCount val="8"/>
                 <c:pt idx="0">
-                  <c:v>0.503</c:v>
+                  <c:v>0.664</c:v>
                 </c:pt>
                 <c:pt idx="1">
-                  <c:v>0.228</c:v>
+                  <c:v>0.492</c:v>
                 </c:pt>
                 <c:pt idx="2">
-                  <c:v>0.456</c:v>
+                  <c:v>0.75</c:v>
                 </c:pt>
                 <c:pt idx="3">
-                  <c:v>0.453</c:v>
+                  <c:v>0.663</c:v>
                 </c:pt>
                 <c:pt idx="4">
-                  <c:v>0.446</c:v>
+                  <c:v>0.718</c:v>
                 </c:pt>
                 <c:pt idx="5">
-                  <c:v>0.491</c:v>
+                  <c:v>0.649</c:v>
+                </c:pt>
+                <c:pt idx="6">
+                  <c:v>0.658</c:v>
+                </c:pt>
+                <c:pt idx="7">
+                  <c:v>0.681</c:v>
                 </c:pt>
               </c:numCache>
             </c:numRef>
@@ -592,7 +642,7 @@
           <a:lstStyle/>
           <a:p>
             <a:pPr>
-              <a:defRPr sz="1200" b="0" i="0" u="none" strike="noStrike">
+              <a:defRPr sz="1100" b="0" i="0" u="none" strike="noStrike">
                 <a:solidFill>
                   <a:srgbClr val="1E2761"/>
                 </a:solidFill>
@@ -787,19 +837,19 @@
                 <c:formatCode>General</c:formatCode>
                 <c:ptCount val="5"/>
                 <c:pt idx="0">
-                  <c:v>0.813</c:v>
+                  <c:v>0.811</c:v>
                 </c:pt>
                 <c:pt idx="1">
-                  <c:v>0.698</c:v>
+                  <c:v>0.986</c:v>
                 </c:pt>
                 <c:pt idx="2">
-                  <c:v>0.949</c:v>
+                  <c:v>0.963</c:v>
                 </c:pt>
                 <c:pt idx="3">
-                  <c:v>0.845</c:v>
+                  <c:v>0.929</c:v>
                 </c:pt>
                 <c:pt idx="4">
-                  <c:v>0.914</c:v>
+                  <c:v>0.923</c:v>
                 </c:pt>
               </c:numCache>
             </c:numRef>
@@ -882,19 +932,19 @@
                 <c:formatCode>General</c:formatCode>
                 <c:ptCount val="5"/>
                 <c:pt idx="0">
-                  <c:v>0.808</c:v>
+                  <c:v>0.81</c:v>
                 </c:pt>
                 <c:pt idx="1">
-                  <c:v>0.947</c:v>
+                  <c:v>0.978</c:v>
                 </c:pt>
                 <c:pt idx="2">
-                  <c:v>0.949</c:v>
+                  <c:v>0.958</c:v>
                 </c:pt>
                 <c:pt idx="3">
-                  <c:v>0.688</c:v>
+                  <c:v>0.937</c:v>
                 </c:pt>
                 <c:pt idx="4">
-                  <c:v>0.5</c:v>
+                  <c:v>0.957</c:v>
                 </c:pt>
               </c:numCache>
             </c:numRef>
@@ -977,19 +1027,19 @@
                 <c:formatCode>General</c:formatCode>
                 <c:ptCount val="5"/>
                 <c:pt idx="0">
-                  <c:v>0.806</c:v>
+                  <c:v>0.808</c:v>
                 </c:pt>
                 <c:pt idx="1">
-                  <c:v>0.978</c:v>
+                  <c:v>0.984</c:v>
                 </c:pt>
                 <c:pt idx="2">
-                  <c:v>0.954</c:v>
+                  <c:v>0.957</c:v>
                 </c:pt>
                 <c:pt idx="3">
-                  <c:v>0.964</c:v>
+                  <c:v>0.962</c:v>
                 </c:pt>
                 <c:pt idx="4">
-                  <c:v>0.914</c:v>
+                  <c:v>0.969</c:v>
                 </c:pt>
               </c:numCache>
             </c:numRef>
@@ -1072,19 +1122,19 @@
                 <c:formatCode>General</c:formatCode>
                 <c:ptCount val="5"/>
                 <c:pt idx="0">
-                  <c:v>0.808</c:v>
+                  <c:v>0.804</c:v>
                 </c:pt>
                 <c:pt idx="1">
-                  <c:v>0.992</c:v>
+                  <c:v>0.975</c:v>
                 </c:pt>
                 <c:pt idx="2">
-                  <c:v>0.967</c:v>
+                  <c:v>0.968</c:v>
                 </c:pt>
                 <c:pt idx="3">
-                  <c:v>0.961</c:v>
+                  <c:v>0.938</c:v>
                 </c:pt>
                 <c:pt idx="4">
-                  <c:v>0.707</c:v>
+                  <c:v>0.901</c:v>
                 </c:pt>
               </c:numCache>
             </c:numRef>
@@ -1099,7 +1149,7 @@
               <c:strCache>
                 <c:ptCount val="1"/>
                 <c:pt idx="0">
-                  <c:v>Bal. Batch</c:v>
+                  <c:v>Bal.Batch</c:v>
                 </c:pt>
               </c:strCache>
             </c:strRef>
@@ -1167,19 +1217,19 @@
                 <c:formatCode>General</c:formatCode>
                 <c:ptCount val="5"/>
                 <c:pt idx="0">
-                  <c:v>0.815</c:v>
+                  <c:v>0.808</c:v>
                 </c:pt>
                 <c:pt idx="1">
-                  <c:v>0.981</c:v>
+                  <c:v>0.99</c:v>
                 </c:pt>
                 <c:pt idx="2">
-                  <c:v>0.972</c:v>
+                  <c:v>0.958</c:v>
                 </c:pt>
                 <c:pt idx="3">
-                  <c:v>0.97</c:v>
+                  <c:v>0.958</c:v>
                 </c:pt>
                 <c:pt idx="4">
-                  <c:v>0.986</c:v>
+                  <c:v>0.971</c:v>
                 </c:pt>
               </c:numCache>
             </c:numRef>
@@ -1194,7 +1244,7 @@
               <c:strCache>
                 <c:ptCount val="1"/>
                 <c:pt idx="0">
-                  <c:v>Combined</c:v>
+                  <c:v>Combo(50%)</c:v>
                 </c:pt>
               </c:strCache>
             </c:strRef>
@@ -1265,16 +1315,206 @@
                   <c:v>0.806</c:v>
                 </c:pt>
                 <c:pt idx="1">
-                  <c:v>0.992</c:v>
+                  <c:v>0.93</c:v>
                 </c:pt>
                 <c:pt idx="2">
-                  <c:v>0.903</c:v>
+                  <c:v>0.957</c:v>
                 </c:pt>
                 <c:pt idx="3">
-                  <c:v>0.966</c:v>
+                  <c:v>0.949</c:v>
                 </c:pt>
                 <c:pt idx="4">
+                  <c:v>0.975</c:v>
+                </c:pt>
+              </c:numCache>
+            </c:numRef>
+          </c:val>
+        </c:ser>
+        <c:ser>
+          <c:idx val="6"/>
+          <c:order val="6"/>
+          <c:tx>
+            <c:strRef>
+              <c:f>Sheet1!$H$1</c:f>
+              <c:strCache>
+                <c:ptCount val="1"/>
+                <c:pt idx="0">
+                  <c:v>Combo(25%)</c:v>
+                </c:pt>
+              </c:strCache>
+            </c:strRef>
+          </c:tx>
+          <c:spPr>
+            <a:solidFill>
+              <a:srgbClr val="64B5CD"/>
+            </a:solidFill>
+            <a:effectLst/>
+          </c:spPr>
+          <c:invertIfNegative val="0"/>
+          <c:dLbls>
+            <c:numFmt formatCode="#,##0" sourceLinked="0"/>
+            <c:txPr>
+              <a:bodyPr/>
+              <a:lstStyle/>
+              <a:p>
+                <a:pPr>
+                  <a:defRPr b="0" i="0" strike="noStrike" sz="1200" u="none">
+                    <a:solidFill>
+                      <a:srgbClr val="000000"/>
+                    </a:solidFill>
+                    <a:latin typeface="Arial"/>
+                  </a:defRPr>
+                </a:pPr>
+              </a:p>
+            </c:txPr>
+            <c:showLegendKey val="0"/>
+            <c:showVal val="0"/>
+            <c:showCatName val="0"/>
+            <c:showSerName val="0"/>
+            <c:showPercent val="0"/>
+            <c:showBubbleSize val="0"/>
+            <c:showLeaderLines val="0"/>
+          </c:dLbls>
+          <c:cat>
+            <c:multiLvlStrRef>
+              <c:f>Sheet1!$A$2:$A$6</c:f>
+              <c:multiLvlStrCache>
+                <c:ptCount val="5"/>
+                <c:lvl>
+                  <c:pt idx="0">
+                    <c:v>B1</c:v>
+                  </c:pt>
+                  <c:pt idx="1">
+                    <c:v>B2</c:v>
+                  </c:pt>
+                  <c:pt idx="2">
+                    <c:v>B3</c:v>
+                  </c:pt>
+                  <c:pt idx="3">
+                    <c:v>B4</c:v>
+                  </c:pt>
+                  <c:pt idx="4">
+                    <c:v>B5</c:v>
+                  </c:pt>
+                </c:lvl>
+              </c:multiLvlStrCache>
+            </c:multiLvlStrRef>
+          </c:cat>
+          <c:val>
+            <c:numRef>
+              <c:f>Sheet1!$H$2:$H$6</c:f>
+              <c:numCache>
+                <c:formatCode>General</c:formatCode>
+                <c:ptCount val="5"/>
+                <c:pt idx="0">
+                  <c:v>0.806</c:v>
+                </c:pt>
+                <c:pt idx="1">
+                  <c:v>0.973</c:v>
+                </c:pt>
+                <c:pt idx="2">
+                  <c:v>0.959</c:v>
+                </c:pt>
+                <c:pt idx="3">
                   <c:v>0.961</c:v>
+                </c:pt>
+                <c:pt idx="4">
+                  <c:v>0.955</c:v>
+                </c:pt>
+              </c:numCache>
+            </c:numRef>
+          </c:val>
+        </c:ser>
+        <c:ser>
+          <c:idx val="7"/>
+          <c:order val="7"/>
+          <c:tx>
+            <c:strRef>
+              <c:f>Sheet1!$I$1</c:f>
+              <c:strCache>
+                <c:ptCount val="1"/>
+                <c:pt idx="0">
+                  <c:v>Combo(B+A)</c:v>
+                </c:pt>
+              </c:strCache>
+            </c:strRef>
+          </c:tx>
+          <c:spPr>
+            <a:solidFill>
+              <a:srgbClr val="E07B39"/>
+            </a:solidFill>
+            <a:effectLst/>
+          </c:spPr>
+          <c:invertIfNegative val="0"/>
+          <c:dLbls>
+            <c:numFmt formatCode="#,##0" sourceLinked="0"/>
+            <c:txPr>
+              <a:bodyPr/>
+              <a:lstStyle/>
+              <a:p>
+                <a:pPr>
+                  <a:defRPr b="0" i="0" strike="noStrike" sz="1200" u="none">
+                    <a:solidFill>
+                      <a:srgbClr val="000000"/>
+                    </a:solidFill>
+                    <a:latin typeface="Arial"/>
+                  </a:defRPr>
+                </a:pPr>
+              </a:p>
+            </c:txPr>
+            <c:showLegendKey val="0"/>
+            <c:showVal val="0"/>
+            <c:showCatName val="0"/>
+            <c:showSerName val="0"/>
+            <c:showPercent val="0"/>
+            <c:showBubbleSize val="0"/>
+            <c:showLeaderLines val="0"/>
+          </c:dLbls>
+          <c:cat>
+            <c:multiLvlStrRef>
+              <c:f>Sheet1!$A$2:$A$6</c:f>
+              <c:multiLvlStrCache>
+                <c:ptCount val="5"/>
+                <c:lvl>
+                  <c:pt idx="0">
+                    <c:v>B1</c:v>
+                  </c:pt>
+                  <c:pt idx="1">
+                    <c:v>B2</c:v>
+                  </c:pt>
+                  <c:pt idx="2">
+                    <c:v>B3</c:v>
+                  </c:pt>
+                  <c:pt idx="3">
+                    <c:v>B4</c:v>
+                  </c:pt>
+                  <c:pt idx="4">
+                    <c:v>B5</c:v>
+                  </c:pt>
+                </c:lvl>
+              </c:multiLvlStrCache>
+            </c:multiLvlStrRef>
+          </c:cat>
+          <c:val>
+            <c:numRef>
+              <c:f>Sheet1!$I$2:$I$6</c:f>
+              <c:numCache>
+                <c:formatCode>General</c:formatCode>
+                <c:ptCount val="5"/>
+                <c:pt idx="0">
+                  <c:v>0.807</c:v>
+                </c:pt>
+                <c:pt idx="1">
+                  <c:v>0.971</c:v>
+                </c:pt>
+                <c:pt idx="2">
+                  <c:v>0.965</c:v>
+                </c:pt>
+                <c:pt idx="3">
+                  <c:v>0.953</c:v>
+                </c:pt>
+                <c:pt idx="4">
+                  <c:v>0.974</c:v>
                 </c:pt>
               </c:numCache>
             </c:numRef>
@@ -1419,7 +1659,7 @@
         <a:lstStyle/>
         <a:p>
           <a:pPr>
-            <a:defRPr sz="1100">      </a:defRPr>
+            <a:defRPr sz="1000">      </a:defRPr>
           </a:pPr>
           <a:endParaRPr lang="en-US"/>
         </a:p>
@@ -2388,6 +2628,182 @@
             <a:fld id="{F7021451-1387-4CA6-816F-3879F97B5CBC}" type="slidenum">
               <a:rPr lang="en-US"/>
               <a:t>15</a:t>
+            </a:fld>
+            <a:endParaRPr lang="en-US"/>
+          </a:p>
+        </p:txBody>
+      </p:sp>
+    </p:spTree>
+    <p:extLst>
+      <p:ext uri="{BB962C8B-B14F-4D97-AF65-F5344CB8AC3E}">
+        <p14:creationId xmlns:p14="http://schemas.microsoft.com/office/powerpoint/2010/main" val="1024086991"/>
+      </p:ext>
+    </p:extLst>
+  </p:cSld>
+  <p:clrMapOvr>
+    <a:masterClrMapping/>
+  </p:clrMapOvr>
+</p:notes>
+</file>
+
+<file path=ppt/notesSlides/notesSlide16.xml><?xml version="1.0" encoding="utf-8"?>
+<p:notes xmlns:a="http://schemas.openxmlformats.org/drawingml/2006/main" xmlns:r="http://schemas.openxmlformats.org/officeDocument/2006/relationships" xmlns:p="http://schemas.openxmlformats.org/presentationml/2006/main">
+  <p:cSld>
+    <p:spTree>
+      <p:nvGrpSpPr>
+        <p:cNvPr id="1" name=""/>
+        <p:cNvGrpSpPr/>
+        <p:nvPr/>
+      </p:nvGrpSpPr>
+      <p:grpSpPr>
+        <a:xfrm>
+          <a:off x="0" y="0"/>
+          <a:ext cx="0" cy="0"/>
+          <a:chOff x="0" y="0"/>
+          <a:chExt cx="0" cy="0"/>
+        </a:xfrm>
+      </p:grpSpPr>
+      <p:sp>
+        <p:nvSpPr>
+          <p:cNvPr id="2" name="Slide Image Placeholder 1"/>
+          <p:cNvSpPr>
+            <a:spLocks noGrp="1" noRot="1" noChangeAspect="1"/>
+          </p:cNvSpPr>
+          <p:nvPr>
+            <p:ph type="sldImg"/>
+          </p:nvPr>
+        </p:nvSpPr>
+        <p:spPr/>
+      </p:sp>
+      <p:sp>
+        <p:nvSpPr>
+          <p:cNvPr id="3" name="Notes Placeholder 2"/>
+          <p:cNvSpPr>
+            <a:spLocks noGrp="1"/>
+          </p:cNvSpPr>
+          <p:nvPr>
+            <p:ph type="body" idx="1"/>
+          </p:nvPr>
+        </p:nvSpPr>
+        <p:spPr/>
+        <p:txBody>
+          <a:bodyPr/>
+          <a:lstStyle/>
+          <a:p>
+            <a:r>
+              <a:rPr lang="en-US" dirty="0"/>
+              <a:t/>
+            </a:r>
+            <a:endParaRPr lang="en-US" dirty="0"/>
+          </a:p>
+        </p:txBody>
+      </p:sp>
+      <p:sp>
+        <p:nvSpPr>
+          <p:cNvPr id="4" name="Slide Number Placeholder 3"/>
+          <p:cNvSpPr>
+            <a:spLocks noGrp="1"/>
+          </p:cNvSpPr>
+          <p:nvPr>
+            <p:ph type="sldNum" sz="quarter" idx="10"/>
+          </p:nvPr>
+        </p:nvSpPr>
+        <p:spPr/>
+        <p:txBody>
+          <a:bodyPr/>
+          <a:lstStyle/>
+          <a:p>
+            <a:fld id="{F7021451-1387-4CA6-816F-3879F97B5CBC}" type="slidenum">
+              <a:rPr lang="en-US"/>
+              <a:t>16</a:t>
+            </a:fld>
+            <a:endParaRPr lang="en-US"/>
+          </a:p>
+        </p:txBody>
+      </p:sp>
+    </p:spTree>
+    <p:extLst>
+      <p:ext uri="{BB962C8B-B14F-4D97-AF65-F5344CB8AC3E}">
+        <p14:creationId xmlns:p14="http://schemas.microsoft.com/office/powerpoint/2010/main" val="1024086991"/>
+      </p:ext>
+    </p:extLst>
+  </p:cSld>
+  <p:clrMapOvr>
+    <a:masterClrMapping/>
+  </p:clrMapOvr>
+</p:notes>
+</file>
+
+<file path=ppt/notesSlides/notesSlide17.xml><?xml version="1.0" encoding="utf-8"?>
+<p:notes xmlns:a="http://schemas.openxmlformats.org/drawingml/2006/main" xmlns:r="http://schemas.openxmlformats.org/officeDocument/2006/relationships" xmlns:p="http://schemas.openxmlformats.org/presentationml/2006/main">
+  <p:cSld>
+    <p:spTree>
+      <p:nvGrpSpPr>
+        <p:cNvPr id="1" name=""/>
+        <p:cNvGrpSpPr/>
+        <p:nvPr/>
+      </p:nvGrpSpPr>
+      <p:grpSpPr>
+        <a:xfrm>
+          <a:off x="0" y="0"/>
+          <a:ext cx="0" cy="0"/>
+          <a:chOff x="0" y="0"/>
+          <a:chExt cx="0" cy="0"/>
+        </a:xfrm>
+      </p:grpSpPr>
+      <p:sp>
+        <p:nvSpPr>
+          <p:cNvPr id="2" name="Slide Image Placeholder 1"/>
+          <p:cNvSpPr>
+            <a:spLocks noGrp="1" noRot="1" noChangeAspect="1"/>
+          </p:cNvSpPr>
+          <p:nvPr>
+            <p:ph type="sldImg"/>
+          </p:nvPr>
+        </p:nvSpPr>
+        <p:spPr/>
+      </p:sp>
+      <p:sp>
+        <p:nvSpPr>
+          <p:cNvPr id="3" name="Notes Placeholder 2"/>
+          <p:cNvSpPr>
+            <a:spLocks noGrp="1"/>
+          </p:cNvSpPr>
+          <p:nvPr>
+            <p:ph type="body" idx="1"/>
+          </p:nvPr>
+        </p:nvSpPr>
+        <p:spPr/>
+        <p:txBody>
+          <a:bodyPr/>
+          <a:lstStyle/>
+          <a:p>
+            <a:r>
+              <a:rPr lang="en-US" dirty="0"/>
+              <a:t/>
+            </a:r>
+            <a:endParaRPr lang="en-US" dirty="0"/>
+          </a:p>
+        </p:txBody>
+      </p:sp>
+      <p:sp>
+        <p:nvSpPr>
+          <p:cNvPr id="4" name="Slide Number Placeholder 3"/>
+          <p:cNvSpPr>
+            <a:spLocks noGrp="1"/>
+          </p:cNvSpPr>
+          <p:nvPr>
+            <p:ph type="sldNum" sz="quarter" idx="10"/>
+          </p:nvPr>
+        </p:nvSpPr>
+        <p:spPr/>
+        <p:txBody>
+          <a:bodyPr/>
+          <a:lstStyle/>
+          <a:p>
+            <a:fld id="{F7021451-1387-4CA6-816F-3879F97B5CBC}" type="slidenum">
+              <a:rPr lang="en-US"/>
+              <a:t>17</a:t>
             </a:fld>
             <a:endParaRPr lang="en-US"/>
           </a:p>
@@ -3449,26 +3865,6 @@
         </p:nvSpPr>
         <p:spPr>
           <a:xfrm>
-            <a:off x="0" y="0"/>
-            <a:ext cx="12188952" cy="6858000"/>
-          </a:xfrm>
-          <a:prstGeom prst="rect">
-            <a:avLst/>
-          </a:prstGeom>
-          <a:solidFill>
-            <a:srgbClr val="141B4D"/>
-          </a:solidFill>
-          <a:ln/>
-        </p:spPr>
-      </p:sp>
-      <p:sp>
-        <p:nvSpPr>
-          <p:cNvPr id="3" name="Shape 1"/>
-          <p:cNvSpPr/>
-          <p:nvPr/>
-        </p:nvSpPr>
-        <p:spPr>
-          <a:xfrm>
             <a:off x="9692640" y="-1188720"/>
             <a:ext cx="4572000" cy="4572000"/>
           </a:xfrm>
@@ -3483,7 +3879,7 @@
       </p:sp>
       <p:sp>
         <p:nvSpPr>
-          <p:cNvPr id="4" name="Shape 2"/>
+          <p:cNvPr id="3" name="Shape 1"/>
           <p:cNvSpPr/>
           <p:nvPr/>
         </p:nvSpPr>
@@ -3505,7 +3901,7 @@
       </p:sp>
       <p:sp>
         <p:nvSpPr>
-          <p:cNvPr id="5" name="Shape 3"/>
+          <p:cNvPr id="4" name="Shape 2"/>
           <p:cNvSpPr/>
           <p:nvPr/>
         </p:nvSpPr>
@@ -3525,13 +3921,52 @@
       </p:sp>
       <p:sp>
         <p:nvSpPr>
+          <p:cNvPr id="5" name="Text 3"/>
+          <p:cNvSpPr txBox="1"/>
+          <p:nvPr/>
+        </p:nvSpPr>
+        <p:spPr>
+          <a:xfrm>
+            <a:off x="731520" y="1417320"/>
+            <a:ext cx="9144000" cy="411480"/>
+          </a:xfrm>
+          <a:prstGeom prst="rect">
+            <a:avLst/>
+          </a:prstGeom>
+          <a:noFill/>
+          <a:ln/>
+        </p:spPr>
+        <p:txBody>
+          <a:bodyPr wrap="square" lIns="0" tIns="0" rIns="0" bIns="0" rtlCol="0" anchor="ctr"/>
+          <a:lstStyle/>
+          <a:p>
+            <a:pPr indent="0" marL="0">
+              <a:buNone/>
+            </a:pPr>
+            <a:r>
+              <a:rPr lang="en-US" sz="1400" b="1" spc="300" kern="0" dirty="0">
+                <a:solidFill>
+                  <a:srgbClr val="E63946"/>
+                </a:solidFill>
+                <a:latin typeface="Calibri" pitchFamily="34" charset="0"/>
+                <a:ea typeface="Calibri" pitchFamily="34" charset="-122"/>
+                <a:cs typeface="Calibri" pitchFamily="34" charset="-120"/>
+              </a:rPr>
+              <a:t>DA3 REVISION</a:t>
+            </a:r>
+            <a:endParaRPr lang="en-US" sz="1400" dirty="0"/>
+          </a:p>
+        </p:txBody>
+      </p:sp>
+      <p:sp>
+        <p:nvSpPr>
           <p:cNvPr id="6" name="Text 4"/>
           <p:cNvSpPr txBox="1"/>
           <p:nvPr/>
         </p:nvSpPr>
         <p:spPr>
           <a:xfrm>
-            <a:off x="731520" y="1920240"/>
+            <a:off x="731520" y="1874520"/>
             <a:ext cx="9875520" cy="1554480"/>
           </a:xfrm>
           <a:prstGeom prst="rect">
@@ -3551,7 +3986,7 @@
               <a:buNone/>
             </a:pPr>
             <a:r>
-              <a:rPr lang="en-US" sz="3400" b="1" dirty="0">
+              <a:rPr lang="en-US" sz="3200" b="1" dirty="0">
                 <a:solidFill>
                   <a:srgbClr val="FFFFFF"/>
                 </a:solidFill>
@@ -3561,7 +3996,7 @@
               </a:rPr>
               <a:t>DATA BALANCING &amp; AUGMENTATION</a:t>
             </a:r>
-            <a:endParaRPr lang="en-US" sz="3400" dirty="0"/>
+            <a:endParaRPr lang="en-US" sz="3200" dirty="0"/>
           </a:p>
           <a:p>
             <a:pPr indent="0" marL="0">
@@ -3571,7 +4006,7 @@
               <a:buNone/>
             </a:pPr>
             <a:r>
-              <a:rPr lang="en-US" sz="3400" b="1" dirty="0">
+              <a:rPr lang="en-US" sz="3200" b="1" dirty="0">
                 <a:solidFill>
                   <a:srgbClr val="FFFFFF"/>
                 </a:solidFill>
@@ -3581,7 +4016,7 @@
               </a:rPr>
               <a:t>STRATEGIES FOR HOTSPOT DETECTION</a:t>
             </a:r>
-            <a:endParaRPr lang="en-US" sz="3400" dirty="0"/>
+            <a:endParaRPr lang="en-US" sz="3200" dirty="0"/>
           </a:p>
         </p:txBody>
       </p:sp>
@@ -3593,7 +4028,7 @@
         </p:nvSpPr>
         <p:spPr>
           <a:xfrm>
-            <a:off x="731520" y="3429000"/>
+            <a:off x="731520" y="3383280"/>
             <a:ext cx="9601200" cy="457200"/>
           </a:xfrm>
           <a:prstGeom prst="rect">
@@ -3610,7 +4045,7 @@
               <a:buNone/>
             </a:pPr>
             <a:r>
-              <a:rPr lang="en-US" sz="1700" i="1" dirty="0">
+              <a:rPr lang="en-US" sz="1600" i="1" dirty="0">
                 <a:solidFill>
                   <a:srgbClr val="CADCFC"/>
                 </a:solidFill>
@@ -3618,9 +4053,9 @@
                 <a:ea typeface="Calibri" pitchFamily="34" charset="-122"/>
                 <a:cs typeface="Calibri" pitchFamily="34" charset="-120"/>
               </a:rPr>
-              <a:t>Lithography Hotspot Detection on the ICCAD-12 Benchmark</a:t>
-            </a:r>
-            <a:endParaRPr lang="en-US" sz="1700" dirty="0"/>
+              <a:t>Lithography Hotspot Detection on the ICCAD-12 Benchmark: Revised per Reviewer Feedback</a:t>
+            </a:r>
+            <a:endParaRPr lang="en-US" sz="1600" dirty="0"/>
           </a:p>
         </p:txBody>
       </p:sp>
@@ -3632,7 +4067,7 @@
         </p:nvSpPr>
         <p:spPr>
           <a:xfrm>
-            <a:off x="731520" y="4160520"/>
+            <a:off x="731520" y="4114800"/>
             <a:ext cx="1463040" cy="36576"/>
           </a:xfrm>
           <a:prstGeom prst="rect">
@@ -3652,7 +4087,7 @@
         </p:nvSpPr>
         <p:spPr>
           <a:xfrm>
-            <a:off x="731520" y="4434840"/>
+            <a:off x="731520" y="4389120"/>
             <a:ext cx="9601200" cy="365760"/>
           </a:xfrm>
           <a:prstGeom prst="rect">
@@ -3677,7 +4112,7 @@
                 <a:ea typeface="Calibri" pitchFamily="34" charset="-122"/>
                 <a:cs typeface="Calibri" pitchFamily="34" charset="-120"/>
               </a:rPr>
-              <a:t>BEVD402L — AI and Machine Learning for IC  |  Digital Assignment II  |  Group 11</a:t>
+              <a:t>BEVD402L: AI and Machine Learning for IC  |  Digital Assignment III  |  Group 11</a:t>
             </a:r>
             <a:endParaRPr lang="en-US" sz="1300" dirty="0"/>
           </a:p>
@@ -3691,7 +4126,7 @@
         </p:nvSpPr>
         <p:spPr>
           <a:xfrm>
-            <a:off x="731520" y="5029200"/>
+            <a:off x="731520" y="4983480"/>
             <a:ext cx="3017520" cy="731520"/>
           </a:xfrm>
           <a:prstGeom prst="rect">
@@ -3747,7 +4182,7 @@
         </p:nvSpPr>
         <p:spPr>
           <a:xfrm>
-            <a:off x="3931920" y="5029200"/>
+            <a:off x="3931920" y="4983480"/>
             <a:ext cx="3017520" cy="731520"/>
           </a:xfrm>
           <a:prstGeom prst="rect">
@@ -3792,6 +4227,45 @@
               <a:t>23BVD1067</a:t>
             </a:r>
             <a:endParaRPr lang="en-US" sz="1400" dirty="0"/>
+          </a:p>
+        </p:txBody>
+      </p:sp>
+      <p:sp>
+        <p:nvSpPr>
+          <p:cNvPr id="12" name="Text 10"/>
+          <p:cNvSpPr txBox="1"/>
+          <p:nvPr/>
+        </p:nvSpPr>
+        <p:spPr>
+          <a:xfrm>
+            <a:off x="731520" y="6126480"/>
+            <a:ext cx="10515600" cy="365760"/>
+          </a:xfrm>
+          <a:prstGeom prst="rect">
+            <a:avLst/>
+          </a:prstGeom>
+          <a:noFill/>
+          <a:ln/>
+        </p:spPr>
+        <p:txBody>
+          <a:bodyPr wrap="square" lIns="0" tIns="0" rIns="0" bIns="0" rtlCol="0" anchor="ctr"/>
+          <a:lstStyle/>
+          <a:p>
+            <a:pPr indent="0" marL="0">
+              <a:buNone/>
+            </a:pPr>
+            <a:r>
+              <a:rPr lang="en-US" sz="1100" dirty="0">
+                <a:solidFill>
+                  <a:srgbClr val="8B93C4"/>
+                </a:solidFill>
+                <a:latin typeface="Calibri" pitchFamily="34" charset="0"/>
+                <a:ea typeface="Calibri" pitchFamily="34" charset="-122"/>
+                <a:cs typeface="Calibri" pitchFamily="34" charset="-120"/>
+              </a:rPr>
+              <a:t>Code: https://github.com/&lt;your-github-username&gt;/Lithography-Hotspot-Detection-G11</a:t>
+            </a:r>
+            <a:endParaRPr lang="en-US" sz="1100" dirty="0"/>
           </a:p>
         </p:txBody>
       </p:sp>
@@ -3891,7 +4365,7 @@
         <p:spPr>
           <a:xfrm>
             <a:off x="457200" y="6473952"/>
-            <a:ext cx="8229600" cy="274320"/>
+            <a:ext cx="9144000" cy="274320"/>
           </a:xfrm>
           <a:prstGeom prst="rect">
             <a:avLst/>
@@ -3915,7 +4389,7 @@
                 <a:ea typeface="Calibri" pitchFamily="34" charset="-122"/>
                 <a:cs typeface="Calibri" pitchFamily="34" charset="-120"/>
               </a:rPr>
-              <a:t>Group 11 · Data Balancing and Augmentation Strategies for Hotspot Detection</a:t>
+              <a:t>Group 11 (DA3 Revision) · Data Balancing and Augmentation Strategies for Hotspot Detection</a:t>
             </a:r>
             <a:endParaRPr lang="en-US" sz="900" dirty="0"/>
           </a:p>
@@ -4000,23 +4474,34 @@
         </p:nvSpPr>
         <p:spPr>
           <a:xfrm>
-            <a:off x="548640" y="411480"/>
-            <a:ext cx="11091672" cy="640080"/>
-          </a:xfrm>
-          <a:prstGeom prst="rect">
-            <a:avLst/>
-          </a:prstGeom>
-          <a:noFill/>
-          <a:ln/>
-        </p:spPr>
-        <p:txBody>
-          <a:bodyPr wrap="square" lIns="0" tIns="0" rIns="0" bIns="0" rtlCol="0" anchor="ctr"/>
-          <a:lstStyle/>
-          <a:p>
-            <a:pPr indent="0" marL="0">
-              <a:buNone/>
-            </a:pPr>
-            <a:endParaRPr lang="en-US" sz="3000" dirty="0"/>
+            <a:off x="640080" y="457200"/>
+            <a:ext cx="7315200" cy="365760"/>
+          </a:xfrm>
+          <a:prstGeom prst="rect">
+            <a:avLst/>
+          </a:prstGeom>
+          <a:noFill/>
+          <a:ln/>
+        </p:spPr>
+        <p:txBody>
+          <a:bodyPr wrap="square" lIns="0" tIns="0" rIns="0" bIns="0" rtlCol="0" anchor="ctr"/>
+          <a:lstStyle/>
+          <a:p>
+            <a:pPr indent="0" marL="0">
+              <a:buNone/>
+            </a:pPr>
+            <a:r>
+              <a:rPr lang="en-US" sz="1300" b="1" spc="200" kern="0" dirty="0">
+                <a:solidFill>
+                  <a:srgbClr val="E63946"/>
+                </a:solidFill>
+                <a:latin typeface="Calibri" pitchFamily="34" charset="0"/>
+                <a:ea typeface="Calibri" pitchFamily="34" charset="-122"/>
+                <a:cs typeface="Calibri" pitchFamily="34" charset="-120"/>
+              </a:rPr>
+              <a:t>KEY FINDING #1</a:t>
+            </a:r>
+            <a:endParaRPr lang="en-US" sz="1300" dirty="0"/>
           </a:p>
         </p:txBody>
       </p:sp>
@@ -4028,63 +4513,24 @@
         </p:nvSpPr>
         <p:spPr>
           <a:xfrm>
-            <a:off x="640080" y="457200"/>
-            <a:ext cx="5486400" cy="365760"/>
-          </a:xfrm>
-          <a:prstGeom prst="rect">
-            <a:avLst/>
-          </a:prstGeom>
-          <a:noFill/>
-          <a:ln/>
-        </p:spPr>
-        <p:txBody>
-          <a:bodyPr wrap="square" lIns="0" tIns="0" rIns="0" bIns="0" rtlCol="0" anchor="ctr"/>
-          <a:lstStyle/>
-          <a:p>
-            <a:pPr indent="0" marL="0">
-              <a:buNone/>
-            </a:pPr>
-            <a:r>
-              <a:rPr lang="en-US" sz="1300" b="1" spc="200" kern="0" dirty="0">
-                <a:solidFill>
-                  <a:srgbClr val="E63946"/>
-                </a:solidFill>
-                <a:latin typeface="Calibri" pitchFamily="34" charset="0"/>
-                <a:ea typeface="Calibri" pitchFamily="34" charset="-122"/>
-                <a:cs typeface="Calibri" pitchFamily="34" charset="-120"/>
-              </a:rPr>
-              <a:t>KEY FINDING</a:t>
-            </a:r>
-            <a:endParaRPr lang="en-US" sz="1300" dirty="0"/>
-          </a:p>
-        </p:txBody>
-      </p:sp>
-      <p:sp>
-        <p:nvSpPr>
-          <p:cNvPr id="4" name="Text 2"/>
-          <p:cNvSpPr txBox="1"/>
-          <p:nvPr/>
-        </p:nvSpPr>
-        <p:spPr>
-          <a:xfrm>
             <a:off x="640080" y="822960"/>
-            <a:ext cx="10972800" cy="640080"/>
-          </a:xfrm>
-          <a:prstGeom prst="rect">
-            <a:avLst/>
-          </a:prstGeom>
-          <a:noFill/>
-          <a:ln/>
-        </p:spPr>
-        <p:txBody>
-          <a:bodyPr wrap="square" lIns="0" tIns="0" rIns="0" bIns="0" rtlCol="0" anchor="ctr"/>
-          <a:lstStyle/>
-          <a:p>
-            <a:pPr indent="0" marL="0">
-              <a:buNone/>
-            </a:pPr>
-            <a:r>
-              <a:rPr lang="en-US" sz="2200" b="1" dirty="0">
+            <a:ext cx="10972800" cy="914400"/>
+          </a:xfrm>
+          <a:prstGeom prst="rect">
+            <a:avLst/>
+          </a:prstGeom>
+          <a:noFill/>
+          <a:ln/>
+        </p:spPr>
+        <p:txBody>
+          <a:bodyPr wrap="square" lIns="0" tIns="0" rIns="0" bIns="0" rtlCol="0" anchor="ctr"/>
+          <a:lstStyle/>
+          <a:p>
+            <a:pPr indent="0" marL="0">
+              <a:buNone/>
+            </a:pPr>
+            <a:r>
+              <a:rPr lang="en-US" sz="2400" b="1" dirty="0">
                 <a:solidFill>
                   <a:srgbClr val="FFFFFF"/>
                 </a:solidFill>
@@ -4092,26 +4538,204 @@
                 <a:ea typeface="Cambria" pitchFamily="34" charset="-122"/>
                 <a:cs typeface="Cambria" pitchFamily="34" charset="-120"/>
               </a:rPr>
-              <a:t>One strategy wins almost everywhere. One fails when it matters most.</a:t>
-            </a:r>
-            <a:endParaRPr lang="en-US" sz="2200" dirty="0"/>
-          </a:p>
-        </p:txBody>
-      </p:sp>
-      <p:sp>
-        <p:nvSpPr>
-          <p:cNvPr id="5" name="Shape 3"/>
+              <a:t>Once training is fair, balanced accuracy barely tells strategies apart</a:t>
+            </a:r>
+            <a:endParaRPr lang="en-US" sz="2400" dirty="0"/>
+          </a:p>
+        </p:txBody>
+      </p:sp>
+      <p:sp>
+        <p:nvSpPr>
+          <p:cNvPr id="4" name="Shape 2"/>
           <p:cNvSpPr/>
           <p:nvPr/>
         </p:nvSpPr>
         <p:spPr>
           <a:xfrm>
-            <a:off x="640080" y="1737360"/>
-            <a:ext cx="5394960" cy="4480560"/>
+            <a:off x="640080" y="1920240"/>
+            <a:ext cx="5394960" cy="4206240"/>
           </a:xfrm>
           <a:prstGeom prst="roundRect">
             <a:avLst>
-              <a:gd name="adj" fmla="val 2041"/>
+              <a:gd name="adj" fmla="val 2174"/>
+            </a:avLst>
+          </a:prstGeom>
+          <a:solidFill>
+            <a:srgbClr val="2A1F4D"/>
+          </a:solidFill>
+          <a:ln/>
+        </p:spPr>
+      </p:sp>
+      <p:sp>
+        <p:nvSpPr>
+          <p:cNvPr id="5" name="Text 3"/>
+          <p:cNvSpPr txBox="1"/>
+          <p:nvPr/>
+        </p:nvSpPr>
+        <p:spPr>
+          <a:xfrm>
+            <a:off x="914400" y="2148840"/>
+            <a:ext cx="4846320" cy="365760"/>
+          </a:xfrm>
+          <a:prstGeom prst="rect">
+            <a:avLst/>
+          </a:prstGeom>
+          <a:noFill/>
+          <a:ln/>
+        </p:spPr>
+        <p:txBody>
+          <a:bodyPr wrap="square" lIns="0" tIns="0" rIns="0" bIns="0" rtlCol="0" anchor="ctr"/>
+          <a:lstStyle/>
+          <a:p>
+            <a:pPr indent="0" marL="0">
+              <a:buNone/>
+            </a:pPr>
+            <a:r>
+              <a:rPr lang="en-US" sz="1300" b="1" dirty="0">
+                <a:solidFill>
+                  <a:srgbClr val="C9A8F5"/>
+                </a:solidFill>
+                <a:latin typeface="Calibri" pitchFamily="34" charset="0"/>
+                <a:ea typeface="Calibri" pitchFamily="34" charset="-122"/>
+                <a:cs typeface="Calibri" pitchFamily="34" charset="-120"/>
+              </a:rPr>
+              <a:t>DA2 (unequal updates, 1 seed)</a:t>
+            </a:r>
+            <a:endParaRPr lang="en-US" sz="1300" dirty="0"/>
+          </a:p>
+        </p:txBody>
+      </p:sp>
+      <p:sp>
+        <p:nvSpPr>
+          <p:cNvPr id="6" name="Text 4"/>
+          <p:cNvSpPr txBox="1"/>
+          <p:nvPr/>
+        </p:nvSpPr>
+        <p:spPr>
+          <a:xfrm>
+            <a:off x="914400" y="2514600"/>
+            <a:ext cx="4846320" cy="822960"/>
+          </a:xfrm>
+          <a:prstGeom prst="rect">
+            <a:avLst/>
+          </a:prstGeom>
+          <a:noFill/>
+          <a:ln/>
+        </p:spPr>
+        <p:txBody>
+          <a:bodyPr wrap="square" lIns="0" tIns="0" rIns="0" bIns="0" rtlCol="0" anchor="ctr"/>
+          <a:lstStyle/>
+          <a:p>
+            <a:pPr indent="0" marL="0">
+              <a:buNone/>
+            </a:pPr>
+            <a:r>
+              <a:rPr lang="en-US" sz="3600" b="1" dirty="0">
+                <a:solidFill>
+                  <a:srgbClr val="FFFFFF"/>
+                </a:solidFill>
+                <a:latin typeface="Cambria" pitchFamily="34" charset="0"/>
+                <a:ea typeface="Cambria" pitchFamily="34" charset="-122"/>
+                <a:cs typeface="Cambria" pitchFamily="34" charset="-120"/>
+              </a:rPr>
+              <a:t>0.779 – 0.945</a:t>
+            </a:r>
+            <a:endParaRPr lang="en-US" sz="3600" dirty="0"/>
+          </a:p>
+        </p:txBody>
+      </p:sp>
+      <p:sp>
+        <p:nvSpPr>
+          <p:cNvPr id="7" name="Text 5"/>
+          <p:cNvSpPr txBox="1"/>
+          <p:nvPr/>
+        </p:nvSpPr>
+        <p:spPr>
+          <a:xfrm>
+            <a:off x="914400" y="3246120"/>
+            <a:ext cx="4846320" cy="457200"/>
+          </a:xfrm>
+          <a:prstGeom prst="rect">
+            <a:avLst/>
+          </a:prstGeom>
+          <a:noFill/>
+          <a:ln/>
+        </p:spPr>
+        <p:txBody>
+          <a:bodyPr wrap="square" lIns="0" tIns="0" rIns="0" bIns="0" rtlCol="0" anchor="ctr"/>
+          <a:lstStyle/>
+          <a:p>
+            <a:pPr indent="0" marL="0">
+              <a:buNone/>
+            </a:pPr>
+            <a:r>
+              <a:rPr lang="en-US" sz="1250" dirty="0">
+                <a:solidFill>
+                  <a:srgbClr val="D8C8F0"/>
+                </a:solidFill>
+                <a:latin typeface="Calibri" pitchFamily="34" charset="0"/>
+                <a:ea typeface="Calibri" pitchFamily="34" charset="-122"/>
+                <a:cs typeface="Calibri" pitchFamily="34" charset="-120"/>
+              </a:rPr>
+              <a:t>17-point spread: looked like strategy choice mattered a lot</a:t>
+            </a:r>
+            <a:endParaRPr lang="en-US" sz="1250" dirty="0"/>
+          </a:p>
+        </p:txBody>
+      </p:sp>
+      <p:sp>
+        <p:nvSpPr>
+          <p:cNvPr id="8" name="Text 6"/>
+          <p:cNvSpPr txBox="1"/>
+          <p:nvPr/>
+        </p:nvSpPr>
+        <p:spPr>
+          <a:xfrm>
+            <a:off x="914400" y="3840480"/>
+            <a:ext cx="4846320" cy="914400"/>
+          </a:xfrm>
+          <a:prstGeom prst="rect">
+            <a:avLst/>
+          </a:prstGeom>
+          <a:noFill/>
+          <a:ln/>
+        </p:spPr>
+        <p:txBody>
+          <a:bodyPr wrap="square" lIns="0" tIns="0" rIns="0" bIns="0" rtlCol="0" anchor="ctr"/>
+          <a:lstStyle/>
+          <a:p>
+            <a:pPr indent="0" marL="0">
+              <a:buNone/>
+            </a:pPr>
+            <a:r>
+              <a:rPr lang="en-US" sz="1200" i="1" dirty="0">
+                <a:solidFill>
+                  <a:srgbClr val="D8C8F0"/>
+                </a:solidFill>
+                <a:latin typeface="Calibri" pitchFamily="34" charset="0"/>
+                <a:ea typeface="Calibri" pitchFamily="34" charset="-122"/>
+                <a:cs typeface="Calibri" pitchFamily="34" charset="-120"/>
+              </a:rPr>
+              <a:t>RUS appeared to collapse to 0% recall on the most extreme benchmark. That was our DA2 headline claim.</a:t>
+            </a:r>
+            <a:endParaRPr lang="en-US" sz="1200" dirty="0"/>
+          </a:p>
+        </p:txBody>
+      </p:sp>
+      <p:sp>
+        <p:nvSpPr>
+          <p:cNvPr id="9" name="Shape 7"/>
+          <p:cNvSpPr/>
+          <p:nvPr/>
+        </p:nvSpPr>
+        <p:spPr>
+          <a:xfrm>
+            <a:off x="6172200" y="1920240"/>
+            <a:ext cx="5394960" cy="4206240"/>
+          </a:xfrm>
+          <a:prstGeom prst="roundRect">
+            <a:avLst>
+              <a:gd name="adj" fmla="val 2174"/>
             </a:avLst>
           </a:prstGeom>
           <a:solidFill>
@@ -4122,13 +4746,13 @@
       </p:sp>
       <p:sp>
         <p:nvSpPr>
-          <p:cNvPr id="6" name="Text 4"/>
-          <p:cNvSpPr txBox="1"/>
-          <p:nvPr/>
-        </p:nvSpPr>
-        <p:spPr>
-          <a:xfrm>
-            <a:off x="914400" y="1965960"/>
+          <p:cNvPr id="10" name="Text 8"/>
+          <p:cNvSpPr txBox="1"/>
+          <p:nvPr/>
+        </p:nvSpPr>
+        <p:spPr>
+          <a:xfrm>
+            <a:off x="6446520" y="2148840"/>
             <a:ext cx="4846320" cy="365760"/>
           </a:xfrm>
           <a:prstGeom prst="rect">
@@ -4153,7 +4777,7 @@
                 <a:ea typeface="Calibri" pitchFamily="34" charset="-122"/>
                 <a:cs typeface="Calibri" pitchFamily="34" charset="-120"/>
               </a:rPr>
-              <a:t>BALANCED MINI-BATCH SAMPLING</a:t>
+              <a:t>DA3 (equal steps, 3 seeds)</a:t>
             </a:r>
             <a:endParaRPr lang="en-US" sz="1300" dirty="0"/>
           </a:p>
@@ -4161,30 +4785,30 @@
       </p:sp>
       <p:sp>
         <p:nvSpPr>
-          <p:cNvPr id="7" name="Text 5"/>
-          <p:cNvSpPr txBox="1"/>
-          <p:nvPr/>
-        </p:nvSpPr>
-        <p:spPr>
-          <a:xfrm>
-            <a:off x="914400" y="2331720"/>
-            <a:ext cx="4846320" cy="914400"/>
-          </a:xfrm>
-          <a:prstGeom prst="rect">
-            <a:avLst/>
-          </a:prstGeom>
-          <a:noFill/>
-          <a:ln/>
-        </p:spPr>
-        <p:txBody>
-          <a:bodyPr wrap="square" lIns="0" tIns="0" rIns="0" bIns="0" rtlCol="0" anchor="ctr"/>
-          <a:lstStyle/>
-          <a:p>
-            <a:pPr indent="0" marL="0">
-              <a:buNone/>
-            </a:pPr>
-            <a:r>
-              <a:rPr lang="en-US" sz="4600" b="1" dirty="0">
+          <p:cNvPr id="11" name="Text 9"/>
+          <p:cNvSpPr txBox="1"/>
+          <p:nvPr/>
+        </p:nvSpPr>
+        <p:spPr>
+          <a:xfrm>
+            <a:off x="6446520" y="2514600"/>
+            <a:ext cx="4846320" cy="822960"/>
+          </a:xfrm>
+          <a:prstGeom prst="rect">
+            <a:avLst/>
+          </a:prstGeom>
+          <a:noFill/>
+          <a:ln/>
+        </p:spPr>
+        <p:txBody>
+          <a:bodyPr wrap="square" lIns="0" tIns="0" rIns="0" bIns="0" rtlCol="0" anchor="ctr"/>
+          <a:lstStyle/>
+          <a:p>
+            <a:pPr indent="0" marL="0">
+              <a:buNone/>
+            </a:pPr>
+            <a:r>
+              <a:rPr lang="en-US" sz="3600" b="1" dirty="0">
                 <a:solidFill>
                   <a:srgbClr val="FFFFFF"/>
                 </a:solidFill>
@@ -4192,22 +4816,22 @@
                 <a:ea typeface="Cambria" pitchFamily="34" charset="-122"/>
                 <a:cs typeface="Cambria" pitchFamily="34" charset="-120"/>
               </a:rPr>
-              <a:t>0.945</a:t>
-            </a:r>
-            <a:endParaRPr lang="en-US" sz="4600" dirty="0"/>
-          </a:p>
-        </p:txBody>
-      </p:sp>
-      <p:sp>
-        <p:nvSpPr>
-          <p:cNvPr id="8" name="Text 6"/>
-          <p:cNvSpPr txBox="1"/>
-          <p:nvPr/>
-        </p:nvSpPr>
-        <p:spPr>
-          <a:xfrm>
-            <a:off x="914400" y="3246120"/>
-            <a:ext cx="4846320" cy="411480"/>
+              <a:t>0.917 – 0.937</a:t>
+            </a:r>
+            <a:endParaRPr lang="en-US" sz="3600" dirty="0"/>
+          </a:p>
+        </p:txBody>
+      </p:sp>
+      <p:sp>
+        <p:nvSpPr>
+          <p:cNvPr id="12" name="Text 10"/>
+          <p:cNvSpPr txBox="1"/>
+          <p:nvPr/>
+        </p:nvSpPr>
+        <p:spPr>
+          <a:xfrm>
+            <a:off x="6446520" y="3246120"/>
+            <a:ext cx="4846320" cy="548640"/>
           </a:xfrm>
           <a:prstGeom prst="rect">
             <a:avLst/>
@@ -4231,7 +4855,7 @@
                 <a:ea typeface="Calibri" pitchFamily="34" charset="-122"/>
                 <a:cs typeface="Calibri" pitchFamily="34" charset="-120"/>
               </a:rPr>
-              <a:t>average balanced accuracy — best of all 6 strategies</a:t>
+              <a:t>2-point spread. NO pairwise comparison is statistically significant (α=0.05)</a:t>
             </a:r>
             <a:endParaRPr lang="en-US" sz="1250" dirty="0"/>
           </a:p>
@@ -4239,141 +4863,42 @@
       </p:sp>
       <p:sp>
         <p:nvSpPr>
-          <p:cNvPr id="9" name="Shape 7"/>
-          <p:cNvSpPr/>
-          <p:nvPr/>
-        </p:nvSpPr>
-        <p:spPr>
-          <a:xfrm>
-            <a:off x="914400" y="3867912"/>
-            <a:ext cx="82296" cy="82296"/>
-          </a:xfrm>
-          <a:prstGeom prst="ellipse">
-            <a:avLst/>
-          </a:prstGeom>
-          <a:solidFill>
-            <a:srgbClr val="6FCF97"/>
-          </a:solidFill>
-          <a:ln/>
-        </p:spPr>
-      </p:sp>
-      <p:sp>
-        <p:nvSpPr>
-          <p:cNvPr id="10" name="Text 8"/>
-          <p:cNvSpPr txBox="1"/>
-          <p:nvPr/>
-        </p:nvSpPr>
-        <p:spPr>
-          <a:xfrm>
-            <a:off x="1115568" y="3703320"/>
-            <a:ext cx="4663440" cy="502920"/>
-          </a:xfrm>
-          <a:prstGeom prst="rect">
-            <a:avLst/>
-          </a:prstGeom>
-          <a:noFill/>
-          <a:ln/>
-        </p:spPr>
-        <p:txBody>
-          <a:bodyPr wrap="square" lIns="0" tIns="0" rIns="0" bIns="0" rtlCol="0" anchor="ctr"/>
-          <a:lstStyle/>
-          <a:p>
-            <a:pPr indent="0" marL="0">
-              <a:buNone/>
-            </a:pPr>
-            <a:r>
-              <a:rPr lang="en-US" sz="1150" dirty="0">
-                <a:solidFill>
-                  <a:srgbClr val="E5F5EC"/>
-                </a:solidFill>
-                <a:latin typeface="Calibri" pitchFamily="34" charset="0"/>
-                <a:ea typeface="Calibri" pitchFamily="34" charset="-122"/>
-                <a:cs typeface="Calibri" pitchFamily="34" charset="-120"/>
-              </a:rPr>
-              <a:t>Best or tied-best on 3 of 5 benchmarks</a:t>
-            </a:r>
-            <a:endParaRPr lang="en-US" sz="1150" dirty="0"/>
-          </a:p>
-        </p:txBody>
-      </p:sp>
-      <p:sp>
-        <p:nvSpPr>
-          <p:cNvPr id="11" name="Shape 9"/>
-          <p:cNvSpPr/>
-          <p:nvPr/>
-        </p:nvSpPr>
-        <p:spPr>
-          <a:xfrm>
-            <a:off x="914400" y="4434840"/>
-            <a:ext cx="82296" cy="82296"/>
-          </a:xfrm>
-          <a:prstGeom prst="ellipse">
-            <a:avLst/>
-          </a:prstGeom>
-          <a:solidFill>
-            <a:srgbClr val="6FCF97"/>
-          </a:solidFill>
-          <a:ln/>
-        </p:spPr>
-      </p:sp>
-      <p:sp>
-        <p:nvSpPr>
-          <p:cNvPr id="12" name="Text 10"/>
-          <p:cNvSpPr txBox="1"/>
-          <p:nvPr/>
-        </p:nvSpPr>
-        <p:spPr>
-          <a:xfrm>
-            <a:off x="1115568" y="4270248"/>
-            <a:ext cx="4663440" cy="502920"/>
-          </a:xfrm>
-          <a:prstGeom prst="rect">
-            <a:avLst/>
-          </a:prstGeom>
-          <a:noFill/>
-          <a:ln/>
-        </p:spPr>
-        <p:txBody>
-          <a:bodyPr wrap="square" lIns="0" tIns="0" rIns="0" bIns="0" rtlCol="0" anchor="ctr"/>
-          <a:lstStyle/>
-          <a:p>
-            <a:pPr indent="0" marL="0">
-              <a:buNone/>
-            </a:pPr>
-            <a:r>
-              <a:rPr lang="en-US" sz="1150" dirty="0">
-                <a:solidFill>
-                  <a:srgbClr val="E5F5EC"/>
-                </a:solidFill>
-                <a:latin typeface="Calibri" pitchFamily="34" charset="0"/>
-                <a:ea typeface="Calibri" pitchFamily="34" charset="-122"/>
-                <a:cs typeface="Calibri" pitchFamily="34" charset="-120"/>
-              </a:rPr>
-              <a:t>Recall 0.976 even on B5 (471:1 imbalance) — no other strategy stayed reliable there</a:t>
-            </a:r>
-            <a:endParaRPr lang="en-US" sz="1150" dirty="0"/>
-          </a:p>
-        </p:txBody>
-      </p:sp>
-      <p:sp>
-        <p:nvSpPr>
-          <p:cNvPr id="13" name="Shape 11"/>
-          <p:cNvSpPr/>
-          <p:nvPr/>
-        </p:nvSpPr>
-        <p:spPr>
-          <a:xfrm>
-            <a:off x="914400" y="5001768"/>
-            <a:ext cx="82296" cy="82296"/>
-          </a:xfrm>
-          <a:prstGeom prst="ellipse">
-            <a:avLst/>
-          </a:prstGeom>
-          <a:solidFill>
-            <a:srgbClr val="6FCF97"/>
-          </a:solidFill>
-          <a:ln/>
-        </p:spPr>
+          <p:cNvPr id="13" name="Text 11"/>
+          <p:cNvSpPr txBox="1"/>
+          <p:nvPr/>
+        </p:nvSpPr>
+        <p:spPr>
+          <a:xfrm>
+            <a:off x="6446520" y="3931920"/>
+            <a:ext cx="4846320" cy="1005840"/>
+          </a:xfrm>
+          <a:prstGeom prst="rect">
+            <a:avLst/>
+          </a:prstGeom>
+          <a:noFill/>
+          <a:ln/>
+        </p:spPr>
+        <p:txBody>
+          <a:bodyPr wrap="square" lIns="0" tIns="0" rIns="0" bIns="0" rtlCol="0" anchor="ctr"/>
+          <a:lstStyle/>
+          <a:p>
+            <a:pPr indent="0" marL="0">
+              <a:buNone/>
+            </a:pPr>
+            <a:r>
+              <a:rPr lang="en-US" sz="1200" i="1" dirty="0">
+                <a:solidFill>
+                  <a:srgbClr val="C9E9D6"/>
+                </a:solidFill>
+                <a:latin typeface="Calibri" pitchFamily="34" charset="0"/>
+                <a:ea typeface="Calibri" pitchFamily="34" charset="-122"/>
+                <a:cs typeface="Calibri" pitchFamily="34" charset="-120"/>
+              </a:rPr>
+              <a:t>RUS now reaches 0.957 balanced accuracy on that same benchmark. The DA2 “collapse” was a training-protocol artifact, not a property of undersampling.</a:t>
+            </a:r>
+            <a:endParaRPr lang="en-US" sz="1200" dirty="0"/>
+          </a:p>
+        </p:txBody>
       </p:sp>
       <p:sp>
         <p:nvSpPr>
@@ -4383,481 +4908,8 @@
         </p:nvSpPr>
         <p:spPr>
           <a:xfrm>
-            <a:off x="1115568" y="4837176"/>
-            <a:ext cx="4663440" cy="502920"/>
-          </a:xfrm>
-          <a:prstGeom prst="rect">
-            <a:avLst/>
-          </a:prstGeom>
-          <a:noFill/>
-          <a:ln/>
-        </p:spPr>
-        <p:txBody>
-          <a:bodyPr wrap="square" lIns="0" tIns="0" rIns="0" bIns="0" rtlCol="0" anchor="ctr"/>
-          <a:lstStyle/>
-          <a:p>
-            <a:pPr indent="0" marL="0">
-              <a:buNone/>
-            </a:pPr>
-            <a:r>
-              <a:rPr lang="en-US" sz="1150" dirty="0">
-                <a:solidFill>
-                  <a:srgbClr val="E5F5EC"/>
-                </a:solidFill>
-                <a:latin typeface="Calibri" pitchFamily="34" charset="0"/>
-                <a:ea typeface="Calibri" pitchFamily="34" charset="-122"/>
-                <a:cs typeface="Calibri" pitchFamily="34" charset="-120"/>
-              </a:rPr>
-              <a:t>Never duplicates or discards data — only changes what's sampled into each batch</a:t>
-            </a:r>
-            <a:endParaRPr lang="en-US" sz="1150" dirty="0"/>
-          </a:p>
-        </p:txBody>
-      </p:sp>
-      <p:sp>
-        <p:nvSpPr>
-          <p:cNvPr id="15" name="Shape 13"/>
-          <p:cNvSpPr/>
-          <p:nvPr/>
-        </p:nvSpPr>
-        <p:spPr>
-          <a:xfrm>
-            <a:off x="914400" y="5568696"/>
-            <a:ext cx="82296" cy="82296"/>
-          </a:xfrm>
-          <a:prstGeom prst="ellipse">
-            <a:avLst/>
-          </a:prstGeom>
-          <a:solidFill>
-            <a:srgbClr val="6FCF97"/>
-          </a:solidFill>
-          <a:ln/>
-        </p:spPr>
-      </p:sp>
-      <p:sp>
-        <p:nvSpPr>
-          <p:cNvPr id="16" name="Text 14"/>
-          <p:cNvSpPr txBox="1"/>
-          <p:nvPr/>
-        </p:nvSpPr>
-        <p:spPr>
-          <a:xfrm>
-            <a:off x="1115568" y="5404104"/>
-            <a:ext cx="4663440" cy="502920"/>
-          </a:xfrm>
-          <a:prstGeom prst="rect">
-            <a:avLst/>
-          </a:prstGeom>
-          <a:noFill/>
-          <a:ln/>
-        </p:spPr>
-        <p:txBody>
-          <a:bodyPr wrap="square" lIns="0" tIns="0" rIns="0" bIns="0" rtlCol="0" anchor="ctr"/>
-          <a:lstStyle/>
-          <a:p>
-            <a:pPr indent="0" marL="0">
-              <a:buNone/>
-            </a:pPr>
-            <a:r>
-              <a:rPr lang="en-US" sz="1150" dirty="0">
-                <a:solidFill>
-                  <a:srgbClr val="E5F5EC"/>
-                </a:solidFill>
-                <a:latin typeface="Calibri" pitchFamily="34" charset="0"/>
-                <a:ea typeface="Calibri" pitchFamily="34" charset="-122"/>
-                <a:cs typeface="Calibri" pitchFamily="34" charset="-120"/>
-              </a:rPr>
-              <a:t>Simplest to deploy: no augmentation pipeline needed</a:t>
-            </a:r>
-            <a:endParaRPr lang="en-US" sz="1150" dirty="0"/>
-          </a:p>
-        </p:txBody>
-      </p:sp>
-      <p:sp>
-        <p:nvSpPr>
-          <p:cNvPr id="17" name="Shape 15"/>
-          <p:cNvSpPr/>
-          <p:nvPr/>
-        </p:nvSpPr>
-        <p:spPr>
-          <a:xfrm>
-            <a:off x="6172200" y="1737360"/>
-            <a:ext cx="5394960" cy="4480560"/>
-          </a:xfrm>
-          <a:prstGeom prst="roundRect">
-            <a:avLst>
-              <a:gd name="adj" fmla="val 2041"/>
-            </a:avLst>
-          </a:prstGeom>
-          <a:solidFill>
-            <a:srgbClr val="3E1620"/>
-          </a:solidFill>
-          <a:ln/>
-        </p:spPr>
-      </p:sp>
-      <p:sp>
-        <p:nvSpPr>
-          <p:cNvPr id="18" name="Text 16"/>
-          <p:cNvSpPr txBox="1"/>
-          <p:nvPr/>
-        </p:nvSpPr>
-        <p:spPr>
-          <a:xfrm>
-            <a:off x="6446520" y="1965960"/>
-            <a:ext cx="4846320" cy="365760"/>
-          </a:xfrm>
-          <a:prstGeom prst="rect">
-            <a:avLst/>
-          </a:prstGeom>
-          <a:noFill/>
-          <a:ln/>
-        </p:spPr>
-        <p:txBody>
-          <a:bodyPr wrap="square" lIns="0" tIns="0" rIns="0" bIns="0" rtlCol="0" anchor="ctr"/>
-          <a:lstStyle/>
-          <a:p>
-            <a:pPr indent="0" marL="0">
-              <a:buNone/>
-            </a:pPr>
-            <a:r>
-              <a:rPr lang="en-US" sz="1300" b="1" dirty="0">
-                <a:solidFill>
-                  <a:srgbClr val="F4A6B0"/>
-                </a:solidFill>
-                <a:latin typeface="Calibri" pitchFamily="34" charset="0"/>
-                <a:ea typeface="Calibri" pitchFamily="34" charset="-122"/>
-                <a:cs typeface="Calibri" pitchFamily="34" charset="-120"/>
-              </a:rPr>
-              <a:t>RANDOM UNDERSAMPLING (RUS)</a:t>
-            </a:r>
-            <a:endParaRPr lang="en-US" sz="1300" dirty="0"/>
-          </a:p>
-        </p:txBody>
-      </p:sp>
-      <p:sp>
-        <p:nvSpPr>
-          <p:cNvPr id="19" name="Text 17"/>
-          <p:cNvSpPr txBox="1"/>
-          <p:nvPr/>
-        </p:nvSpPr>
-        <p:spPr>
-          <a:xfrm>
-            <a:off x="6446520" y="2331720"/>
-            <a:ext cx="4846320" cy="914400"/>
-          </a:xfrm>
-          <a:prstGeom prst="rect">
-            <a:avLst/>
-          </a:prstGeom>
-          <a:noFill/>
-          <a:ln/>
-        </p:spPr>
-        <p:txBody>
-          <a:bodyPr wrap="square" lIns="0" tIns="0" rIns="0" bIns="0" rtlCol="0" anchor="ctr"/>
-          <a:lstStyle/>
-          <a:p>
-            <a:pPr indent="0" marL="0">
-              <a:buNone/>
-            </a:pPr>
-            <a:r>
-              <a:rPr lang="en-US" sz="4600" b="1" dirty="0">
-                <a:solidFill>
-                  <a:srgbClr val="FFFFFF"/>
-                </a:solidFill>
-                <a:latin typeface="Cambria" pitchFamily="34" charset="0"/>
-                <a:ea typeface="Cambria" pitchFamily="34" charset="-122"/>
-                <a:cs typeface="Cambria" pitchFamily="34" charset="-120"/>
-              </a:rPr>
-              <a:t>0.779</a:t>
-            </a:r>
-            <a:endParaRPr lang="en-US" sz="4600" dirty="0"/>
-          </a:p>
-        </p:txBody>
-      </p:sp>
-      <p:sp>
-        <p:nvSpPr>
-          <p:cNvPr id="20" name="Text 18"/>
-          <p:cNvSpPr txBox="1"/>
-          <p:nvPr/>
-        </p:nvSpPr>
-        <p:spPr>
-          <a:xfrm>
-            <a:off x="6446520" y="3246120"/>
-            <a:ext cx="4846320" cy="411480"/>
-          </a:xfrm>
-          <a:prstGeom prst="rect">
-            <a:avLst/>
-          </a:prstGeom>
-          <a:noFill/>
-          <a:ln/>
-        </p:spPr>
-        <p:txBody>
-          <a:bodyPr wrap="square" lIns="0" tIns="0" rIns="0" bIns="0" rtlCol="0" anchor="ctr"/>
-          <a:lstStyle/>
-          <a:p>
-            <a:pPr indent="0" marL="0">
-              <a:buNone/>
-            </a:pPr>
-            <a:r>
-              <a:rPr lang="en-US" sz="1250" dirty="0">
-                <a:solidFill>
-                  <a:srgbClr val="F7CDD3"/>
-                </a:solidFill>
-                <a:latin typeface="Calibri" pitchFamily="34" charset="0"/>
-                <a:ea typeface="Calibri" pitchFamily="34" charset="-122"/>
-                <a:cs typeface="Calibri" pitchFamily="34" charset="-120"/>
-              </a:rPr>
-              <a:t>average balanced accuracy — worst of all 6 strategies</a:t>
-            </a:r>
-            <a:endParaRPr lang="en-US" sz="1250" dirty="0"/>
-          </a:p>
-        </p:txBody>
-      </p:sp>
-      <p:sp>
-        <p:nvSpPr>
-          <p:cNvPr id="21" name="Shape 19"/>
-          <p:cNvSpPr/>
-          <p:nvPr/>
-        </p:nvSpPr>
-        <p:spPr>
-          <a:xfrm>
-            <a:off x="6446520" y="3867912"/>
-            <a:ext cx="82296" cy="82296"/>
-          </a:xfrm>
-          <a:prstGeom prst="ellipse">
-            <a:avLst/>
-          </a:prstGeom>
-          <a:solidFill>
-            <a:srgbClr val="E63946"/>
-          </a:solidFill>
-          <a:ln/>
-        </p:spPr>
-      </p:sp>
-      <p:sp>
-        <p:nvSpPr>
-          <p:cNvPr id="22" name="Text 20"/>
-          <p:cNvSpPr txBox="1"/>
-          <p:nvPr/>
-        </p:nvSpPr>
-        <p:spPr>
-          <a:xfrm>
-            <a:off x="6647688" y="3703320"/>
-            <a:ext cx="4663440" cy="502920"/>
-          </a:xfrm>
-          <a:prstGeom prst="rect">
-            <a:avLst/>
-          </a:prstGeom>
-          <a:noFill/>
-          <a:ln/>
-        </p:spPr>
-        <p:txBody>
-          <a:bodyPr wrap="square" lIns="0" tIns="0" rIns="0" bIns="0" rtlCol="0" anchor="ctr"/>
-          <a:lstStyle/>
-          <a:p>
-            <a:pPr indent="0" marL="0">
-              <a:buNone/>
-            </a:pPr>
-            <a:r>
-              <a:rPr lang="en-US" sz="1150" dirty="0">
-                <a:solidFill>
-                  <a:srgbClr val="FBE1E4"/>
-                </a:solidFill>
-                <a:latin typeface="Calibri" pitchFamily="34" charset="0"/>
-                <a:ea typeface="Calibri" pitchFamily="34" charset="-122"/>
-                <a:cs typeface="Calibri" pitchFamily="34" charset="-120"/>
-              </a:rPr>
-              <a:t>Recall = 0.000 on B5 — predicts “non-hotspot” for every single test image</a:t>
-            </a:r>
-            <a:endParaRPr lang="en-US" sz="1150" dirty="0"/>
-          </a:p>
-        </p:txBody>
-      </p:sp>
-      <p:sp>
-        <p:nvSpPr>
-          <p:cNvPr id="23" name="Shape 21"/>
-          <p:cNvSpPr/>
-          <p:nvPr/>
-        </p:nvSpPr>
-        <p:spPr>
-          <a:xfrm>
-            <a:off x="6446520" y="4434840"/>
-            <a:ext cx="82296" cy="82296"/>
-          </a:xfrm>
-          <a:prstGeom prst="ellipse">
-            <a:avLst/>
-          </a:prstGeom>
-          <a:solidFill>
-            <a:srgbClr val="E63946"/>
-          </a:solidFill>
-          <a:ln/>
-        </p:spPr>
-      </p:sp>
-      <p:sp>
-        <p:nvSpPr>
-          <p:cNvPr id="24" name="Text 22"/>
-          <p:cNvSpPr txBox="1"/>
-          <p:nvPr/>
-        </p:nvSpPr>
-        <p:spPr>
-          <a:xfrm>
-            <a:off x="6647688" y="4270248"/>
-            <a:ext cx="4663440" cy="502920"/>
-          </a:xfrm>
-          <a:prstGeom prst="rect">
-            <a:avLst/>
-          </a:prstGeom>
-          <a:noFill/>
-          <a:ln/>
-        </p:spPr>
-        <p:txBody>
-          <a:bodyPr wrap="square" lIns="0" tIns="0" rIns="0" bIns="0" rtlCol="0" anchor="ctr"/>
-          <a:lstStyle/>
-          <a:p>
-            <a:pPr indent="0" marL="0">
-              <a:buNone/>
-            </a:pPr>
-            <a:r>
-              <a:rPr lang="en-US" sz="1150" dirty="0">
-                <a:solidFill>
-                  <a:srgbClr val="FBE1E4"/>
-                </a:solidFill>
-                <a:latin typeface="Calibri" pitchFamily="34" charset="0"/>
-                <a:ea typeface="Calibri" pitchFamily="34" charset="-122"/>
-                <a:cs typeface="Calibri" pitchFamily="34" charset="-120"/>
-              </a:rPr>
-              <a:t>Stays stuck at 0% recall across every tested ratio (0.1 → 1.0)</a:t>
-            </a:r>
-            <a:endParaRPr lang="en-US" sz="1150" dirty="0"/>
-          </a:p>
-        </p:txBody>
-      </p:sp>
-      <p:sp>
-        <p:nvSpPr>
-          <p:cNvPr id="25" name="Shape 23"/>
-          <p:cNvSpPr/>
-          <p:nvPr/>
-        </p:nvSpPr>
-        <p:spPr>
-          <a:xfrm>
-            <a:off x="6446520" y="5001768"/>
-            <a:ext cx="82296" cy="82296"/>
-          </a:xfrm>
-          <a:prstGeom prst="ellipse">
-            <a:avLst/>
-          </a:prstGeom>
-          <a:solidFill>
-            <a:srgbClr val="E63946"/>
-          </a:solidFill>
-          <a:ln/>
-        </p:spPr>
-      </p:sp>
-      <p:sp>
-        <p:nvSpPr>
-          <p:cNvPr id="26" name="Text 24"/>
-          <p:cNvSpPr txBox="1"/>
-          <p:nvPr/>
-        </p:nvSpPr>
-        <p:spPr>
-          <a:xfrm>
-            <a:off x="6647688" y="4837176"/>
-            <a:ext cx="4663440" cy="502920"/>
-          </a:xfrm>
-          <a:prstGeom prst="rect">
-            <a:avLst/>
-          </a:prstGeom>
-          <a:noFill/>
-          <a:ln/>
-        </p:spPr>
-        <p:txBody>
-          <a:bodyPr wrap="square" lIns="0" tIns="0" rIns="0" bIns="0" rtlCol="0" anchor="ctr"/>
-          <a:lstStyle/>
-          <a:p>
-            <a:pPr indent="0" marL="0">
-              <a:buNone/>
-            </a:pPr>
-            <a:r>
-              <a:rPr lang="en-US" sz="1150" dirty="0">
-                <a:solidFill>
-                  <a:srgbClr val="FBE1E4"/>
-                </a:solidFill>
-                <a:latin typeface="Calibri" pitchFamily="34" charset="0"/>
-                <a:ea typeface="Calibri" pitchFamily="34" charset="-122"/>
-                <a:cs typeface="Calibri" pitchFamily="34" charset="-120"/>
-              </a:rPr>
-              <a:t>Discarding majority data can't manufacture minority signal that was never there</a:t>
-            </a:r>
-            <a:endParaRPr lang="en-US" sz="1150" dirty="0"/>
-          </a:p>
-        </p:txBody>
-      </p:sp>
-      <p:sp>
-        <p:nvSpPr>
-          <p:cNvPr id="27" name="Shape 25"/>
-          <p:cNvSpPr/>
-          <p:nvPr/>
-        </p:nvSpPr>
-        <p:spPr>
-          <a:xfrm>
-            <a:off x="6446520" y="5568696"/>
-            <a:ext cx="82296" cy="82296"/>
-          </a:xfrm>
-          <a:prstGeom prst="ellipse">
-            <a:avLst/>
-          </a:prstGeom>
-          <a:solidFill>
-            <a:srgbClr val="E63946"/>
-          </a:solidFill>
-          <a:ln/>
-        </p:spPr>
-      </p:sp>
-      <p:sp>
-        <p:nvSpPr>
-          <p:cNvPr id="28" name="Text 26"/>
-          <p:cNvSpPr txBox="1"/>
-          <p:nvPr/>
-        </p:nvSpPr>
-        <p:spPr>
-          <a:xfrm>
-            <a:off x="6647688" y="5404104"/>
-            <a:ext cx="4663440" cy="502920"/>
-          </a:xfrm>
-          <a:prstGeom prst="rect">
-            <a:avLst/>
-          </a:prstGeom>
-          <a:noFill/>
-          <a:ln/>
-        </p:spPr>
-        <p:txBody>
-          <a:bodyPr wrap="square" lIns="0" tIns="0" rIns="0" bIns="0" rtlCol="0" anchor="ctr"/>
-          <a:lstStyle/>
-          <a:p>
-            <a:pPr indent="0" marL="0">
-              <a:buNone/>
-            </a:pPr>
-            <a:r>
-              <a:rPr lang="en-US" sz="1150" dirty="0">
-                <a:solidFill>
-                  <a:srgbClr val="FBE1E4"/>
-                </a:solidFill>
-                <a:latin typeface="Calibri" pitchFamily="34" charset="0"/>
-                <a:ea typeface="Calibri" pitchFamily="34" charset="-122"/>
-                <a:cs typeface="Calibri" pitchFamily="34" charset="-120"/>
-              </a:rPr>
-              <a:t>Only 26 native HS images on B5 — too little for the model to learn from, regardless of class balance</a:t>
-            </a:r>
-            <a:endParaRPr lang="en-US" sz="1150" dirty="0"/>
-          </a:p>
-        </p:txBody>
-      </p:sp>
-      <p:sp>
-        <p:nvSpPr>
-          <p:cNvPr id="29" name="Text 27"/>
-          <p:cNvSpPr txBox="1"/>
-          <p:nvPr/>
-        </p:nvSpPr>
-        <p:spPr>
-          <a:xfrm>
             <a:off x="457200" y="6473952"/>
-            <a:ext cx="8229600" cy="274320"/>
+            <a:ext cx="9144000" cy="274320"/>
           </a:xfrm>
           <a:prstGeom prst="rect">
             <a:avLst/>
@@ -4881,7 +4933,7 @@
                 <a:ea typeface="Calibri" pitchFamily="34" charset="-122"/>
                 <a:cs typeface="Calibri" pitchFamily="34" charset="-120"/>
               </a:rPr>
-              <a:t>Group 11 · Data Balancing and Augmentation Strategies for Hotspot Detection</a:t>
+              <a:t>Group 11 (DA3 Revision) · Data Balancing and Augmentation Strategies for Hotspot Detection</a:t>
             </a:r>
             <a:endParaRPr lang="en-US" sz="900" dirty="0"/>
           </a:p>
@@ -4889,7 +4941,7 @@
       </p:sp>
       <p:sp>
         <p:nvSpPr>
-          <p:cNvPr id="30" name="Text 28"/>
+          <p:cNvPr id="15" name="Text 13"/>
           <p:cNvSpPr txBox="1"/>
           <p:nvPr/>
         </p:nvSpPr>
@@ -4991,7 +5043,7 @@
                 <a:ea typeface="Cambria" pitchFamily="34" charset="-122"/>
                 <a:cs typeface="Cambria" pitchFamily="34" charset="-120"/>
               </a:rPr>
-              <a:t>Augmentation Helps... Until It Doesn't</a:t>
+              <a:t>Key Finding #2: Why RUS “Failed” in DA2: A Mechanistic Look</a:t>
             </a:r>
             <a:endParaRPr lang="en-US" sz="3000" dirty="0"/>
           </a:p>
@@ -5030,197 +5082,76 @@
                 <a:ea typeface="Calibri" pitchFamily="34" charset="-122"/>
                 <a:cs typeface="Calibri" pitchFamily="34" charset="-120"/>
               </a:rPr>
-              <a:t>Oversampling + Augmentation vs. plain duplication (ROS)</a:t>
+              <a:t>Per-step learning curves on Benchmark 5, across 3 seeds</a:t>
             </a:r>
             <a:endParaRPr lang="en-US" sz="1500" dirty="0"/>
           </a:p>
         </p:txBody>
       </p:sp>
-      <p:sp>
-        <p:nvSpPr>
-          <p:cNvPr id="4" name="Shape 2"/>
-          <p:cNvSpPr/>
-          <p:nvPr/>
-        </p:nvSpPr>
-        <p:spPr>
-          <a:xfrm>
-            <a:off x="548640" y="1783080"/>
-            <a:ext cx="11064240" cy="1234440"/>
-          </a:xfrm>
-          <a:prstGeom prst="roundRect">
-            <a:avLst>
-              <a:gd name="adj" fmla="val 5926"/>
-            </a:avLst>
-          </a:prstGeom>
-          <a:solidFill>
-            <a:srgbClr val="F4F5F9"/>
-          </a:solidFill>
-          <a:ln/>
-        </p:spPr>
-      </p:sp>
-      <p:sp>
-        <p:nvSpPr>
-          <p:cNvPr id="5" name="Text 3"/>
-          <p:cNvSpPr txBox="1"/>
-          <p:nvPr/>
-        </p:nvSpPr>
-        <p:spPr>
-          <a:xfrm>
-            <a:off x="777240" y="1920240"/>
-            <a:ext cx="914400" cy="548640"/>
-          </a:xfrm>
-          <a:prstGeom prst="rect">
-            <a:avLst/>
-          </a:prstGeom>
-          <a:noFill/>
-          <a:ln/>
-        </p:spPr>
-        <p:txBody>
-          <a:bodyPr wrap="square" lIns="0" tIns="0" rIns="0" bIns="0" rtlCol="0" anchor="ctr"/>
-          <a:lstStyle/>
-          <a:p>
-            <a:pPr indent="0" marL="0">
-              <a:buNone/>
-            </a:pPr>
-            <a:r>
-              <a:rPr lang="en-US" sz="2200" b="1" dirty="0">
+      <p:pic>
+        <p:nvPicPr>
+          <p:cNvPr id="4" name="Image 0" descr="F:\Projects\AIML-VLSI-Project\results\figures\learning_curves_b5.png">    </p:cNvPr>
+          <p:cNvPicPr>
+            <a:picLocks noChangeAspect="1"/>
+          </p:cNvPicPr>
+          <p:nvPr/>
+        </p:nvPicPr>
+        <p:blipFill>
+          <a:blip r:embed="rId1"/>
+          <a:stretch>
+            <a:fillRect/>
+          </a:stretch>
+        </p:blipFill>
+        <p:spPr>
+          <a:xfrm>
+            <a:off x="731520" y="1600200"/>
+            <a:ext cx="10698480" cy="3063240"/>
+          </a:xfrm>
+          <a:prstGeom prst="rect">
+            <a:avLst/>
+          </a:prstGeom>
+        </p:spPr>
+      </p:pic>
+      <p:sp>
+        <p:nvSpPr>
+          <p:cNvPr id="5" name="Text 2"/>
+          <p:cNvSpPr txBox="1"/>
+          <p:nvPr/>
+        </p:nvSpPr>
+        <p:spPr>
+          <a:xfrm>
+            <a:off x="731520" y="4800600"/>
+            <a:ext cx="10698480" cy="640080"/>
+          </a:xfrm>
+          <a:prstGeom prst="rect">
+            <a:avLst/>
+          </a:prstGeom>
+          <a:noFill/>
+          <a:ln/>
+        </p:spPr>
+        <p:txBody>
+          <a:bodyPr wrap="square" lIns="0" tIns="0" rIns="0" bIns="0" rtlCol="0" anchor="ctr"/>
+          <a:lstStyle/>
+          <a:p>
+            <a:pPr indent="0" marL="0">
+              <a:buNone/>
+            </a:pPr>
+            <a:r>
+              <a:rPr lang="en-US" sz="1250" b="1" dirty="0">
                 <a:solidFill>
                   <a:srgbClr val="1E2761"/>
                 </a:solidFill>
-                <a:latin typeface="Cambria" pitchFamily="34" charset="0"/>
-                <a:ea typeface="Cambria" pitchFamily="34" charset="-122"/>
-                <a:cs typeface="Cambria" pitchFamily="34" charset="-120"/>
-              </a:rPr>
-              <a:t>B2</a:t>
-            </a:r>
-            <a:endParaRPr lang="en-US" sz="2200" dirty="0"/>
-          </a:p>
-        </p:txBody>
-      </p:sp>
-      <p:sp>
-        <p:nvSpPr>
-          <p:cNvPr id="6" name="Text 4"/>
-          <p:cNvSpPr txBox="1"/>
-          <p:nvPr/>
-        </p:nvSpPr>
-        <p:spPr>
-          <a:xfrm>
-            <a:off x="777240" y="2468880"/>
-            <a:ext cx="3566160" cy="457200"/>
-          </a:xfrm>
-          <a:prstGeom prst="rect">
-            <a:avLst/>
-          </a:prstGeom>
-          <a:noFill/>
-          <a:ln/>
-        </p:spPr>
-        <p:txBody>
-          <a:bodyPr wrap="square" lIns="0" tIns="0" rIns="0" bIns="0" rtlCol="0" anchor="ctr"/>
-          <a:lstStyle/>
-          <a:p>
-            <a:pPr indent="0" marL="0">
-              <a:buNone/>
-            </a:pPr>
-            <a:r>
-              <a:rPr lang="en-US" sz="1100" dirty="0">
-                <a:solidFill>
-                  <a:srgbClr val="555B6E"/>
-                </a:solidFill>
-                <a:latin typeface="Calibri" pitchFamily="34" charset="0"/>
-                <a:ea typeface="Calibri" pitchFamily="34" charset="-122"/>
-                <a:cs typeface="Calibri" pitchFamily="34" charset="-120"/>
-              </a:rPr>
-              <a:t>498 test HS, moderate minority pool</a:t>
-            </a:r>
-            <a:endParaRPr lang="en-US" sz="1100" dirty="0"/>
-          </a:p>
-        </p:txBody>
-      </p:sp>
-      <p:sp>
-        <p:nvSpPr>
-          <p:cNvPr id="7" name="Text 5"/>
-          <p:cNvSpPr txBox="1"/>
-          <p:nvPr/>
-        </p:nvSpPr>
-        <p:spPr>
-          <a:xfrm>
-            <a:off x="4572000" y="1920240"/>
-            <a:ext cx="822960" cy="320040"/>
-          </a:xfrm>
-          <a:prstGeom prst="rect">
-            <a:avLst/>
-          </a:prstGeom>
-          <a:noFill/>
-          <a:ln/>
-        </p:spPr>
-        <p:txBody>
-          <a:bodyPr wrap="square" lIns="0" tIns="0" rIns="0" bIns="0" rtlCol="0" anchor="ctr"/>
-          <a:lstStyle/>
-          <a:p>
-            <a:pPr indent="0" marL="0">
-              <a:buNone/>
-            </a:pPr>
-            <a:r>
-              <a:rPr lang="en-US" sz="1100" b="1" dirty="0">
-                <a:solidFill>
-                  <a:srgbClr val="555B6E"/>
-                </a:solidFill>
-                <a:latin typeface="Calibri" pitchFamily="34" charset="0"/>
-                <a:ea typeface="Calibri" pitchFamily="34" charset="-122"/>
-                <a:cs typeface="Calibri" pitchFamily="34" charset="-120"/>
-              </a:rPr>
-              <a:t>ROS</a:t>
-            </a:r>
-            <a:endParaRPr lang="en-US" sz="1100" dirty="0"/>
-          </a:p>
-        </p:txBody>
-      </p:sp>
-      <p:sp>
-        <p:nvSpPr>
-          <p:cNvPr id="8" name="Shape 6"/>
-          <p:cNvSpPr/>
-          <p:nvPr/>
-        </p:nvSpPr>
-        <p:spPr>
-          <a:xfrm>
-            <a:off x="5394960" y="1938528"/>
-            <a:ext cx="4113703" cy="274320"/>
-          </a:xfrm>
-          <a:prstGeom prst="rect">
-            <a:avLst/>
-          </a:prstGeom>
-          <a:solidFill>
-            <a:srgbClr val="B9C6E0"/>
-          </a:solidFill>
-          <a:ln/>
-        </p:spPr>
-      </p:sp>
-      <p:sp>
-        <p:nvSpPr>
-          <p:cNvPr id="9" name="Text 7"/>
-          <p:cNvSpPr txBox="1"/>
-          <p:nvPr/>
-        </p:nvSpPr>
-        <p:spPr>
-          <a:xfrm>
-            <a:off x="9554383" y="1892808"/>
-            <a:ext cx="731520" cy="320040"/>
-          </a:xfrm>
-          <a:prstGeom prst="rect">
-            <a:avLst/>
-          </a:prstGeom>
-          <a:noFill/>
-          <a:ln/>
-        </p:spPr>
-        <p:txBody>
-          <a:bodyPr wrap="square" lIns="0" tIns="0" rIns="0" bIns="0" rtlCol="0" anchor="ctr"/>
-          <a:lstStyle/>
-          <a:p>
-            <a:pPr indent="0" marL="0">
-              <a:buNone/>
-            </a:pPr>
-            <a:r>
-              <a:rPr lang="en-US" sz="1100" b="1" dirty="0">
+                <a:latin typeface="Calibri" pitchFamily="34" charset="0"/>
+                <a:ea typeface="Calibri" pitchFamily="34" charset="-122"/>
+                <a:cs typeface="Calibri" pitchFamily="34" charset="-120"/>
+              </a:rPr>
+              <a:t>RUS memorizes its tiny resampled pool (~44 images) almost immediately: </a:t>
+            </a:r>
+            <a:pPr indent="0" marL="0">
+              <a:buNone/>
+            </a:pPr>
+            <a:r>
+              <a:rPr lang="en-US" sz="1250" dirty="0">
                 <a:solidFill>
                   <a:srgbClr val="1E2761"/>
                 </a:solidFill>
@@ -5228,97 +5159,38 @@
                 <a:ea typeface="Calibri" pitchFamily="34" charset="-122"/>
                 <a:cs typeface="Calibri" pitchFamily="34" charset="-120"/>
               </a:rPr>
-              <a:t>0.978</a:t>
-            </a:r>
-            <a:endParaRPr lang="en-US" sz="1100" dirty="0"/>
-          </a:p>
-        </p:txBody>
-      </p:sp>
-      <p:sp>
-        <p:nvSpPr>
-          <p:cNvPr id="10" name="Text 8"/>
-          <p:cNvSpPr txBox="1"/>
-          <p:nvPr/>
-        </p:nvSpPr>
-        <p:spPr>
-          <a:xfrm>
-            <a:off x="4572000" y="2377440"/>
-            <a:ext cx="822960" cy="320040"/>
-          </a:xfrm>
-          <a:prstGeom prst="rect">
-            <a:avLst/>
-          </a:prstGeom>
-          <a:noFill/>
-          <a:ln/>
-        </p:spPr>
-        <p:txBody>
-          <a:bodyPr wrap="square" lIns="0" tIns="0" rIns="0" bIns="0" rtlCol="0" anchor="ctr"/>
-          <a:lstStyle/>
-          <a:p>
-            <a:pPr indent="0" marL="0">
-              <a:buNone/>
-            </a:pPr>
-            <a:r>
-              <a:rPr lang="en-US" sz="1100" b="1" dirty="0">
-                <a:solidFill>
-                  <a:srgbClr val="555B6E"/>
-                </a:solidFill>
-                <a:latin typeface="Calibri" pitchFamily="34" charset="0"/>
-                <a:ea typeface="Calibri" pitchFamily="34" charset="-122"/>
-                <a:cs typeface="Calibri" pitchFamily="34" charset="-120"/>
-              </a:rPr>
-              <a:t>ROS+Aug</a:t>
-            </a:r>
-            <a:endParaRPr lang="en-US" sz="1100" dirty="0"/>
-          </a:p>
-        </p:txBody>
-      </p:sp>
-      <p:sp>
-        <p:nvSpPr>
-          <p:cNvPr id="11" name="Shape 9"/>
-          <p:cNvSpPr/>
-          <p:nvPr/>
-        </p:nvSpPr>
-        <p:spPr>
-          <a:xfrm>
-            <a:off x="5394960" y="2395728"/>
-            <a:ext cx="4172590" cy="274320"/>
-          </a:xfrm>
-          <a:prstGeom prst="rect">
-            <a:avLst/>
-          </a:prstGeom>
-          <a:solidFill>
-            <a:srgbClr val="C44E52"/>
-          </a:solidFill>
-          <a:ln/>
-        </p:spPr>
-      </p:sp>
-      <p:sp>
-        <p:nvSpPr>
-          <p:cNvPr id="12" name="Text 10"/>
-          <p:cNvSpPr txBox="1"/>
-          <p:nvPr/>
-        </p:nvSpPr>
-        <p:spPr>
-          <a:xfrm>
-            <a:off x="9613270" y="2350008"/>
-            <a:ext cx="731520" cy="320040"/>
-          </a:xfrm>
-          <a:prstGeom prst="rect">
-            <a:avLst/>
-          </a:prstGeom>
-          <a:noFill/>
-          <a:ln/>
-        </p:spPr>
-        <p:txBody>
-          <a:bodyPr wrap="square" lIns="0" tIns="0" rIns="0" bIns="0" rtlCol="0" anchor="ctr"/>
-          <a:lstStyle/>
-          <a:p>
-            <a:pPr indent="0" marL="0">
-              <a:buNone/>
-            </a:pPr>
-            <a:r>
-              <a:rPr lang="en-US" sz="1100" b="1" dirty="0">
+              <a:t>training loss crashes near-zero within ~150 steps. Its validation recall peaks by step ~73 and then degrades with further training if left unchecked.</a:t>
+            </a:r>
+            <a:endParaRPr lang="en-US" sz="1250" dirty="0"/>
+          </a:p>
+        </p:txBody>
+      </p:sp>
+      <p:sp>
+        <p:nvSpPr>
+          <p:cNvPr id="6" name="Text 3"/>
+          <p:cNvSpPr txBox="1"/>
+          <p:nvPr/>
+        </p:nvSpPr>
+        <p:spPr>
+          <a:xfrm>
+            <a:off x="731520" y="5440680"/>
+            <a:ext cx="10698480" cy="731520"/>
+          </a:xfrm>
+          <a:prstGeom prst="rect">
+            <a:avLst/>
+          </a:prstGeom>
+          <a:noFill/>
+          <a:ln/>
+        </p:spPr>
+        <p:txBody>
+          <a:bodyPr wrap="square" lIns="0" tIns="0" rIns="0" bIns="0" rtlCol="0" anchor="ctr"/>
+          <a:lstStyle/>
+          <a:p>
+            <a:pPr indent="0" marL="0">
+              <a:buNone/>
+            </a:pPr>
+            <a:r>
+              <a:rPr lang="en-US" sz="1250" b="1" dirty="0">
                 <a:solidFill>
                   <a:srgbClr val="1E2761"/>
                 </a:solidFill>
@@ -5326,653 +5198,36 @@
                 <a:ea typeface="Calibri" pitchFamily="34" charset="-122"/>
                 <a:cs typeface="Calibri" pitchFamily="34" charset="-120"/>
               </a:rPr>
-              <a:t>0.992</a:t>
-            </a:r>
-            <a:endParaRPr lang="en-US" sz="1100" dirty="0"/>
-          </a:p>
-        </p:txBody>
-      </p:sp>
-      <p:sp>
-        <p:nvSpPr>
-          <p:cNvPr id="13" name="Shape 11"/>
-          <p:cNvSpPr/>
-          <p:nvPr/>
-        </p:nvSpPr>
-        <p:spPr>
-          <a:xfrm>
-            <a:off x="548640" y="3200400"/>
-            <a:ext cx="11064240" cy="1234440"/>
-          </a:xfrm>
-          <a:prstGeom prst="roundRect">
-            <a:avLst>
-              <a:gd name="adj" fmla="val 5926"/>
-            </a:avLst>
-          </a:prstGeom>
-          <a:solidFill>
-            <a:srgbClr val="F4F5F9"/>
-          </a:solidFill>
-          <a:ln/>
-        </p:spPr>
-      </p:sp>
-      <p:sp>
-        <p:nvSpPr>
-          <p:cNvPr id="14" name="Text 12"/>
-          <p:cNvSpPr txBox="1"/>
-          <p:nvPr/>
-        </p:nvSpPr>
-        <p:spPr>
-          <a:xfrm>
-            <a:off x="777240" y="3337560"/>
-            <a:ext cx="914400" cy="548640"/>
-          </a:xfrm>
-          <a:prstGeom prst="rect">
-            <a:avLst/>
-          </a:prstGeom>
-          <a:noFill/>
-          <a:ln/>
-        </p:spPr>
-        <p:txBody>
-          <a:bodyPr wrap="square" lIns="0" tIns="0" rIns="0" bIns="0" rtlCol="0" anchor="ctr"/>
-          <a:lstStyle/>
-          <a:p>
-            <a:pPr indent="0" marL="0">
-              <a:buNone/>
-            </a:pPr>
-            <a:r>
-              <a:rPr lang="en-US" sz="2200" b="1" dirty="0">
+              <a:t>The Baseline, by contrast, needs the entire step budget just to start detecting hotspots at all: </a:t>
+            </a:r>
+            <a:pPr indent="0" marL="0">
+              <a:buNone/>
+            </a:pPr>
+            <a:r>
+              <a:rPr lang="en-US" sz="1250" dirty="0">
                 <a:solidFill>
                   <a:srgbClr val="1E2761"/>
                 </a:solidFill>
-                <a:latin typeface="Cambria" pitchFamily="34" charset="0"/>
-                <a:ea typeface="Cambria" pitchFamily="34" charset="-122"/>
-                <a:cs typeface="Cambria" pitchFamily="34" charset="-120"/>
-              </a:rPr>
-              <a:t>B3</a:t>
-            </a:r>
-            <a:endParaRPr lang="en-US" sz="2200" dirty="0"/>
-          </a:p>
-        </p:txBody>
-      </p:sp>
-      <p:sp>
-        <p:nvSpPr>
-          <p:cNvPr id="15" name="Text 13"/>
-          <p:cNvSpPr txBox="1"/>
-          <p:nvPr/>
-        </p:nvSpPr>
-        <p:spPr>
-          <a:xfrm>
-            <a:off x="777240" y="3886200"/>
-            <a:ext cx="3566160" cy="457200"/>
-          </a:xfrm>
-          <a:prstGeom prst="rect">
-            <a:avLst/>
-          </a:prstGeom>
-          <a:noFill/>
-          <a:ln/>
-        </p:spPr>
-        <p:txBody>
-          <a:bodyPr wrap="square" lIns="0" tIns="0" rIns="0" bIns="0" rtlCol="0" anchor="ctr"/>
-          <a:lstStyle/>
-          <a:p>
-            <a:pPr indent="0" marL="0">
-              <a:buNone/>
-            </a:pPr>
-            <a:r>
-              <a:rPr lang="en-US" sz="1100" dirty="0">
-                <a:solidFill>
-                  <a:srgbClr val="555B6E"/>
-                </a:solidFill>
-                <a:latin typeface="Calibri" pitchFamily="34" charset="0"/>
-                <a:ea typeface="Calibri" pitchFamily="34" charset="-122"/>
-                <a:cs typeface="Calibri" pitchFamily="34" charset="-120"/>
-              </a:rPr>
-              <a:t>1,808 test HS, largest minority pool</a:t>
-            </a:r>
-            <a:endParaRPr lang="en-US" sz="1100" dirty="0"/>
-          </a:p>
-        </p:txBody>
-      </p:sp>
-      <p:sp>
-        <p:nvSpPr>
-          <p:cNvPr id="16" name="Text 14"/>
-          <p:cNvSpPr txBox="1"/>
-          <p:nvPr/>
-        </p:nvSpPr>
-        <p:spPr>
-          <a:xfrm>
-            <a:off x="4572000" y="3337560"/>
-            <a:ext cx="822960" cy="320040"/>
-          </a:xfrm>
-          <a:prstGeom prst="rect">
-            <a:avLst/>
-          </a:prstGeom>
-          <a:noFill/>
-          <a:ln/>
-        </p:spPr>
-        <p:txBody>
-          <a:bodyPr wrap="square" lIns="0" tIns="0" rIns="0" bIns="0" rtlCol="0" anchor="ctr"/>
-          <a:lstStyle/>
-          <a:p>
-            <a:pPr indent="0" marL="0">
-              <a:buNone/>
-            </a:pPr>
-            <a:r>
-              <a:rPr lang="en-US" sz="1100" b="1" dirty="0">
-                <a:solidFill>
-                  <a:srgbClr val="555B6E"/>
-                </a:solidFill>
-                <a:latin typeface="Calibri" pitchFamily="34" charset="0"/>
-                <a:ea typeface="Calibri" pitchFamily="34" charset="-122"/>
-                <a:cs typeface="Calibri" pitchFamily="34" charset="-120"/>
-              </a:rPr>
-              <a:t>ROS</a:t>
-            </a:r>
-            <a:endParaRPr lang="en-US" sz="1100" dirty="0"/>
-          </a:p>
-        </p:txBody>
-      </p:sp>
-      <p:sp>
-        <p:nvSpPr>
-          <p:cNvPr id="17" name="Shape 15"/>
-          <p:cNvSpPr/>
-          <p:nvPr/>
-        </p:nvSpPr>
-        <p:spPr>
-          <a:xfrm>
-            <a:off x="5394960" y="3355848"/>
-            <a:ext cx="4012753" cy="274320"/>
-          </a:xfrm>
-          <a:prstGeom prst="rect">
-            <a:avLst/>
-          </a:prstGeom>
-          <a:solidFill>
-            <a:srgbClr val="B9C6E0"/>
-          </a:solidFill>
-          <a:ln/>
-        </p:spPr>
-      </p:sp>
-      <p:sp>
-        <p:nvSpPr>
-          <p:cNvPr id="18" name="Text 16"/>
-          <p:cNvSpPr txBox="1"/>
-          <p:nvPr/>
-        </p:nvSpPr>
-        <p:spPr>
-          <a:xfrm>
-            <a:off x="9453433" y="3310128"/>
-            <a:ext cx="731520" cy="320040"/>
-          </a:xfrm>
-          <a:prstGeom prst="rect">
-            <a:avLst/>
-          </a:prstGeom>
-          <a:noFill/>
-          <a:ln/>
-        </p:spPr>
-        <p:txBody>
-          <a:bodyPr wrap="square" lIns="0" tIns="0" rIns="0" bIns="0" rtlCol="0" anchor="ctr"/>
-          <a:lstStyle/>
-          <a:p>
-            <a:pPr indent="0" marL="0">
-              <a:buNone/>
-            </a:pPr>
-            <a:r>
-              <a:rPr lang="en-US" sz="1100" b="1" dirty="0">
-                <a:solidFill>
-                  <a:srgbClr val="1E2761"/>
-                </a:solidFill>
-                <a:latin typeface="Calibri" pitchFamily="34" charset="0"/>
-                <a:ea typeface="Calibri" pitchFamily="34" charset="-122"/>
-                <a:cs typeface="Calibri" pitchFamily="34" charset="-120"/>
-              </a:rPr>
-              <a:t>0.954</a:t>
-            </a:r>
-            <a:endParaRPr lang="en-US" sz="1100" dirty="0"/>
-          </a:p>
-        </p:txBody>
-      </p:sp>
-      <p:sp>
-        <p:nvSpPr>
-          <p:cNvPr id="19" name="Text 17"/>
-          <p:cNvSpPr txBox="1"/>
-          <p:nvPr/>
-        </p:nvSpPr>
-        <p:spPr>
-          <a:xfrm>
-            <a:off x="4572000" y="3794760"/>
-            <a:ext cx="822960" cy="320040"/>
-          </a:xfrm>
-          <a:prstGeom prst="rect">
-            <a:avLst/>
-          </a:prstGeom>
-          <a:noFill/>
-          <a:ln/>
-        </p:spPr>
-        <p:txBody>
-          <a:bodyPr wrap="square" lIns="0" tIns="0" rIns="0" bIns="0" rtlCol="0" anchor="ctr"/>
-          <a:lstStyle/>
-          <a:p>
-            <a:pPr indent="0" marL="0">
-              <a:buNone/>
-            </a:pPr>
-            <a:r>
-              <a:rPr lang="en-US" sz="1100" b="1" dirty="0">
-                <a:solidFill>
-                  <a:srgbClr val="555B6E"/>
-                </a:solidFill>
-                <a:latin typeface="Calibri" pitchFamily="34" charset="0"/>
-                <a:ea typeface="Calibri" pitchFamily="34" charset="-122"/>
-                <a:cs typeface="Calibri" pitchFamily="34" charset="-120"/>
-              </a:rPr>
-              <a:t>ROS+Aug</a:t>
-            </a:r>
-            <a:endParaRPr lang="en-US" sz="1100" dirty="0"/>
-          </a:p>
-        </p:txBody>
-      </p:sp>
-      <p:sp>
-        <p:nvSpPr>
-          <p:cNvPr id="20" name="Shape 18"/>
-          <p:cNvSpPr/>
-          <p:nvPr/>
-        </p:nvSpPr>
-        <p:spPr>
-          <a:xfrm>
-            <a:off x="5394960" y="3813048"/>
-            <a:ext cx="4067434" cy="274320"/>
-          </a:xfrm>
-          <a:prstGeom prst="rect">
-            <a:avLst/>
-          </a:prstGeom>
-          <a:solidFill>
-            <a:srgbClr val="C44E52"/>
-          </a:solidFill>
-          <a:ln/>
-        </p:spPr>
-      </p:sp>
-      <p:sp>
-        <p:nvSpPr>
-          <p:cNvPr id="21" name="Text 19"/>
-          <p:cNvSpPr txBox="1"/>
-          <p:nvPr/>
-        </p:nvSpPr>
-        <p:spPr>
-          <a:xfrm>
-            <a:off x="9508114" y="3767328"/>
-            <a:ext cx="731520" cy="320040"/>
-          </a:xfrm>
-          <a:prstGeom prst="rect">
-            <a:avLst/>
-          </a:prstGeom>
-          <a:noFill/>
-          <a:ln/>
-        </p:spPr>
-        <p:txBody>
-          <a:bodyPr wrap="square" lIns="0" tIns="0" rIns="0" bIns="0" rtlCol="0" anchor="ctr"/>
-          <a:lstStyle/>
-          <a:p>
-            <a:pPr indent="0" marL="0">
-              <a:buNone/>
-            </a:pPr>
-            <a:r>
-              <a:rPr lang="en-US" sz="1100" b="1" dirty="0">
-                <a:solidFill>
-                  <a:srgbClr val="1E2761"/>
-                </a:solidFill>
-                <a:latin typeface="Calibri" pitchFamily="34" charset="0"/>
-                <a:ea typeface="Calibri" pitchFamily="34" charset="-122"/>
-                <a:cs typeface="Calibri" pitchFamily="34" charset="-120"/>
-              </a:rPr>
-              <a:t>0.967</a:t>
-            </a:r>
-            <a:endParaRPr lang="en-US" sz="1100" dirty="0"/>
-          </a:p>
-        </p:txBody>
-      </p:sp>
-      <p:sp>
-        <p:nvSpPr>
-          <p:cNvPr id="22" name="Shape 20"/>
-          <p:cNvSpPr/>
-          <p:nvPr/>
-        </p:nvSpPr>
-        <p:spPr>
-          <a:xfrm>
-            <a:off x="548640" y="4617720"/>
-            <a:ext cx="11064240" cy="1234440"/>
-          </a:xfrm>
-          <a:prstGeom prst="roundRect">
-            <a:avLst>
-              <a:gd name="adj" fmla="val 5926"/>
-            </a:avLst>
-          </a:prstGeom>
-          <a:solidFill>
-            <a:srgbClr val="F4F5F9"/>
-          </a:solidFill>
-          <a:ln/>
-        </p:spPr>
-      </p:sp>
-      <p:sp>
-        <p:nvSpPr>
-          <p:cNvPr id="23" name="Text 21"/>
-          <p:cNvSpPr txBox="1"/>
-          <p:nvPr/>
-        </p:nvSpPr>
-        <p:spPr>
-          <a:xfrm>
-            <a:off x="777240" y="4754880"/>
-            <a:ext cx="914400" cy="548640"/>
-          </a:xfrm>
-          <a:prstGeom prst="rect">
-            <a:avLst/>
-          </a:prstGeom>
-          <a:noFill/>
-          <a:ln/>
-        </p:spPr>
-        <p:txBody>
-          <a:bodyPr wrap="square" lIns="0" tIns="0" rIns="0" bIns="0" rtlCol="0" anchor="ctr"/>
-          <a:lstStyle/>
-          <a:p>
-            <a:pPr indent="0" marL="0">
-              <a:buNone/>
-            </a:pPr>
-            <a:r>
-              <a:rPr lang="en-US" sz="2200" b="1" dirty="0">
-                <a:solidFill>
-                  <a:srgbClr val="1E2761"/>
-                </a:solidFill>
-                <a:latin typeface="Cambria" pitchFamily="34" charset="0"/>
-                <a:ea typeface="Cambria" pitchFamily="34" charset="-122"/>
-                <a:cs typeface="Cambria" pitchFamily="34" charset="-120"/>
-              </a:rPr>
-              <a:t>B5</a:t>
-            </a:r>
-            <a:endParaRPr lang="en-US" sz="2200" dirty="0"/>
-          </a:p>
-        </p:txBody>
-      </p:sp>
-      <p:sp>
-        <p:nvSpPr>
-          <p:cNvPr id="24" name="Text 22"/>
-          <p:cNvSpPr txBox="1"/>
-          <p:nvPr/>
-        </p:nvSpPr>
-        <p:spPr>
-          <a:xfrm>
-            <a:off x="777240" y="5303520"/>
-            <a:ext cx="3566160" cy="457200"/>
-          </a:xfrm>
-          <a:prstGeom prst="rect">
-            <a:avLst/>
-          </a:prstGeom>
-          <a:noFill/>
-          <a:ln/>
-        </p:spPr>
-        <p:txBody>
-          <a:bodyPr wrap="square" lIns="0" tIns="0" rIns="0" bIns="0" rtlCol="0" anchor="ctr"/>
-          <a:lstStyle/>
-          <a:p>
-            <a:pPr indent="0" marL="0">
-              <a:buNone/>
-            </a:pPr>
-            <a:r>
-              <a:rPr lang="en-US" sz="1100" dirty="0">
-                <a:solidFill>
-                  <a:srgbClr val="555B6E"/>
-                </a:solidFill>
-                <a:latin typeface="Calibri" pitchFamily="34" charset="0"/>
-                <a:ea typeface="Calibri" pitchFamily="34" charset="-122"/>
-                <a:cs typeface="Calibri" pitchFamily="34" charset="-120"/>
-              </a:rPr>
-              <a:t>Only 26 original training HS images</a:t>
-            </a:r>
-            <a:endParaRPr lang="en-US" sz="1100" dirty="0"/>
-          </a:p>
-        </p:txBody>
-      </p:sp>
-      <p:sp>
-        <p:nvSpPr>
-          <p:cNvPr id="25" name="Text 23"/>
-          <p:cNvSpPr txBox="1"/>
-          <p:nvPr/>
-        </p:nvSpPr>
-        <p:spPr>
-          <a:xfrm>
-            <a:off x="4572000" y="4754880"/>
-            <a:ext cx="822960" cy="320040"/>
-          </a:xfrm>
-          <a:prstGeom prst="rect">
-            <a:avLst/>
-          </a:prstGeom>
-          <a:noFill/>
-          <a:ln/>
-        </p:spPr>
-        <p:txBody>
-          <a:bodyPr wrap="square" lIns="0" tIns="0" rIns="0" bIns="0" rtlCol="0" anchor="ctr"/>
-          <a:lstStyle/>
-          <a:p>
-            <a:pPr indent="0" marL="0">
-              <a:buNone/>
-            </a:pPr>
-            <a:r>
-              <a:rPr lang="en-US" sz="1100" b="1" dirty="0">
-                <a:solidFill>
-                  <a:srgbClr val="555B6E"/>
-                </a:solidFill>
-                <a:latin typeface="Calibri" pitchFamily="34" charset="0"/>
-                <a:ea typeface="Calibri" pitchFamily="34" charset="-122"/>
-                <a:cs typeface="Calibri" pitchFamily="34" charset="-120"/>
-              </a:rPr>
-              <a:t>ROS</a:t>
-            </a:r>
-            <a:endParaRPr lang="en-US" sz="1100" dirty="0"/>
-          </a:p>
-        </p:txBody>
-      </p:sp>
-      <p:sp>
-        <p:nvSpPr>
-          <p:cNvPr id="26" name="Shape 24"/>
-          <p:cNvSpPr/>
-          <p:nvPr/>
-        </p:nvSpPr>
-        <p:spPr>
-          <a:xfrm>
-            <a:off x="5394960" y="4773168"/>
-            <a:ext cx="3844503" cy="274320"/>
-          </a:xfrm>
-          <a:prstGeom prst="rect">
-            <a:avLst/>
-          </a:prstGeom>
-          <a:solidFill>
-            <a:srgbClr val="55A868"/>
-          </a:solidFill>
-          <a:ln/>
-        </p:spPr>
-      </p:sp>
-      <p:sp>
-        <p:nvSpPr>
-          <p:cNvPr id="27" name="Text 25"/>
-          <p:cNvSpPr txBox="1"/>
-          <p:nvPr/>
-        </p:nvSpPr>
-        <p:spPr>
-          <a:xfrm>
-            <a:off x="9285183" y="4727448"/>
-            <a:ext cx="731520" cy="320040"/>
-          </a:xfrm>
-          <a:prstGeom prst="rect">
-            <a:avLst/>
-          </a:prstGeom>
-          <a:noFill/>
-          <a:ln/>
-        </p:spPr>
-        <p:txBody>
-          <a:bodyPr wrap="square" lIns="0" tIns="0" rIns="0" bIns="0" rtlCol="0" anchor="ctr"/>
-          <a:lstStyle/>
-          <a:p>
-            <a:pPr indent="0" marL="0">
-              <a:buNone/>
-            </a:pPr>
-            <a:r>
-              <a:rPr lang="en-US" sz="1100" b="1" dirty="0">
-                <a:solidFill>
-                  <a:srgbClr val="1E2761"/>
-                </a:solidFill>
-                <a:latin typeface="Calibri" pitchFamily="34" charset="0"/>
-                <a:ea typeface="Calibri" pitchFamily="34" charset="-122"/>
-                <a:cs typeface="Calibri" pitchFamily="34" charset="-120"/>
-              </a:rPr>
-              <a:t>0.914</a:t>
-            </a:r>
-            <a:endParaRPr lang="en-US" sz="1100" dirty="0"/>
-          </a:p>
-        </p:txBody>
-      </p:sp>
-      <p:sp>
-        <p:nvSpPr>
-          <p:cNvPr id="28" name="Text 26"/>
-          <p:cNvSpPr txBox="1"/>
-          <p:nvPr/>
-        </p:nvSpPr>
-        <p:spPr>
-          <a:xfrm>
-            <a:off x="4572000" y="5212080"/>
-            <a:ext cx="822960" cy="320040"/>
-          </a:xfrm>
-          <a:prstGeom prst="rect">
-            <a:avLst/>
-          </a:prstGeom>
-          <a:noFill/>
-          <a:ln/>
-        </p:spPr>
-        <p:txBody>
-          <a:bodyPr wrap="square" lIns="0" tIns="0" rIns="0" bIns="0" rtlCol="0" anchor="ctr"/>
-          <a:lstStyle/>
-          <a:p>
-            <a:pPr indent="0" marL="0">
-              <a:buNone/>
-            </a:pPr>
-            <a:r>
-              <a:rPr lang="en-US" sz="1100" b="1" dirty="0">
-                <a:solidFill>
-                  <a:srgbClr val="555B6E"/>
-                </a:solidFill>
-                <a:latin typeface="Calibri" pitchFamily="34" charset="0"/>
-                <a:ea typeface="Calibri" pitchFamily="34" charset="-122"/>
-                <a:cs typeface="Calibri" pitchFamily="34" charset="-120"/>
-              </a:rPr>
-              <a:t>ROS+Aug</a:t>
-            </a:r>
-            <a:endParaRPr lang="en-US" sz="1100" dirty="0"/>
-          </a:p>
-        </p:txBody>
-      </p:sp>
-      <p:sp>
-        <p:nvSpPr>
-          <p:cNvPr id="29" name="Shape 27"/>
-          <p:cNvSpPr/>
-          <p:nvPr/>
-        </p:nvSpPr>
-        <p:spPr>
-          <a:xfrm>
-            <a:off x="5394960" y="5230368"/>
-            <a:ext cx="2973812" cy="274320"/>
-          </a:xfrm>
-          <a:prstGeom prst="rect">
-            <a:avLst/>
-          </a:prstGeom>
-          <a:solidFill>
-            <a:srgbClr val="E7B3B5"/>
-          </a:solidFill>
-          <a:ln/>
-        </p:spPr>
-      </p:sp>
-      <p:sp>
-        <p:nvSpPr>
-          <p:cNvPr id="30" name="Text 28"/>
-          <p:cNvSpPr txBox="1"/>
-          <p:nvPr/>
-        </p:nvSpPr>
-        <p:spPr>
-          <a:xfrm>
-            <a:off x="8414492" y="5184648"/>
-            <a:ext cx="731520" cy="320040"/>
-          </a:xfrm>
-          <a:prstGeom prst="rect">
-            <a:avLst/>
-          </a:prstGeom>
-          <a:noFill/>
-          <a:ln/>
-        </p:spPr>
-        <p:txBody>
-          <a:bodyPr wrap="square" lIns="0" tIns="0" rIns="0" bIns="0" rtlCol="0" anchor="ctr"/>
-          <a:lstStyle/>
-          <a:p>
-            <a:pPr indent="0" marL="0">
-              <a:buNone/>
-            </a:pPr>
-            <a:r>
-              <a:rPr lang="en-US" sz="1100" b="1" dirty="0">
-                <a:solidFill>
-                  <a:srgbClr val="1E2761"/>
-                </a:solidFill>
-                <a:latin typeface="Calibri" pitchFamily="34" charset="0"/>
-                <a:ea typeface="Calibri" pitchFamily="34" charset="-122"/>
-                <a:cs typeface="Calibri" pitchFamily="34" charset="-120"/>
-              </a:rPr>
-              <a:t>0.707</a:t>
-            </a:r>
-            <a:endParaRPr lang="en-US" sz="1100" dirty="0"/>
-          </a:p>
-        </p:txBody>
-      </p:sp>
-      <p:sp>
-        <p:nvSpPr>
-          <p:cNvPr id="31" name="Text 29"/>
-          <p:cNvSpPr txBox="1"/>
-          <p:nvPr/>
-        </p:nvSpPr>
-        <p:spPr>
-          <a:xfrm>
-            <a:off x="548640" y="5715000"/>
-            <a:ext cx="11064240" cy="548640"/>
-          </a:xfrm>
-          <a:prstGeom prst="rect">
-            <a:avLst/>
-          </a:prstGeom>
-          <a:noFill/>
-          <a:ln/>
-        </p:spPr>
-        <p:txBody>
-          <a:bodyPr wrap="square" lIns="0" tIns="0" rIns="0" bIns="0" rtlCol="0" anchor="ctr"/>
-          <a:lstStyle/>
-          <a:p>
-            <a:pPr indent="0" marL="0">
-              <a:buNone/>
-            </a:pPr>
-            <a:r>
-              <a:rPr lang="en-US" sz="1200" i="1" dirty="0">
-                <a:solidFill>
-                  <a:srgbClr val="1E2761"/>
-                </a:solidFill>
-                <a:latin typeface="Calibri" pitchFamily="34" charset="0"/>
-                <a:ea typeface="Calibri" pitchFamily="34" charset="-122"/>
-                <a:cs typeface="Calibri" pitchFamily="34" charset="-120"/>
-              </a:rPr>
-              <a:t>Augmentation adds real value when there's already moderate minority diversity — but when almost every hotspot the model sees is a flipped/rotated copy of one of a handful of originals, it can amplify noise instead of signal.</a:t>
-            </a:r>
-            <a:endParaRPr lang="en-US" sz="1200" dirty="0"/>
-          </a:p>
-        </p:txBody>
-      </p:sp>
-      <p:sp>
-        <p:nvSpPr>
-          <p:cNvPr id="32" name="Text 30"/>
+                <a:latin typeface="Calibri" pitchFamily="34" charset="0"/>
+                <a:ea typeface="Calibri" pitchFamily="34" charset="-122"/>
+                <a:cs typeface="Calibri" pitchFamily="34" charset="-120"/>
+              </a:rPr>
+              <a:t>its gradient signal from the rare positive class is heavily diluted by the natural imbalance. DA2's fixed-epoch, no-checkpoint protocol evaluated RUS at the wrong point in training.</a:t>
+            </a:r>
+            <a:endParaRPr lang="en-US" sz="1250" dirty="0"/>
+          </a:p>
+        </p:txBody>
+      </p:sp>
+      <p:sp>
+        <p:nvSpPr>
+          <p:cNvPr id="7" name="Text 4"/>
           <p:cNvSpPr txBox="1"/>
           <p:nvPr/>
         </p:nvSpPr>
         <p:spPr>
           <a:xfrm>
             <a:off x="457200" y="6473952"/>
-            <a:ext cx="8229600" cy="274320"/>
+            <a:ext cx="9144000" cy="274320"/>
           </a:xfrm>
           <a:prstGeom prst="rect">
             <a:avLst/>
@@ -5996,7 +5251,7 @@
                 <a:ea typeface="Calibri" pitchFamily="34" charset="-122"/>
                 <a:cs typeface="Calibri" pitchFamily="34" charset="-120"/>
               </a:rPr>
-              <a:t>Group 11 · Data Balancing and Augmentation Strategies for Hotspot Detection</a:t>
+              <a:t>Group 11 (DA3 Revision) · Data Balancing and Augmentation Strategies for Hotspot Detection</a:t>
             </a:r>
             <a:endParaRPr lang="en-US" sz="900" dirty="0"/>
           </a:p>
@@ -6004,7 +5259,7 @@
       </p:sp>
       <p:sp>
         <p:nvSpPr>
-          <p:cNvPr id="33" name="Text 31"/>
+          <p:cNvPr id="8" name="Text 5"/>
           <p:cNvSpPr txBox="1"/>
           <p:nvPr/>
         </p:nvSpPr>
@@ -6106,7 +5361,7 @@
                 <a:ea typeface="Cambria" pitchFamily="34" charset="-122"/>
                 <a:cs typeface="Cambria" pitchFamily="34" charset="-120"/>
               </a:rPr>
-              <a:t>Ablation: Effect of the Target Class Ratio</a:t>
+              <a:t>PR-AUC Reveals What Balanced Accuracy Hides</a:t>
             </a:r>
             <a:endParaRPr lang="en-US" sz="3000" dirty="0"/>
           </a:p>
@@ -6145,7 +5400,7 @@
                 <a:ea typeface="Calibri" pitchFamily="34" charset="-122"/>
                 <a:cs typeface="Calibri" pitchFamily="34" charset="-120"/>
               </a:rPr>
-              <a:t>Sweeping HS:NHS target ratio from 0.1 (mild) to 1.0 (fully balanced) — RUS, ROS+Aug, Combined × 5 benchmarks</a:t>
+              <a:t>Statistically significant differences (paired t-test + Wilcoxon, both p&lt;0.05)</a:t>
             </a:r>
             <a:endParaRPr lang="en-US" sz="1500" dirty="0"/>
           </a:p>
@@ -6159,13 +5414,187 @@
         </p:nvSpPr>
         <p:spPr>
           <a:xfrm>
-            <a:off x="548640" y="1874520"/>
-            <a:ext cx="11064240" cy="1371600"/>
-          </a:xfrm>
-          <a:prstGeom prst="roundRect">
-            <a:avLst>
-              <a:gd name="adj" fmla="val 5333"/>
-            </a:avLst>
+            <a:off x="548640" y="1691640"/>
+            <a:ext cx="11064240" cy="411480"/>
+          </a:xfrm>
+          <a:prstGeom prst="rect">
+            <a:avLst/>
+          </a:prstGeom>
+          <a:solidFill>
+            <a:srgbClr val="1E2761"/>
+          </a:solidFill>
+          <a:ln/>
+        </p:spPr>
+      </p:sp>
+      <p:sp>
+        <p:nvSpPr>
+          <p:cNvPr id="5" name="Text 3"/>
+          <p:cNvSpPr txBox="1"/>
+          <p:nvPr/>
+        </p:nvSpPr>
+        <p:spPr>
+          <a:xfrm>
+            <a:off x="731520" y="1746504"/>
+            <a:ext cx="4754880" cy="292608"/>
+          </a:xfrm>
+          <a:prstGeom prst="rect">
+            <a:avLst/>
+          </a:prstGeom>
+          <a:noFill/>
+          <a:ln/>
+        </p:spPr>
+        <p:txBody>
+          <a:bodyPr wrap="square" lIns="0" tIns="0" rIns="0" bIns="0" rtlCol="0" anchor="ctr"/>
+          <a:lstStyle/>
+          <a:p>
+            <a:pPr indent="0" marL="0">
+              <a:buNone/>
+            </a:pPr>
+            <a:r>
+              <a:rPr lang="en-US" sz="1200" b="1" dirty="0">
+                <a:solidFill>
+                  <a:srgbClr val="FFFFFF"/>
+                </a:solidFill>
+                <a:latin typeface="Calibri" pitchFamily="34" charset="0"/>
+                <a:ea typeface="Calibri" pitchFamily="34" charset="-122"/>
+                <a:cs typeface="Calibri" pitchFamily="34" charset="-120"/>
+              </a:rPr>
+              <a:t>Comparison (PR-AUC)</a:t>
+            </a:r>
+            <a:endParaRPr lang="en-US" sz="1200" dirty="0"/>
+          </a:p>
+        </p:txBody>
+      </p:sp>
+      <p:sp>
+        <p:nvSpPr>
+          <p:cNvPr id="6" name="Text 4"/>
+          <p:cNvSpPr txBox="1"/>
+          <p:nvPr/>
+        </p:nvSpPr>
+        <p:spPr>
+          <a:xfrm>
+            <a:off x="5669280" y="1746504"/>
+            <a:ext cx="1188720" cy="292608"/>
+          </a:xfrm>
+          <a:prstGeom prst="rect">
+            <a:avLst/>
+          </a:prstGeom>
+          <a:noFill/>
+          <a:ln/>
+        </p:spPr>
+        <p:txBody>
+          <a:bodyPr wrap="square" lIns="0" tIns="0" rIns="0" bIns="0" rtlCol="0" anchor="ctr"/>
+          <a:lstStyle/>
+          <a:p>
+            <a:pPr indent="0" marL="0">
+              <a:buNone/>
+            </a:pPr>
+            <a:r>
+              <a:rPr lang="en-US" sz="1200" b="1" dirty="0">
+                <a:solidFill>
+                  <a:srgbClr val="FFFFFF"/>
+                </a:solidFill>
+                <a:latin typeface="Calibri" pitchFamily="34" charset="0"/>
+                <a:ea typeface="Calibri" pitchFamily="34" charset="-122"/>
+                <a:cs typeface="Calibri" pitchFamily="34" charset="-120"/>
+              </a:rPr>
+              <a:t>Mean A</a:t>
+            </a:r>
+            <a:endParaRPr lang="en-US" sz="1200" dirty="0"/>
+          </a:p>
+        </p:txBody>
+      </p:sp>
+      <p:sp>
+        <p:nvSpPr>
+          <p:cNvPr id="7" name="Text 5"/>
+          <p:cNvSpPr txBox="1"/>
+          <p:nvPr/>
+        </p:nvSpPr>
+        <p:spPr>
+          <a:xfrm>
+            <a:off x="6949440" y="1746504"/>
+            <a:ext cx="1188720" cy="292608"/>
+          </a:xfrm>
+          <a:prstGeom prst="rect">
+            <a:avLst/>
+          </a:prstGeom>
+          <a:noFill/>
+          <a:ln/>
+        </p:spPr>
+        <p:txBody>
+          <a:bodyPr wrap="square" lIns="0" tIns="0" rIns="0" bIns="0" rtlCol="0" anchor="ctr"/>
+          <a:lstStyle/>
+          <a:p>
+            <a:pPr indent="0" marL="0">
+              <a:buNone/>
+            </a:pPr>
+            <a:r>
+              <a:rPr lang="en-US" sz="1200" b="1" dirty="0">
+                <a:solidFill>
+                  <a:srgbClr val="FFFFFF"/>
+                </a:solidFill>
+                <a:latin typeface="Calibri" pitchFamily="34" charset="0"/>
+                <a:ea typeface="Calibri" pitchFamily="34" charset="-122"/>
+                <a:cs typeface="Calibri" pitchFamily="34" charset="-120"/>
+              </a:rPr>
+              <a:t>Mean B</a:t>
+            </a:r>
+            <a:endParaRPr lang="en-US" sz="1200" dirty="0"/>
+          </a:p>
+        </p:txBody>
+      </p:sp>
+      <p:sp>
+        <p:nvSpPr>
+          <p:cNvPr id="8" name="Text 6"/>
+          <p:cNvSpPr txBox="1"/>
+          <p:nvPr/>
+        </p:nvSpPr>
+        <p:spPr>
+          <a:xfrm>
+            <a:off x="8229600" y="1746504"/>
+            <a:ext cx="1188720" cy="292608"/>
+          </a:xfrm>
+          <a:prstGeom prst="rect">
+            <a:avLst/>
+          </a:prstGeom>
+          <a:noFill/>
+          <a:ln/>
+        </p:spPr>
+        <p:txBody>
+          <a:bodyPr wrap="square" lIns="0" tIns="0" rIns="0" bIns="0" rtlCol="0" anchor="ctr"/>
+          <a:lstStyle/>
+          <a:p>
+            <a:pPr indent="0" marL="0">
+              <a:buNone/>
+            </a:pPr>
+            <a:r>
+              <a:rPr lang="en-US" sz="1200" b="1" dirty="0">
+                <a:solidFill>
+                  <a:srgbClr val="FFFFFF"/>
+                </a:solidFill>
+                <a:latin typeface="Calibri" pitchFamily="34" charset="0"/>
+                <a:ea typeface="Calibri" pitchFamily="34" charset="-122"/>
+                <a:cs typeface="Calibri" pitchFamily="34" charset="-120"/>
+              </a:rPr>
+              <a:t>Result</a:t>
+            </a:r>
+            <a:endParaRPr lang="en-US" sz="1200" dirty="0"/>
+          </a:p>
+        </p:txBody>
+      </p:sp>
+      <p:sp>
+        <p:nvSpPr>
+          <p:cNvPr id="9" name="Shape 7"/>
+          <p:cNvSpPr/>
+          <p:nvPr/>
+        </p:nvSpPr>
+        <p:spPr>
+          <a:xfrm>
+            <a:off x="548640" y="2103120"/>
+            <a:ext cx="11064240" cy="621792"/>
+          </a:xfrm>
+          <a:prstGeom prst="rect">
+            <a:avLst/>
           </a:prstGeom>
           <a:solidFill>
             <a:srgbClr val="F4F5F9"/>
@@ -6175,50 +5604,206 @@
       </p:sp>
       <p:sp>
         <p:nvSpPr>
-          <p:cNvPr id="5" name="Shape 3"/>
+          <p:cNvPr id="10" name="Text 8"/>
+          <p:cNvSpPr txBox="1"/>
+          <p:nvPr/>
+        </p:nvSpPr>
+        <p:spPr>
+          <a:xfrm>
+            <a:off x="731520" y="2221992"/>
+            <a:ext cx="4754880" cy="384048"/>
+          </a:xfrm>
+          <a:prstGeom prst="rect">
+            <a:avLst/>
+          </a:prstGeom>
+          <a:noFill/>
+          <a:ln/>
+        </p:spPr>
+        <p:txBody>
+          <a:bodyPr wrap="square" lIns="0" tIns="0" rIns="0" bIns="0" rtlCol="0" anchor="ctr"/>
+          <a:lstStyle/>
+          <a:p>
+            <a:pPr indent="0" marL="0">
+              <a:buNone/>
+            </a:pPr>
+            <a:r>
+              <a:rPr lang="en-US" sz="1300" b="1" dirty="0">
+                <a:solidFill>
+                  <a:srgbClr val="1E2761"/>
+                </a:solidFill>
+                <a:latin typeface="Calibri" pitchFamily="34" charset="0"/>
+                <a:ea typeface="Calibri" pitchFamily="34" charset="-122"/>
+                <a:cs typeface="Calibri" pitchFamily="34" charset="-120"/>
+              </a:rPr>
+              <a:t>ROS vs. RUS</a:t>
+            </a:r>
+            <a:endParaRPr lang="en-US" sz="1300" dirty="0"/>
+          </a:p>
+        </p:txBody>
+      </p:sp>
+      <p:sp>
+        <p:nvSpPr>
+          <p:cNvPr id="11" name="Text 9"/>
+          <p:cNvSpPr txBox="1"/>
+          <p:nvPr/>
+        </p:nvSpPr>
+        <p:spPr>
+          <a:xfrm>
+            <a:off x="5669280" y="2221992"/>
+            <a:ext cx="1188720" cy="384048"/>
+          </a:xfrm>
+          <a:prstGeom prst="rect">
+            <a:avLst/>
+          </a:prstGeom>
+          <a:noFill/>
+          <a:ln/>
+        </p:spPr>
+        <p:txBody>
+          <a:bodyPr wrap="square" lIns="0" tIns="0" rIns="0" bIns="0" rtlCol="0" anchor="ctr"/>
+          <a:lstStyle/>
+          <a:p>
+            <a:pPr indent="0" marL="0">
+              <a:buNone/>
+            </a:pPr>
+            <a:r>
+              <a:rPr lang="en-US" sz="1300" dirty="0">
+                <a:solidFill>
+                  <a:srgbClr val="555B6E"/>
+                </a:solidFill>
+                <a:latin typeface="Calibri" pitchFamily="34" charset="0"/>
+                <a:ea typeface="Calibri" pitchFamily="34" charset="-122"/>
+                <a:cs typeface="Calibri" pitchFamily="34" charset="-120"/>
+              </a:rPr>
+              <a:t>0.750</a:t>
+            </a:r>
+            <a:endParaRPr lang="en-US" sz="1300" dirty="0"/>
+          </a:p>
+        </p:txBody>
+      </p:sp>
+      <p:sp>
+        <p:nvSpPr>
+          <p:cNvPr id="12" name="Text 10"/>
+          <p:cNvSpPr txBox="1"/>
+          <p:nvPr/>
+        </p:nvSpPr>
+        <p:spPr>
+          <a:xfrm>
+            <a:off x="6949440" y="2221992"/>
+            <a:ext cx="1188720" cy="384048"/>
+          </a:xfrm>
+          <a:prstGeom prst="rect">
+            <a:avLst/>
+          </a:prstGeom>
+          <a:noFill/>
+          <a:ln/>
+        </p:spPr>
+        <p:txBody>
+          <a:bodyPr wrap="square" lIns="0" tIns="0" rIns="0" bIns="0" rtlCol="0" anchor="ctr"/>
+          <a:lstStyle/>
+          <a:p>
+            <a:pPr indent="0" marL="0">
+              <a:buNone/>
+            </a:pPr>
+            <a:r>
+              <a:rPr lang="en-US" sz="1300" dirty="0">
+                <a:solidFill>
+                  <a:srgbClr val="555B6E"/>
+                </a:solidFill>
+                <a:latin typeface="Calibri" pitchFamily="34" charset="0"/>
+                <a:ea typeface="Calibri" pitchFamily="34" charset="-122"/>
+                <a:cs typeface="Calibri" pitchFamily="34" charset="-120"/>
+              </a:rPr>
+              <a:t>0.492</a:t>
+            </a:r>
+            <a:endParaRPr lang="en-US" sz="1300" dirty="0"/>
+          </a:p>
+        </p:txBody>
+      </p:sp>
+      <p:sp>
+        <p:nvSpPr>
+          <p:cNvPr id="13" name="Text 11"/>
+          <p:cNvSpPr txBox="1"/>
+          <p:nvPr/>
+        </p:nvSpPr>
+        <p:spPr>
+          <a:xfrm>
+            <a:off x="8229600" y="2221992"/>
+            <a:ext cx="2560320" cy="384048"/>
+          </a:xfrm>
+          <a:prstGeom prst="rect">
+            <a:avLst/>
+          </a:prstGeom>
+          <a:noFill/>
+          <a:ln/>
+        </p:spPr>
+        <p:txBody>
+          <a:bodyPr wrap="square" lIns="0" tIns="0" rIns="0" bIns="0" rtlCol="0" anchor="ctr"/>
+          <a:lstStyle/>
+          <a:p>
+            <a:pPr indent="0" marL="0">
+              <a:buNone/>
+            </a:pPr>
+            <a:r>
+              <a:rPr lang="en-US" sz="1300" b="1" dirty="0">
+                <a:solidFill>
+                  <a:srgbClr val="2E7D32"/>
+                </a:solidFill>
+                <a:latin typeface="Calibri" pitchFamily="34" charset="0"/>
+                <a:ea typeface="Calibri" pitchFamily="34" charset="-122"/>
+                <a:cs typeface="Calibri" pitchFamily="34" charset="-120"/>
+              </a:rPr>
+              <a:t>p=0.0048</a:t>
+            </a:r>
+            <a:endParaRPr lang="en-US" sz="1300" dirty="0"/>
+          </a:p>
+        </p:txBody>
+      </p:sp>
+      <p:sp>
+        <p:nvSpPr>
+          <p:cNvPr id="14" name="Shape 12"/>
           <p:cNvSpPr/>
           <p:nvPr/>
         </p:nvSpPr>
         <p:spPr>
           <a:xfrm>
-            <a:off x="548640" y="1874520"/>
-            <a:ext cx="109728" cy="1371600"/>
+            <a:off x="548640" y="2724912"/>
+            <a:ext cx="11064240" cy="621792"/>
           </a:xfrm>
           <a:prstGeom prst="rect">
             <a:avLst/>
           </a:prstGeom>
           <a:solidFill>
-            <a:srgbClr val="E63946"/>
+            <a:srgbClr val="FFFFFF"/>
           </a:solidFill>
           <a:ln/>
         </p:spPr>
       </p:sp>
       <p:sp>
         <p:nvSpPr>
-          <p:cNvPr id="6" name="Text 4"/>
-          <p:cNvSpPr txBox="1"/>
-          <p:nvPr/>
-        </p:nvSpPr>
-        <p:spPr>
-          <a:xfrm>
-            <a:off x="914400" y="2011680"/>
-            <a:ext cx="4023360" cy="1097280"/>
-          </a:xfrm>
-          <a:prstGeom prst="rect">
-            <a:avLst/>
-          </a:prstGeom>
-          <a:noFill/>
-          <a:ln/>
-        </p:spPr>
-        <p:txBody>
-          <a:bodyPr wrap="square" lIns="0" tIns="0" rIns="0" bIns="0" rtlCol="0" anchor="t"/>
-          <a:lstStyle/>
-          <a:p>
-            <a:pPr indent="0" marL="0">
-              <a:buNone/>
-            </a:pPr>
-            <a:r>
-              <a:rPr lang="en-US" sz="1400" b="1" dirty="0">
+          <p:cNvPr id="15" name="Text 13"/>
+          <p:cNvSpPr txBox="1"/>
+          <p:nvPr/>
+        </p:nvSpPr>
+        <p:spPr>
+          <a:xfrm>
+            <a:off x="731520" y="2843784"/>
+            <a:ext cx="4754880" cy="384048"/>
+          </a:xfrm>
+          <a:prstGeom prst="rect">
+            <a:avLst/>
+          </a:prstGeom>
+          <a:noFill/>
+          <a:ln/>
+        </p:spPr>
+        <p:txBody>
+          <a:bodyPr wrap="square" lIns="0" tIns="0" rIns="0" bIns="0" rtlCol="0" anchor="ctr"/>
+          <a:lstStyle/>
+          <a:p>
+            <a:pPr indent="0" marL="0">
+              <a:buNone/>
+            </a:pPr>
+            <a:r>
+              <a:rPr lang="en-US" sz="1300" b="1" dirty="0">
                 <a:solidFill>
                   <a:srgbClr val="1E2761"/>
                 </a:solidFill>
@@ -6226,38 +5811,38 @@
                 <a:ea typeface="Calibri" pitchFamily="34" charset="-122"/>
                 <a:cs typeface="Calibri" pitchFamily="34" charset="-120"/>
               </a:rPr>
-              <a:t>RUS on B5 never recovers</a:t>
-            </a:r>
-            <a:endParaRPr lang="en-US" sz="1400" dirty="0"/>
-          </a:p>
-        </p:txBody>
-      </p:sp>
-      <p:sp>
-        <p:nvSpPr>
-          <p:cNvPr id="7" name="Text 5"/>
-          <p:cNvSpPr txBox="1"/>
-          <p:nvPr/>
-        </p:nvSpPr>
-        <p:spPr>
-          <a:xfrm>
-            <a:off x="5029200" y="2011680"/>
-            <a:ext cx="6309360" cy="1097280"/>
-          </a:xfrm>
-          <a:prstGeom prst="rect">
-            <a:avLst/>
-          </a:prstGeom>
-          <a:noFill/>
-          <a:ln/>
-        </p:spPr>
-        <p:txBody>
-          <a:bodyPr wrap="square" lIns="0" tIns="0" rIns="0" bIns="0" rtlCol="0" anchor="t"/>
-          <a:lstStyle/>
-          <a:p>
-            <a:pPr indent="0" marL="0">
-              <a:buNone/>
-            </a:pPr>
-            <a:r>
-              <a:rPr lang="en-US" sz="1150" dirty="0">
+              <a:t>Bal.Batch vs. RUS</a:t>
+            </a:r>
+            <a:endParaRPr lang="en-US" sz="1300" dirty="0"/>
+          </a:p>
+        </p:txBody>
+      </p:sp>
+      <p:sp>
+        <p:nvSpPr>
+          <p:cNvPr id="16" name="Text 14"/>
+          <p:cNvSpPr txBox="1"/>
+          <p:nvPr/>
+        </p:nvSpPr>
+        <p:spPr>
+          <a:xfrm>
+            <a:off x="5669280" y="2843784"/>
+            <a:ext cx="1188720" cy="384048"/>
+          </a:xfrm>
+          <a:prstGeom prst="rect">
+            <a:avLst/>
+          </a:prstGeom>
+          <a:noFill/>
+          <a:ln/>
+        </p:spPr>
+        <p:txBody>
+          <a:bodyPr wrap="square" lIns="0" tIns="0" rIns="0" bIns="0" rtlCol="0" anchor="ctr"/>
+          <a:lstStyle/>
+          <a:p>
+            <a:pPr indent="0" marL="0">
+              <a:buNone/>
+            </a:pPr>
+            <a:r>
+              <a:rPr lang="en-US" sz="1300" dirty="0">
                 <a:solidFill>
                   <a:srgbClr val="555B6E"/>
                 </a:solidFill>
@@ -6265,27 +5850,103 @@
                 <a:ea typeface="Calibri" pitchFamily="34" charset="-122"/>
                 <a:cs typeface="Calibri" pitchFamily="34" charset="-120"/>
               </a:rPr>
-              <a:t>Recall stays at exactly 0.000 across every ratio tested — confirms the failure isn't a tuning artifact; there simply isn't enough minority data to rebalance with.</a:t>
-            </a:r>
-            <a:endParaRPr lang="en-US" sz="1150" dirty="0"/>
-          </a:p>
-        </p:txBody>
-      </p:sp>
-      <p:sp>
-        <p:nvSpPr>
-          <p:cNvPr id="8" name="Shape 6"/>
+              <a:t>0.718</a:t>
+            </a:r>
+            <a:endParaRPr lang="en-US" sz="1300" dirty="0"/>
+          </a:p>
+        </p:txBody>
+      </p:sp>
+      <p:sp>
+        <p:nvSpPr>
+          <p:cNvPr id="17" name="Text 15"/>
+          <p:cNvSpPr txBox="1"/>
+          <p:nvPr/>
+        </p:nvSpPr>
+        <p:spPr>
+          <a:xfrm>
+            <a:off x="6949440" y="2843784"/>
+            <a:ext cx="1188720" cy="384048"/>
+          </a:xfrm>
+          <a:prstGeom prst="rect">
+            <a:avLst/>
+          </a:prstGeom>
+          <a:noFill/>
+          <a:ln/>
+        </p:spPr>
+        <p:txBody>
+          <a:bodyPr wrap="square" lIns="0" tIns="0" rIns="0" bIns="0" rtlCol="0" anchor="ctr"/>
+          <a:lstStyle/>
+          <a:p>
+            <a:pPr indent="0" marL="0">
+              <a:buNone/>
+            </a:pPr>
+            <a:r>
+              <a:rPr lang="en-US" sz="1300" dirty="0">
+                <a:solidFill>
+                  <a:srgbClr val="555B6E"/>
+                </a:solidFill>
+                <a:latin typeface="Calibri" pitchFamily="34" charset="0"/>
+                <a:ea typeface="Calibri" pitchFamily="34" charset="-122"/>
+                <a:cs typeface="Calibri" pitchFamily="34" charset="-120"/>
+              </a:rPr>
+              <a:t>0.492</a:t>
+            </a:r>
+            <a:endParaRPr lang="en-US" sz="1300" dirty="0"/>
+          </a:p>
+        </p:txBody>
+      </p:sp>
+      <p:sp>
+        <p:nvSpPr>
+          <p:cNvPr id="18" name="Text 16"/>
+          <p:cNvSpPr txBox="1"/>
+          <p:nvPr/>
+        </p:nvSpPr>
+        <p:spPr>
+          <a:xfrm>
+            <a:off x="8229600" y="2843784"/>
+            <a:ext cx="2560320" cy="384048"/>
+          </a:xfrm>
+          <a:prstGeom prst="rect">
+            <a:avLst/>
+          </a:prstGeom>
+          <a:noFill/>
+          <a:ln/>
+        </p:spPr>
+        <p:txBody>
+          <a:bodyPr wrap="square" lIns="0" tIns="0" rIns="0" bIns="0" rtlCol="0" anchor="ctr"/>
+          <a:lstStyle/>
+          <a:p>
+            <a:pPr indent="0" marL="0">
+              <a:buNone/>
+            </a:pPr>
+            <a:r>
+              <a:rPr lang="en-US" sz="1300" b="1" dirty="0">
+                <a:solidFill>
+                  <a:srgbClr val="2E7D32"/>
+                </a:solidFill>
+                <a:latin typeface="Calibri" pitchFamily="34" charset="0"/>
+                <a:ea typeface="Calibri" pitchFamily="34" charset="-122"/>
+                <a:cs typeface="Calibri" pitchFamily="34" charset="-120"/>
+              </a:rPr>
+              <a:t>p=0.019</a:t>
+            </a:r>
+            <a:endParaRPr lang="en-US" sz="1300" dirty="0"/>
+          </a:p>
+        </p:txBody>
+      </p:sp>
+      <p:sp>
+        <p:nvSpPr>
+          <p:cNvPr id="19" name="Shape 17"/>
           <p:cNvSpPr/>
           <p:nvPr/>
         </p:nvSpPr>
         <p:spPr>
           <a:xfrm>
-            <a:off x="548640" y="3410712"/>
-            <a:ext cx="11064240" cy="1371600"/>
-          </a:xfrm>
-          <a:prstGeom prst="roundRect">
-            <a:avLst>
-              <a:gd name="adj" fmla="val 5333"/>
-            </a:avLst>
+            <a:off x="548640" y="3346704"/>
+            <a:ext cx="11064240" cy="621792"/>
+          </a:xfrm>
+          <a:prstGeom prst="rect">
+            <a:avLst/>
           </a:prstGeom>
           <a:solidFill>
             <a:srgbClr val="F4F5F9"/>
@@ -6295,50 +5956,206 @@
       </p:sp>
       <p:sp>
         <p:nvSpPr>
-          <p:cNvPr id="9" name="Shape 7"/>
+          <p:cNvPr id="20" name="Text 18"/>
+          <p:cNvSpPr txBox="1"/>
+          <p:nvPr/>
+        </p:nvSpPr>
+        <p:spPr>
+          <a:xfrm>
+            <a:off x="731520" y="3465576"/>
+            <a:ext cx="4754880" cy="384048"/>
+          </a:xfrm>
+          <a:prstGeom prst="rect">
+            <a:avLst/>
+          </a:prstGeom>
+          <a:noFill/>
+          <a:ln/>
+        </p:spPr>
+        <p:txBody>
+          <a:bodyPr wrap="square" lIns="0" tIns="0" rIns="0" bIns="0" rtlCol="0" anchor="ctr"/>
+          <a:lstStyle/>
+          <a:p>
+            <a:pPr indent="0" marL="0">
+              <a:buNone/>
+            </a:pPr>
+            <a:r>
+              <a:rPr lang="en-US" sz="1300" b="1" dirty="0">
+                <a:solidFill>
+                  <a:srgbClr val="1E2761"/>
+                </a:solidFill>
+                <a:latin typeface="Calibri" pitchFamily="34" charset="0"/>
+                <a:ea typeface="Calibri" pitchFamily="34" charset="-122"/>
+                <a:cs typeface="Calibri" pitchFamily="34" charset="-120"/>
+              </a:rPr>
+              <a:t>ROS vs. Baseline</a:t>
+            </a:r>
+            <a:endParaRPr lang="en-US" sz="1300" dirty="0"/>
+          </a:p>
+        </p:txBody>
+      </p:sp>
+      <p:sp>
+        <p:nvSpPr>
+          <p:cNvPr id="21" name="Text 19"/>
+          <p:cNvSpPr txBox="1"/>
+          <p:nvPr/>
+        </p:nvSpPr>
+        <p:spPr>
+          <a:xfrm>
+            <a:off x="5669280" y="3465576"/>
+            <a:ext cx="1188720" cy="384048"/>
+          </a:xfrm>
+          <a:prstGeom prst="rect">
+            <a:avLst/>
+          </a:prstGeom>
+          <a:noFill/>
+          <a:ln/>
+        </p:spPr>
+        <p:txBody>
+          <a:bodyPr wrap="square" lIns="0" tIns="0" rIns="0" bIns="0" rtlCol="0" anchor="ctr"/>
+          <a:lstStyle/>
+          <a:p>
+            <a:pPr indent="0" marL="0">
+              <a:buNone/>
+            </a:pPr>
+            <a:r>
+              <a:rPr lang="en-US" sz="1300" dirty="0">
+                <a:solidFill>
+                  <a:srgbClr val="555B6E"/>
+                </a:solidFill>
+                <a:latin typeface="Calibri" pitchFamily="34" charset="0"/>
+                <a:ea typeface="Calibri" pitchFamily="34" charset="-122"/>
+                <a:cs typeface="Calibri" pitchFamily="34" charset="-120"/>
+              </a:rPr>
+              <a:t>0.750</a:t>
+            </a:r>
+            <a:endParaRPr lang="en-US" sz="1300" dirty="0"/>
+          </a:p>
+        </p:txBody>
+      </p:sp>
+      <p:sp>
+        <p:nvSpPr>
+          <p:cNvPr id="22" name="Text 20"/>
+          <p:cNvSpPr txBox="1"/>
+          <p:nvPr/>
+        </p:nvSpPr>
+        <p:spPr>
+          <a:xfrm>
+            <a:off x="6949440" y="3465576"/>
+            <a:ext cx="1188720" cy="384048"/>
+          </a:xfrm>
+          <a:prstGeom prst="rect">
+            <a:avLst/>
+          </a:prstGeom>
+          <a:noFill/>
+          <a:ln/>
+        </p:spPr>
+        <p:txBody>
+          <a:bodyPr wrap="square" lIns="0" tIns="0" rIns="0" bIns="0" rtlCol="0" anchor="ctr"/>
+          <a:lstStyle/>
+          <a:p>
+            <a:pPr indent="0" marL="0">
+              <a:buNone/>
+            </a:pPr>
+            <a:r>
+              <a:rPr lang="en-US" sz="1300" dirty="0">
+                <a:solidFill>
+                  <a:srgbClr val="555B6E"/>
+                </a:solidFill>
+                <a:latin typeface="Calibri" pitchFamily="34" charset="0"/>
+                <a:ea typeface="Calibri" pitchFamily="34" charset="-122"/>
+                <a:cs typeface="Calibri" pitchFamily="34" charset="-120"/>
+              </a:rPr>
+              <a:t>0.664</a:t>
+            </a:r>
+            <a:endParaRPr lang="en-US" sz="1300" dirty="0"/>
+          </a:p>
+        </p:txBody>
+      </p:sp>
+      <p:sp>
+        <p:nvSpPr>
+          <p:cNvPr id="23" name="Text 21"/>
+          <p:cNvSpPr txBox="1"/>
+          <p:nvPr/>
+        </p:nvSpPr>
+        <p:spPr>
+          <a:xfrm>
+            <a:off x="8229600" y="3465576"/>
+            <a:ext cx="2560320" cy="384048"/>
+          </a:xfrm>
+          <a:prstGeom prst="rect">
+            <a:avLst/>
+          </a:prstGeom>
+          <a:noFill/>
+          <a:ln/>
+        </p:spPr>
+        <p:txBody>
+          <a:bodyPr wrap="square" lIns="0" tIns="0" rIns="0" bIns="0" rtlCol="0" anchor="ctr"/>
+          <a:lstStyle/>
+          <a:p>
+            <a:pPr indent="0" marL="0">
+              <a:buNone/>
+            </a:pPr>
+            <a:r>
+              <a:rPr lang="en-US" sz="1300" b="1" dirty="0">
+                <a:solidFill>
+                  <a:srgbClr val="2E7D32"/>
+                </a:solidFill>
+                <a:latin typeface="Calibri" pitchFamily="34" charset="0"/>
+                <a:ea typeface="Calibri" pitchFamily="34" charset="-122"/>
+                <a:cs typeface="Calibri" pitchFamily="34" charset="-120"/>
+              </a:rPr>
+              <a:t>p=0.033</a:t>
+            </a:r>
+            <a:endParaRPr lang="en-US" sz="1300" dirty="0"/>
+          </a:p>
+        </p:txBody>
+      </p:sp>
+      <p:sp>
+        <p:nvSpPr>
+          <p:cNvPr id="24" name="Shape 22"/>
           <p:cNvSpPr/>
           <p:nvPr/>
         </p:nvSpPr>
         <p:spPr>
           <a:xfrm>
-            <a:off x="548640" y="3410712"/>
-            <a:ext cx="109728" cy="1371600"/>
+            <a:off x="548640" y="3968496"/>
+            <a:ext cx="11064240" cy="621792"/>
           </a:xfrm>
           <a:prstGeom prst="rect">
             <a:avLst/>
           </a:prstGeom>
           <a:solidFill>
-            <a:srgbClr val="1E2761"/>
+            <a:srgbClr val="FFFFFF"/>
           </a:solidFill>
           <a:ln/>
         </p:spPr>
       </p:sp>
       <p:sp>
         <p:nvSpPr>
-          <p:cNvPr id="10" name="Text 8"/>
-          <p:cNvSpPr txBox="1"/>
-          <p:nvPr/>
-        </p:nvSpPr>
-        <p:spPr>
-          <a:xfrm>
-            <a:off x="914400" y="3547872"/>
-            <a:ext cx="4023360" cy="1097280"/>
-          </a:xfrm>
-          <a:prstGeom prst="rect">
-            <a:avLst/>
-          </a:prstGeom>
-          <a:noFill/>
-          <a:ln/>
-        </p:spPr>
-        <p:txBody>
-          <a:bodyPr wrap="square" lIns="0" tIns="0" rIns="0" bIns="0" rtlCol="0" anchor="t"/>
-          <a:lstStyle/>
-          <a:p>
-            <a:pPr indent="0" marL="0">
-              <a:buNone/>
-            </a:pPr>
-            <a:r>
-              <a:rPr lang="en-US" sz="1400" b="1" dirty="0">
+          <p:cNvPr id="25" name="Text 23"/>
+          <p:cNvSpPr txBox="1"/>
+          <p:nvPr/>
+        </p:nvSpPr>
+        <p:spPr>
+          <a:xfrm>
+            <a:off x="731520" y="4087368"/>
+            <a:ext cx="4754880" cy="384048"/>
+          </a:xfrm>
+          <a:prstGeom prst="rect">
+            <a:avLst/>
+          </a:prstGeom>
+          <a:noFill/>
+          <a:ln/>
+        </p:spPr>
+        <p:txBody>
+          <a:bodyPr wrap="square" lIns="0" tIns="0" rIns="0" bIns="0" rtlCol="0" anchor="ctr"/>
+          <a:lstStyle/>
+          <a:p>
+            <a:pPr indent="0" marL="0">
+              <a:buNone/>
+            </a:pPr>
+            <a:r>
+              <a:rPr lang="en-US" sz="1300" b="1" dirty="0">
                 <a:solidFill>
                   <a:srgbClr val="1E2761"/>
                 </a:solidFill>
@@ -6346,38 +6163,38 @@
                 <a:ea typeface="Calibri" pitchFamily="34" charset="-122"/>
                 <a:cs typeface="Calibri" pitchFamily="34" charset="-120"/>
               </a:rPr>
-              <a:t>Milder ratios can beat full balance</a:t>
-            </a:r>
-            <a:endParaRPr lang="en-US" sz="1400" dirty="0"/>
-          </a:p>
-        </p:txBody>
-      </p:sp>
-      <p:sp>
-        <p:nvSpPr>
-          <p:cNvPr id="11" name="Text 9"/>
-          <p:cNvSpPr txBox="1"/>
-          <p:nvPr/>
-        </p:nvSpPr>
-        <p:spPr>
-          <a:xfrm>
-            <a:off x="5029200" y="3547872"/>
-            <a:ext cx="6309360" cy="1097280"/>
-          </a:xfrm>
-          <a:prstGeom prst="rect">
-            <a:avLst/>
-          </a:prstGeom>
-          <a:noFill/>
-          <a:ln/>
-        </p:spPr>
-        <p:txBody>
-          <a:bodyPr wrap="square" lIns="0" tIns="0" rIns="0" bIns="0" rtlCol="0" anchor="t"/>
-          <a:lstStyle/>
-          <a:p>
-            <a:pPr indent="0" marL="0">
-              <a:buNone/>
-            </a:pPr>
-            <a:r>
-              <a:rPr lang="en-US" sz="1150" dirty="0">
+              <a:t>ROS vs. ROS+Aug</a:t>
+            </a:r>
+            <a:endParaRPr lang="en-US" sz="1300" dirty="0"/>
+          </a:p>
+        </p:txBody>
+      </p:sp>
+      <p:sp>
+        <p:nvSpPr>
+          <p:cNvPr id="26" name="Text 24"/>
+          <p:cNvSpPr txBox="1"/>
+          <p:nvPr/>
+        </p:nvSpPr>
+        <p:spPr>
+          <a:xfrm>
+            <a:off x="5669280" y="4087368"/>
+            <a:ext cx="1188720" cy="384048"/>
+          </a:xfrm>
+          <a:prstGeom prst="rect">
+            <a:avLst/>
+          </a:prstGeom>
+          <a:noFill/>
+          <a:ln/>
+        </p:spPr>
+        <p:txBody>
+          <a:bodyPr wrap="square" lIns="0" tIns="0" rIns="0" bIns="0" rtlCol="0" anchor="ctr"/>
+          <a:lstStyle/>
+          <a:p>
+            <a:pPr indent="0" marL="0">
+              <a:buNone/>
+            </a:pPr>
+            <a:r>
+              <a:rPr lang="en-US" sz="1300" dirty="0">
                 <a:solidFill>
                   <a:srgbClr val="555B6E"/>
                 </a:solidFill>
@@ -6385,27 +6202,103 @@
                 <a:ea typeface="Calibri" pitchFamily="34" charset="-122"/>
                 <a:cs typeface="Calibri" pitchFamily="34" charset="-120"/>
               </a:rPr>
-              <a:t>On B2, balanced accuracy peaks at 0.985 with only mild undersampling (ratio 0.10) vs. 0.947 at full 1:1 balance — discarding less majority data preserves more decision-boundary signal.</a:t>
-            </a:r>
-            <a:endParaRPr lang="en-US" sz="1150" dirty="0"/>
-          </a:p>
-        </p:txBody>
-      </p:sp>
-      <p:sp>
-        <p:nvSpPr>
-          <p:cNvPr id="12" name="Shape 10"/>
+              <a:t>0.750</a:t>
+            </a:r>
+            <a:endParaRPr lang="en-US" sz="1300" dirty="0"/>
+          </a:p>
+        </p:txBody>
+      </p:sp>
+      <p:sp>
+        <p:nvSpPr>
+          <p:cNvPr id="27" name="Text 25"/>
+          <p:cNvSpPr txBox="1"/>
+          <p:nvPr/>
+        </p:nvSpPr>
+        <p:spPr>
+          <a:xfrm>
+            <a:off x="6949440" y="4087368"/>
+            <a:ext cx="1188720" cy="384048"/>
+          </a:xfrm>
+          <a:prstGeom prst="rect">
+            <a:avLst/>
+          </a:prstGeom>
+          <a:noFill/>
+          <a:ln/>
+        </p:spPr>
+        <p:txBody>
+          <a:bodyPr wrap="square" lIns="0" tIns="0" rIns="0" bIns="0" rtlCol="0" anchor="ctr"/>
+          <a:lstStyle/>
+          <a:p>
+            <a:pPr indent="0" marL="0">
+              <a:buNone/>
+            </a:pPr>
+            <a:r>
+              <a:rPr lang="en-US" sz="1300" dirty="0">
+                <a:solidFill>
+                  <a:srgbClr val="555B6E"/>
+                </a:solidFill>
+                <a:latin typeface="Calibri" pitchFamily="34" charset="0"/>
+                <a:ea typeface="Calibri" pitchFamily="34" charset="-122"/>
+                <a:cs typeface="Calibri" pitchFamily="34" charset="-120"/>
+              </a:rPr>
+              <a:t>0.663</a:t>
+            </a:r>
+            <a:endParaRPr lang="en-US" sz="1300" dirty="0"/>
+          </a:p>
+        </p:txBody>
+      </p:sp>
+      <p:sp>
+        <p:nvSpPr>
+          <p:cNvPr id="28" name="Text 26"/>
+          <p:cNvSpPr txBox="1"/>
+          <p:nvPr/>
+        </p:nvSpPr>
+        <p:spPr>
+          <a:xfrm>
+            <a:off x="8229600" y="4087368"/>
+            <a:ext cx="2560320" cy="384048"/>
+          </a:xfrm>
+          <a:prstGeom prst="rect">
+            <a:avLst/>
+          </a:prstGeom>
+          <a:noFill/>
+          <a:ln/>
+        </p:spPr>
+        <p:txBody>
+          <a:bodyPr wrap="square" lIns="0" tIns="0" rIns="0" bIns="0" rtlCol="0" anchor="ctr"/>
+          <a:lstStyle/>
+          <a:p>
+            <a:pPr indent="0" marL="0">
+              <a:buNone/>
+            </a:pPr>
+            <a:r>
+              <a:rPr lang="en-US" sz="1300" b="1" dirty="0">
+                <a:solidFill>
+                  <a:srgbClr val="2E7D32"/>
+                </a:solidFill>
+                <a:latin typeface="Calibri" pitchFamily="34" charset="0"/>
+                <a:ea typeface="Calibri" pitchFamily="34" charset="-122"/>
+                <a:cs typeface="Calibri" pitchFamily="34" charset="-120"/>
+              </a:rPr>
+              <a:t>p=0.0025</a:t>
+            </a:r>
+            <a:endParaRPr lang="en-US" sz="1300" dirty="0"/>
+          </a:p>
+        </p:txBody>
+      </p:sp>
+      <p:sp>
+        <p:nvSpPr>
+          <p:cNvPr id="29" name="Shape 27"/>
           <p:cNvSpPr/>
           <p:nvPr/>
         </p:nvSpPr>
         <p:spPr>
           <a:xfrm>
-            <a:off x="548640" y="4946904"/>
-            <a:ext cx="11064240" cy="1371600"/>
-          </a:xfrm>
-          <a:prstGeom prst="roundRect">
-            <a:avLst>
-              <a:gd name="adj" fmla="val 5333"/>
-            </a:avLst>
+            <a:off x="548640" y="4590288"/>
+            <a:ext cx="11064240" cy="621792"/>
+          </a:xfrm>
+          <a:prstGeom prst="rect">
+            <a:avLst/>
           </a:prstGeom>
           <a:solidFill>
             <a:srgbClr val="F4F5F9"/>
@@ -6415,50 +6308,30 @@
       </p:sp>
       <p:sp>
         <p:nvSpPr>
-          <p:cNvPr id="13" name="Shape 11"/>
-          <p:cNvSpPr/>
-          <p:nvPr/>
-        </p:nvSpPr>
-        <p:spPr>
-          <a:xfrm>
-            <a:off x="548640" y="4946904"/>
-            <a:ext cx="109728" cy="1371600"/>
-          </a:xfrm>
-          <a:prstGeom prst="rect">
-            <a:avLst/>
-          </a:prstGeom>
-          <a:solidFill>
-            <a:srgbClr val="8172B2"/>
-          </a:solidFill>
-          <a:ln/>
-        </p:spPr>
-      </p:sp>
-      <p:sp>
-        <p:nvSpPr>
-          <p:cNvPr id="14" name="Text 12"/>
-          <p:cNvSpPr txBox="1"/>
-          <p:nvPr/>
-        </p:nvSpPr>
-        <p:spPr>
-          <a:xfrm>
-            <a:off x="914400" y="5084064"/>
-            <a:ext cx="4023360" cy="1097280"/>
-          </a:xfrm>
-          <a:prstGeom prst="rect">
-            <a:avLst/>
-          </a:prstGeom>
-          <a:noFill/>
-          <a:ln/>
-        </p:spPr>
-        <p:txBody>
-          <a:bodyPr wrap="square" lIns="0" tIns="0" rIns="0" bIns="0" rtlCol="0" anchor="t"/>
-          <a:lstStyle/>
-          <a:p>
-            <a:pPr indent="0" marL="0">
-              <a:buNone/>
-            </a:pPr>
-            <a:r>
-              <a:rPr lang="en-US" sz="1400" b="1" dirty="0">
+          <p:cNvPr id="30" name="Text 28"/>
+          <p:cNvSpPr txBox="1"/>
+          <p:nvPr/>
+        </p:nvSpPr>
+        <p:spPr>
+          <a:xfrm>
+            <a:off x="731520" y="4709160"/>
+            <a:ext cx="4754880" cy="384048"/>
+          </a:xfrm>
+          <a:prstGeom prst="rect">
+            <a:avLst/>
+          </a:prstGeom>
+          <a:noFill/>
+          <a:ln/>
+        </p:spPr>
+        <p:txBody>
+          <a:bodyPr wrap="square" lIns="0" tIns="0" rIns="0" bIns="0" rtlCol="0" anchor="ctr"/>
+          <a:lstStyle/>
+          <a:p>
+            <a:pPr indent="0" marL="0">
+              <a:buNone/>
+            </a:pPr>
+            <a:r>
+              <a:rPr lang="en-US" sz="1300" b="1" dirty="0">
                 <a:solidFill>
                   <a:srgbClr val="1E2761"/>
                 </a:solidFill>
@@ -6466,38 +6339,38 @@
                 <a:ea typeface="Calibri" pitchFamily="34" charset="-122"/>
                 <a:cs typeface="Calibri" pitchFamily="34" charset="-120"/>
               </a:rPr>
-              <a:t>Small benchmarks can be unstable</a:t>
-            </a:r>
-            <a:endParaRPr lang="en-US" sz="1400" dirty="0"/>
-          </a:p>
-        </p:txBody>
-      </p:sp>
-      <p:sp>
-        <p:nvSpPr>
-          <p:cNvPr id="15" name="Text 13"/>
-          <p:cNvSpPr txBox="1"/>
-          <p:nvPr/>
-        </p:nvSpPr>
-        <p:spPr>
-          <a:xfrm>
-            <a:off x="5029200" y="5084064"/>
-            <a:ext cx="6309360" cy="1097280"/>
-          </a:xfrm>
-          <a:prstGeom prst="rect">
-            <a:avLst/>
-          </a:prstGeom>
-          <a:noFill/>
-          <a:ln/>
-        </p:spPr>
-        <p:txBody>
-          <a:bodyPr wrap="square" lIns="0" tIns="0" rIns="0" bIns="0" rtlCol="0" anchor="t"/>
-          <a:lstStyle/>
-          <a:p>
-            <a:pPr indent="0" marL="0">
-              <a:buNone/>
-            </a:pPr>
-            <a:r>
-              <a:rPr lang="en-US" sz="1150" dirty="0">
+              <a:t>Combo(B+A) vs. RUS</a:t>
+            </a:r>
+            <a:endParaRPr lang="en-US" sz="1300" dirty="0"/>
+          </a:p>
+        </p:txBody>
+      </p:sp>
+      <p:sp>
+        <p:nvSpPr>
+          <p:cNvPr id="31" name="Text 29"/>
+          <p:cNvSpPr txBox="1"/>
+          <p:nvPr/>
+        </p:nvSpPr>
+        <p:spPr>
+          <a:xfrm>
+            <a:off x="5669280" y="4709160"/>
+            <a:ext cx="1188720" cy="384048"/>
+          </a:xfrm>
+          <a:prstGeom prst="rect">
+            <a:avLst/>
+          </a:prstGeom>
+          <a:noFill/>
+          <a:ln/>
+        </p:spPr>
+        <p:txBody>
+          <a:bodyPr wrap="square" lIns="0" tIns="0" rIns="0" bIns="0" rtlCol="0" anchor="ctr"/>
+          <a:lstStyle/>
+          <a:p>
+            <a:pPr indent="0" marL="0">
+              <a:buNone/>
+            </a:pPr>
+            <a:r>
+              <a:rPr lang="en-US" sz="1300" dirty="0">
                 <a:solidFill>
                   <a:srgbClr val="555B6E"/>
                 </a:solidFill>
@@ -6505,22 +6378,139 @@
                 <a:ea typeface="Calibri" pitchFamily="34" charset="-122"/>
                 <a:cs typeface="Calibri" pitchFamily="34" charset="-120"/>
               </a:rPr>
-              <a:t>Combined on B4 swings from 0.960 (ratio 0.25) to 0.562 (ratio 0.50) back up to 0.966 (ratio 1.0) — a single-seed artifact worth validating with repeated runs.</a:t>
-            </a:r>
-            <a:endParaRPr lang="en-US" sz="1150" dirty="0"/>
-          </a:p>
-        </p:txBody>
-      </p:sp>
-      <p:sp>
-        <p:nvSpPr>
-          <p:cNvPr id="16" name="Text 14"/>
+              <a:t>0.681</a:t>
+            </a:r>
+            <a:endParaRPr lang="en-US" sz="1300" dirty="0"/>
+          </a:p>
+        </p:txBody>
+      </p:sp>
+      <p:sp>
+        <p:nvSpPr>
+          <p:cNvPr id="32" name="Text 30"/>
+          <p:cNvSpPr txBox="1"/>
+          <p:nvPr/>
+        </p:nvSpPr>
+        <p:spPr>
+          <a:xfrm>
+            <a:off x="6949440" y="4709160"/>
+            <a:ext cx="1188720" cy="384048"/>
+          </a:xfrm>
+          <a:prstGeom prst="rect">
+            <a:avLst/>
+          </a:prstGeom>
+          <a:noFill/>
+          <a:ln/>
+        </p:spPr>
+        <p:txBody>
+          <a:bodyPr wrap="square" lIns="0" tIns="0" rIns="0" bIns="0" rtlCol="0" anchor="ctr"/>
+          <a:lstStyle/>
+          <a:p>
+            <a:pPr indent="0" marL="0">
+              <a:buNone/>
+            </a:pPr>
+            <a:r>
+              <a:rPr lang="en-US" sz="1300" dirty="0">
+                <a:solidFill>
+                  <a:srgbClr val="555B6E"/>
+                </a:solidFill>
+                <a:latin typeface="Calibri" pitchFamily="34" charset="0"/>
+                <a:ea typeface="Calibri" pitchFamily="34" charset="-122"/>
+                <a:cs typeface="Calibri" pitchFamily="34" charset="-120"/>
+              </a:rPr>
+              <a:t>0.492</a:t>
+            </a:r>
+            <a:endParaRPr lang="en-US" sz="1300" dirty="0"/>
+          </a:p>
+        </p:txBody>
+      </p:sp>
+      <p:sp>
+        <p:nvSpPr>
+          <p:cNvPr id="33" name="Text 31"/>
+          <p:cNvSpPr txBox="1"/>
+          <p:nvPr/>
+        </p:nvSpPr>
+        <p:spPr>
+          <a:xfrm>
+            <a:off x="8229600" y="4709160"/>
+            <a:ext cx="2560320" cy="384048"/>
+          </a:xfrm>
+          <a:prstGeom prst="rect">
+            <a:avLst/>
+          </a:prstGeom>
+          <a:noFill/>
+          <a:ln/>
+        </p:spPr>
+        <p:txBody>
+          <a:bodyPr wrap="square" lIns="0" tIns="0" rIns="0" bIns="0" rtlCol="0" anchor="ctr"/>
+          <a:lstStyle/>
+          <a:p>
+            <a:pPr indent="0" marL="0">
+              <a:buNone/>
+            </a:pPr>
+            <a:r>
+              <a:rPr lang="en-US" sz="1300" b="1" dirty="0">
+                <a:solidFill>
+                  <a:srgbClr val="2E7D32"/>
+                </a:solidFill>
+                <a:latin typeface="Calibri" pitchFamily="34" charset="0"/>
+                <a:ea typeface="Calibri" pitchFamily="34" charset="-122"/>
+                <a:cs typeface="Calibri" pitchFamily="34" charset="-120"/>
+              </a:rPr>
+              <a:t>p=0.027</a:t>
+            </a:r>
+            <a:endParaRPr lang="en-US" sz="1300" dirty="0"/>
+          </a:p>
+        </p:txBody>
+      </p:sp>
+      <p:sp>
+        <p:nvSpPr>
+          <p:cNvPr id="34" name="Text 32"/>
+          <p:cNvSpPr txBox="1"/>
+          <p:nvPr/>
+        </p:nvSpPr>
+        <p:spPr>
+          <a:xfrm>
+            <a:off x="548640" y="5349240"/>
+            <a:ext cx="11064240" cy="502920"/>
+          </a:xfrm>
+          <a:prstGeom prst="rect">
+            <a:avLst/>
+          </a:prstGeom>
+          <a:noFill/>
+          <a:ln/>
+        </p:spPr>
+        <p:txBody>
+          <a:bodyPr wrap="square" lIns="0" tIns="0" rIns="0" bIns="0" rtlCol="0" anchor="ctr"/>
+          <a:lstStyle/>
+          <a:p>
+            <a:pPr indent="0" marL="0">
+              <a:buNone/>
+            </a:pPr>
+            <a:r>
+              <a:rPr lang="en-US" sz="1200" i="1" dirty="0">
+                <a:solidFill>
+                  <a:srgbClr val="1E2761"/>
+                </a:solidFill>
+                <a:latin typeface="Calibri" pitchFamily="34" charset="0"/>
+                <a:ea typeface="Calibri" pitchFamily="34" charset="-122"/>
+                <a:cs typeface="Calibri" pitchFamily="34" charset="-120"/>
+              </a:rPr>
+              <a:t>Once we stop relying on a single 0.5 threshold and look at ranking quality across every threshold, RUS is reliably worse than oversampling-based strategies, just not in balanced accuracy.</a:t>
+            </a:r>
+            <a:endParaRPr lang="en-US" sz="1200" dirty="0"/>
+          </a:p>
+        </p:txBody>
+      </p:sp>
+      <p:sp>
+        <p:nvSpPr>
+          <p:cNvPr id="35" name="Text 33"/>
           <p:cNvSpPr txBox="1"/>
           <p:nvPr/>
         </p:nvSpPr>
         <p:spPr>
           <a:xfrm>
             <a:off x="457200" y="6473952"/>
-            <a:ext cx="8229600" cy="274320"/>
+            <a:ext cx="9144000" cy="274320"/>
           </a:xfrm>
           <a:prstGeom prst="rect">
             <a:avLst/>
@@ -6544,7 +6534,7 @@
                 <a:ea typeface="Calibri" pitchFamily="34" charset="-122"/>
                 <a:cs typeface="Calibri" pitchFamily="34" charset="-120"/>
               </a:rPr>
-              <a:t>Group 11 · Data Balancing and Augmentation Strategies for Hotspot Detection</a:t>
+              <a:t>Group 11 (DA3 Revision) · Data Balancing and Augmentation Strategies for Hotspot Detection</a:t>
             </a:r>
             <a:endParaRPr lang="en-US" sz="900" dirty="0"/>
           </a:p>
@@ -6552,7 +6542,7 @@
       </p:sp>
       <p:sp>
         <p:nvSpPr>
-          <p:cNvPr id="17" name="Text 15"/>
+          <p:cNvPr id="36" name="Text 34"/>
           <p:cNvSpPr txBox="1"/>
           <p:nvPr/>
         </p:nvSpPr>
@@ -6600,6 +6590,1696 @@
 <file path=ppt/slides/slide14.xml><?xml version="1.0" encoding="utf-8"?>
 <p:sld xmlns:a="http://schemas.openxmlformats.org/drawingml/2006/main" xmlns:r="http://schemas.openxmlformats.org/officeDocument/2006/relationships" xmlns:p="http://schemas.openxmlformats.org/presentationml/2006/main">
   <p:cSld name="Slide 14">
+    <p:bg>
+      <p:bgPr>
+        <a:solidFill>
+          <a:srgbClr val="FFFFFF"/>
+        </a:solidFill>
+      </p:bgPr>
+    </p:bg>
+    <p:spTree>
+      <p:nvGrpSpPr>
+        <p:cNvPr id="1" name=""/>
+        <p:cNvGrpSpPr/>
+        <p:nvPr/>
+      </p:nvGrpSpPr>
+      <p:grpSpPr>
+        <a:xfrm>
+          <a:off x="0" y="0"/>
+          <a:ext cx="0" cy="0"/>
+          <a:chOff x="0" y="0"/>
+          <a:chExt cx="0" cy="0"/>
+        </a:xfrm>
+      </p:grpSpPr>
+      <p:sp>
+        <p:nvSpPr>
+          <p:cNvPr id="2" name="Text 0"/>
+          <p:cNvSpPr txBox="1"/>
+          <p:nvPr/>
+        </p:nvSpPr>
+        <p:spPr>
+          <a:xfrm>
+            <a:off x="548640" y="411480"/>
+            <a:ext cx="11091672" cy="640080"/>
+          </a:xfrm>
+          <a:prstGeom prst="rect">
+            <a:avLst/>
+          </a:prstGeom>
+          <a:noFill/>
+          <a:ln/>
+        </p:spPr>
+        <p:txBody>
+          <a:bodyPr wrap="square" lIns="0" tIns="0" rIns="0" bIns="0" rtlCol="0" anchor="ctr"/>
+          <a:lstStyle/>
+          <a:p>
+            <a:pPr indent="0" marL="0">
+              <a:buNone/>
+            </a:pPr>
+            <a:r>
+              <a:rPr lang="en-US" sz="3000" b="1" dirty="0">
+                <a:solidFill>
+                  <a:srgbClr val="1E2761"/>
+                </a:solidFill>
+                <a:latin typeface="Cambria" pitchFamily="34" charset="0"/>
+                <a:ea typeface="Cambria" pitchFamily="34" charset="-122"/>
+                <a:cs typeface="Cambria" pitchFamily="34" charset="-120"/>
+              </a:rPr>
+              <a:t>Feedback Addressed</a:t>
+            </a:r>
+            <a:endParaRPr lang="en-US" sz="3000" dirty="0"/>
+          </a:p>
+        </p:txBody>
+      </p:sp>
+      <p:sp>
+        <p:nvSpPr>
+          <p:cNvPr id="3" name="Text 1"/>
+          <p:cNvSpPr txBox="1"/>
+          <p:nvPr/>
+        </p:nvSpPr>
+        <p:spPr>
+          <a:xfrm>
+            <a:off x="548640" y="1005840"/>
+            <a:ext cx="11091672" cy="411480"/>
+          </a:xfrm>
+          <a:prstGeom prst="rect">
+            <a:avLst/>
+          </a:prstGeom>
+          <a:noFill/>
+          <a:ln/>
+        </p:spPr>
+        <p:txBody>
+          <a:bodyPr wrap="square" lIns="0" tIns="0" rIns="0" bIns="0" rtlCol="0" anchor="ctr"/>
+          <a:lstStyle/>
+          <a:p>
+            <a:pPr indent="0" marL="0">
+              <a:buNone/>
+            </a:pPr>
+            <a:r>
+              <a:rPr lang="en-US" sz="1500" dirty="0">
+                <a:solidFill>
+                  <a:srgbClr val="555B6E"/>
+                </a:solidFill>
+                <a:latin typeface="Calibri" pitchFamily="34" charset="0"/>
+                <a:ea typeface="Calibri" pitchFamily="34" charset="-122"/>
+                <a:cs typeface="Calibri" pitchFamily="34" charset="-120"/>
+              </a:rPr>
+              <a:t>Every reviewer point for Group 11, mapped to what we did</a:t>
+            </a:r>
+            <a:endParaRPr lang="en-US" sz="1500" dirty="0"/>
+          </a:p>
+        </p:txBody>
+      </p:sp>
+      <p:sp>
+        <p:nvSpPr>
+          <p:cNvPr id="4" name="Shape 2"/>
+          <p:cNvSpPr/>
+          <p:nvPr/>
+        </p:nvSpPr>
+        <p:spPr>
+          <a:xfrm>
+            <a:off x="548640" y="1783080"/>
+            <a:ext cx="11064240" cy="640080"/>
+          </a:xfrm>
+          <a:prstGeom prst="roundRect">
+            <a:avLst>
+              <a:gd name="adj" fmla="val 8571"/>
+            </a:avLst>
+          </a:prstGeom>
+          <a:solidFill>
+            <a:srgbClr val="F4F5F9"/>
+          </a:solidFill>
+          <a:ln/>
+        </p:spPr>
+      </p:sp>
+      <p:sp>
+        <p:nvSpPr>
+          <p:cNvPr id="5" name="Shape 3"/>
+          <p:cNvSpPr/>
+          <p:nvPr/>
+        </p:nvSpPr>
+        <p:spPr>
+          <a:xfrm>
+            <a:off x="731520" y="1984248"/>
+            <a:ext cx="237744" cy="237744"/>
+          </a:xfrm>
+          <a:prstGeom prst="ellipse">
+            <a:avLst/>
+          </a:prstGeom>
+          <a:solidFill>
+            <a:srgbClr val="2E7D32"/>
+          </a:solidFill>
+          <a:ln/>
+        </p:spPr>
+      </p:sp>
+      <p:sp>
+        <p:nvSpPr>
+          <p:cNvPr id="6" name="Text 4"/>
+          <p:cNvSpPr txBox="1"/>
+          <p:nvPr/>
+        </p:nvSpPr>
+        <p:spPr>
+          <a:xfrm>
+            <a:off x="731520" y="1965960"/>
+            <a:ext cx="237744" cy="274320"/>
+          </a:xfrm>
+          <a:prstGeom prst="rect">
+            <a:avLst/>
+          </a:prstGeom>
+          <a:noFill/>
+          <a:ln/>
+        </p:spPr>
+        <p:txBody>
+          <a:bodyPr wrap="square" lIns="0" tIns="0" rIns="0" bIns="0" rtlCol="0" anchor="ctr"/>
+          <a:lstStyle/>
+          <a:p>
+            <a:pPr algn="ctr" indent="0" marL="0">
+              <a:buNone/>
+            </a:pPr>
+            <a:r>
+              <a:rPr lang="en-US" sz="1300" b="1" dirty="0">
+                <a:solidFill>
+                  <a:srgbClr val="FFFFFF"/>
+                </a:solidFill>
+                <a:latin typeface="Calibri" pitchFamily="34" charset="0"/>
+                <a:ea typeface="Calibri" pitchFamily="34" charset="-122"/>
+                <a:cs typeface="Calibri" pitchFamily="34" charset="-120"/>
+              </a:rPr>
+              <a:t>✓</a:t>
+            </a:r>
+            <a:endParaRPr lang="en-US" sz="1300" dirty="0"/>
+          </a:p>
+        </p:txBody>
+      </p:sp>
+      <p:sp>
+        <p:nvSpPr>
+          <p:cNvPr id="7" name="Text 5"/>
+          <p:cNvSpPr txBox="1"/>
+          <p:nvPr/>
+        </p:nvSpPr>
+        <p:spPr>
+          <a:xfrm>
+            <a:off x="1143000" y="1837944"/>
+            <a:ext cx="4297680" cy="530352"/>
+          </a:xfrm>
+          <a:prstGeom prst="rect">
+            <a:avLst/>
+          </a:prstGeom>
+          <a:noFill/>
+          <a:ln/>
+        </p:spPr>
+        <p:txBody>
+          <a:bodyPr wrap="square" lIns="0" tIns="0" rIns="0" bIns="0" rtlCol="0" anchor="ctr"/>
+          <a:lstStyle/>
+          <a:p>
+            <a:pPr indent="0" marL="0">
+              <a:buNone/>
+            </a:pPr>
+            <a:r>
+              <a:rPr lang="en-US" sz="1200" b="1" dirty="0">
+                <a:solidFill>
+                  <a:srgbClr val="1E2761"/>
+                </a:solidFill>
+                <a:latin typeface="Calibri" pitchFamily="34" charset="0"/>
+                <a:ea typeface="Calibri" pitchFamily="34" charset="-122"/>
+                <a:cs typeface="Calibri" pitchFamily="34" charset="-120"/>
+              </a:rPr>
+              <a:t>Validation split + equal gradient updates</a:t>
+            </a:r>
+            <a:endParaRPr lang="en-US" sz="1200" dirty="0"/>
+          </a:p>
+        </p:txBody>
+      </p:sp>
+      <p:sp>
+        <p:nvSpPr>
+          <p:cNvPr id="8" name="Text 6"/>
+          <p:cNvSpPr txBox="1"/>
+          <p:nvPr/>
+        </p:nvSpPr>
+        <p:spPr>
+          <a:xfrm>
+            <a:off x="5577840" y="1837944"/>
+            <a:ext cx="5852160" cy="530352"/>
+          </a:xfrm>
+          <a:prstGeom prst="rect">
+            <a:avLst/>
+          </a:prstGeom>
+          <a:noFill/>
+          <a:ln/>
+        </p:spPr>
+        <p:txBody>
+          <a:bodyPr wrap="square" lIns="0" tIns="0" rIns="0" bIns="0" rtlCol="0" anchor="ctr"/>
+          <a:lstStyle/>
+          <a:p>
+            <a:pPr indent="0" marL="0">
+              <a:buNone/>
+            </a:pPr>
+            <a:r>
+              <a:rPr lang="en-US" sz="1100" dirty="0">
+                <a:solidFill>
+                  <a:srgbClr val="555B6E"/>
+                </a:solidFill>
+                <a:latin typeface="Calibri" pitchFamily="34" charset="0"/>
+                <a:ea typeface="Calibri" pitchFamily="34" charset="-122"/>
+                <a:cs typeface="Calibri" pitchFamily="34" charset="-120"/>
+              </a:rPr>
+              <a:t>Done: 15% validation carve-out, step-based training, checkpoint selection</a:t>
+            </a:r>
+            <a:endParaRPr lang="en-US" sz="1100" dirty="0"/>
+          </a:p>
+        </p:txBody>
+      </p:sp>
+      <p:sp>
+        <p:nvSpPr>
+          <p:cNvPr id="9" name="Shape 7"/>
+          <p:cNvSpPr/>
+          <p:nvPr/>
+        </p:nvSpPr>
+        <p:spPr>
+          <a:xfrm>
+            <a:off x="548640" y="2496312"/>
+            <a:ext cx="11064240" cy="640080"/>
+          </a:xfrm>
+          <a:prstGeom prst="roundRect">
+            <a:avLst>
+              <a:gd name="adj" fmla="val 8571"/>
+            </a:avLst>
+          </a:prstGeom>
+          <a:solidFill>
+            <a:srgbClr val="F4F5F9"/>
+          </a:solidFill>
+          <a:ln/>
+        </p:spPr>
+      </p:sp>
+      <p:sp>
+        <p:nvSpPr>
+          <p:cNvPr id="10" name="Shape 8"/>
+          <p:cNvSpPr/>
+          <p:nvPr/>
+        </p:nvSpPr>
+        <p:spPr>
+          <a:xfrm>
+            <a:off x="731520" y="2697480"/>
+            <a:ext cx="237744" cy="237744"/>
+          </a:xfrm>
+          <a:prstGeom prst="ellipse">
+            <a:avLst/>
+          </a:prstGeom>
+          <a:solidFill>
+            <a:srgbClr val="2E7D32"/>
+          </a:solidFill>
+          <a:ln/>
+        </p:spPr>
+      </p:sp>
+      <p:sp>
+        <p:nvSpPr>
+          <p:cNvPr id="11" name="Text 9"/>
+          <p:cNvSpPr txBox="1"/>
+          <p:nvPr/>
+        </p:nvSpPr>
+        <p:spPr>
+          <a:xfrm>
+            <a:off x="731520" y="2679192"/>
+            <a:ext cx="237744" cy="274320"/>
+          </a:xfrm>
+          <a:prstGeom prst="rect">
+            <a:avLst/>
+          </a:prstGeom>
+          <a:noFill/>
+          <a:ln/>
+        </p:spPr>
+        <p:txBody>
+          <a:bodyPr wrap="square" lIns="0" tIns="0" rIns="0" bIns="0" rtlCol="0" anchor="ctr"/>
+          <a:lstStyle/>
+          <a:p>
+            <a:pPr algn="ctr" indent="0" marL="0">
+              <a:buNone/>
+            </a:pPr>
+            <a:r>
+              <a:rPr lang="en-US" sz="1300" b="1" dirty="0">
+                <a:solidFill>
+                  <a:srgbClr val="FFFFFF"/>
+                </a:solidFill>
+                <a:latin typeface="Calibri" pitchFamily="34" charset="0"/>
+                <a:ea typeface="Calibri" pitchFamily="34" charset="-122"/>
+                <a:cs typeface="Calibri" pitchFamily="34" charset="-120"/>
+              </a:rPr>
+              <a:t>✓</a:t>
+            </a:r>
+            <a:endParaRPr lang="en-US" sz="1300" dirty="0"/>
+          </a:p>
+        </p:txBody>
+      </p:sp>
+      <p:sp>
+        <p:nvSpPr>
+          <p:cNvPr id="12" name="Text 10"/>
+          <p:cNvSpPr txBox="1"/>
+          <p:nvPr/>
+        </p:nvSpPr>
+        <p:spPr>
+          <a:xfrm>
+            <a:off x="1143000" y="2551176"/>
+            <a:ext cx="4297680" cy="530352"/>
+          </a:xfrm>
+          <a:prstGeom prst="rect">
+            <a:avLst/>
+          </a:prstGeom>
+          <a:noFill/>
+          <a:ln/>
+        </p:spPr>
+        <p:txBody>
+          <a:bodyPr wrap="square" lIns="0" tIns="0" rIns="0" bIns="0" rtlCol="0" anchor="ctr"/>
+          <a:lstStyle/>
+          <a:p>
+            <a:pPr indent="0" marL="0">
+              <a:buNone/>
+            </a:pPr>
+            <a:r>
+              <a:rPr lang="en-US" sz="1200" b="1" dirty="0">
+                <a:solidFill>
+                  <a:srgbClr val="1E2761"/>
+                </a:solidFill>
+                <a:latin typeface="Calibri" pitchFamily="34" charset="0"/>
+                <a:ea typeface="Calibri" pitchFamily="34" charset="-122"/>
+                <a:cs typeface="Calibri" pitchFamily="34" charset="-120"/>
+              </a:rPr>
+              <a:t>Add seeds</a:t>
+            </a:r>
+            <a:endParaRPr lang="en-US" sz="1200" dirty="0"/>
+          </a:p>
+        </p:txBody>
+      </p:sp>
+      <p:sp>
+        <p:nvSpPr>
+          <p:cNvPr id="13" name="Text 11"/>
+          <p:cNvSpPr txBox="1"/>
+          <p:nvPr/>
+        </p:nvSpPr>
+        <p:spPr>
+          <a:xfrm>
+            <a:off x="5577840" y="2551176"/>
+            <a:ext cx="5852160" cy="530352"/>
+          </a:xfrm>
+          <a:prstGeom prst="rect">
+            <a:avLst/>
+          </a:prstGeom>
+          <a:noFill/>
+          <a:ln/>
+        </p:spPr>
+        <p:txBody>
+          <a:bodyPr wrap="square" lIns="0" tIns="0" rIns="0" bIns="0" rtlCol="0" anchor="ctr"/>
+          <a:lstStyle/>
+          <a:p>
+            <a:pPr indent="0" marL="0">
+              <a:buNone/>
+            </a:pPr>
+            <a:r>
+              <a:rPr lang="en-US" sz="1100" dirty="0">
+                <a:solidFill>
+                  <a:srgbClr val="555B6E"/>
+                </a:solidFill>
+                <a:latin typeface="Calibri" pitchFamily="34" charset="0"/>
+                <a:ea typeface="Calibri" pitchFamily="34" charset="-122"/>
+                <a:cs typeface="Calibri" pitchFamily="34" charset="-120"/>
+              </a:rPr>
+              <a:t>Done: 3 seeds (42/123/2024), paired t-test + Wilcoxon significance tests</a:t>
+            </a:r>
+            <a:endParaRPr lang="en-US" sz="1100" dirty="0"/>
+          </a:p>
+        </p:txBody>
+      </p:sp>
+      <p:sp>
+        <p:nvSpPr>
+          <p:cNvPr id="14" name="Shape 12"/>
+          <p:cNvSpPr/>
+          <p:nvPr/>
+        </p:nvSpPr>
+        <p:spPr>
+          <a:xfrm>
+            <a:off x="548640" y="3209544"/>
+            <a:ext cx="11064240" cy="640080"/>
+          </a:xfrm>
+          <a:prstGeom prst="roundRect">
+            <a:avLst>
+              <a:gd name="adj" fmla="val 8571"/>
+            </a:avLst>
+          </a:prstGeom>
+          <a:solidFill>
+            <a:srgbClr val="F4F5F9"/>
+          </a:solidFill>
+          <a:ln/>
+        </p:spPr>
+      </p:sp>
+      <p:sp>
+        <p:nvSpPr>
+          <p:cNvPr id="15" name="Shape 13"/>
+          <p:cNvSpPr/>
+          <p:nvPr/>
+        </p:nvSpPr>
+        <p:spPr>
+          <a:xfrm>
+            <a:off x="731520" y="3410712"/>
+            <a:ext cx="237744" cy="237744"/>
+          </a:xfrm>
+          <a:prstGeom prst="ellipse">
+            <a:avLst/>
+          </a:prstGeom>
+          <a:solidFill>
+            <a:srgbClr val="2E7D32"/>
+          </a:solidFill>
+          <a:ln/>
+        </p:spPr>
+      </p:sp>
+      <p:sp>
+        <p:nvSpPr>
+          <p:cNvPr id="16" name="Text 14"/>
+          <p:cNvSpPr txBox="1"/>
+          <p:nvPr/>
+        </p:nvSpPr>
+        <p:spPr>
+          <a:xfrm>
+            <a:off x="731520" y="3392424"/>
+            <a:ext cx="237744" cy="274320"/>
+          </a:xfrm>
+          <a:prstGeom prst="rect">
+            <a:avLst/>
+          </a:prstGeom>
+          <a:noFill/>
+          <a:ln/>
+        </p:spPr>
+        <p:txBody>
+          <a:bodyPr wrap="square" lIns="0" tIns="0" rIns="0" bIns="0" rtlCol="0" anchor="ctr"/>
+          <a:lstStyle/>
+          <a:p>
+            <a:pPr algn="ctr" indent="0" marL="0">
+              <a:buNone/>
+            </a:pPr>
+            <a:r>
+              <a:rPr lang="en-US" sz="1300" b="1" dirty="0">
+                <a:solidFill>
+                  <a:srgbClr val="FFFFFF"/>
+                </a:solidFill>
+                <a:latin typeface="Calibri" pitchFamily="34" charset="0"/>
+                <a:ea typeface="Calibri" pitchFamily="34" charset="-122"/>
+                <a:cs typeface="Calibri" pitchFamily="34" charset="-120"/>
+              </a:rPr>
+              <a:t>✓</a:t>
+            </a:r>
+            <a:endParaRPr lang="en-US" sz="1300" dirty="0"/>
+          </a:p>
+        </p:txBody>
+      </p:sp>
+      <p:sp>
+        <p:nvSpPr>
+          <p:cNvPr id="17" name="Text 15"/>
+          <p:cNvSpPr txBox="1"/>
+          <p:nvPr/>
+        </p:nvSpPr>
+        <p:spPr>
+          <a:xfrm>
+            <a:off x="1143000" y="3264408"/>
+            <a:ext cx="4297680" cy="530352"/>
+          </a:xfrm>
+          <a:prstGeom prst="rect">
+            <a:avLst/>
+          </a:prstGeom>
+          <a:noFill/>
+          <a:ln/>
+        </p:spPr>
+        <p:txBody>
+          <a:bodyPr wrap="square" lIns="0" tIns="0" rIns="0" bIns="0" rtlCol="0" anchor="ctr"/>
+          <a:lstStyle/>
+          <a:p>
+            <a:pPr indent="0" marL="0">
+              <a:buNone/>
+            </a:pPr>
+            <a:r>
+              <a:rPr lang="en-US" sz="1200" b="1" dirty="0">
+                <a:solidFill>
+                  <a:srgbClr val="1E2761"/>
+                </a:solidFill>
+                <a:latin typeface="Calibri" pitchFamily="34" charset="0"/>
+                <a:ea typeface="Calibri" pitchFamily="34" charset="-122"/>
+                <a:cs typeface="Calibri" pitchFamily="34" charset="-120"/>
+              </a:rPr>
+              <a:t>Test combined strategies + PR-AUC</a:t>
+            </a:r>
+            <a:endParaRPr lang="en-US" sz="1200" dirty="0"/>
+          </a:p>
+        </p:txBody>
+      </p:sp>
+      <p:sp>
+        <p:nvSpPr>
+          <p:cNvPr id="18" name="Text 16"/>
+          <p:cNvSpPr txBox="1"/>
+          <p:nvPr/>
+        </p:nvSpPr>
+        <p:spPr>
+          <a:xfrm>
+            <a:off x="5577840" y="3264408"/>
+            <a:ext cx="5852160" cy="530352"/>
+          </a:xfrm>
+          <a:prstGeom prst="rect">
+            <a:avLst/>
+          </a:prstGeom>
+          <a:noFill/>
+          <a:ln/>
+        </p:spPr>
+        <p:txBody>
+          <a:bodyPr wrap="square" lIns="0" tIns="0" rIns="0" bIns="0" rtlCol="0" anchor="ctr"/>
+          <a:lstStyle/>
+          <a:p>
+            <a:pPr indent="0" marL="0">
+              <a:buNone/>
+            </a:pPr>
+            <a:r>
+              <a:rPr lang="en-US" sz="1100" dirty="0">
+                <a:solidFill>
+                  <a:srgbClr val="555B6E"/>
+                </a:solidFill>
+                <a:latin typeface="Calibri" pitchFamily="34" charset="0"/>
+                <a:ea typeface="Calibri" pitchFamily="34" charset="-122"/>
+                <a:cs typeface="Calibri" pitchFamily="34" charset="-120"/>
+              </a:rPr>
+              <a:t>Done: 3 combined variants (50%/25%/Batch+Aug); PR-AUC on every run</a:t>
+            </a:r>
+            <a:endParaRPr lang="en-US" sz="1100" dirty="0"/>
+          </a:p>
+        </p:txBody>
+      </p:sp>
+      <p:sp>
+        <p:nvSpPr>
+          <p:cNvPr id="19" name="Shape 17"/>
+          <p:cNvSpPr/>
+          <p:nvPr/>
+        </p:nvSpPr>
+        <p:spPr>
+          <a:xfrm>
+            <a:off x="548640" y="3922776"/>
+            <a:ext cx="11064240" cy="640080"/>
+          </a:xfrm>
+          <a:prstGeom prst="roundRect">
+            <a:avLst>
+              <a:gd name="adj" fmla="val 8571"/>
+            </a:avLst>
+          </a:prstGeom>
+          <a:solidFill>
+            <a:srgbClr val="F4F5F9"/>
+          </a:solidFill>
+          <a:ln/>
+        </p:spPr>
+      </p:sp>
+      <p:sp>
+        <p:nvSpPr>
+          <p:cNvPr id="20" name="Shape 18"/>
+          <p:cNvSpPr/>
+          <p:nvPr/>
+        </p:nvSpPr>
+        <p:spPr>
+          <a:xfrm>
+            <a:off x="731520" y="4123944"/>
+            <a:ext cx="237744" cy="237744"/>
+          </a:xfrm>
+          <a:prstGeom prst="ellipse">
+            <a:avLst/>
+          </a:prstGeom>
+          <a:solidFill>
+            <a:srgbClr val="2E7D32"/>
+          </a:solidFill>
+          <a:ln/>
+        </p:spPr>
+      </p:sp>
+      <p:sp>
+        <p:nvSpPr>
+          <p:cNvPr id="21" name="Text 19"/>
+          <p:cNvSpPr txBox="1"/>
+          <p:nvPr/>
+        </p:nvSpPr>
+        <p:spPr>
+          <a:xfrm>
+            <a:off x="731520" y="4105656"/>
+            <a:ext cx="237744" cy="274320"/>
+          </a:xfrm>
+          <a:prstGeom prst="rect">
+            <a:avLst/>
+          </a:prstGeom>
+          <a:noFill/>
+          <a:ln/>
+        </p:spPr>
+        <p:txBody>
+          <a:bodyPr wrap="square" lIns="0" tIns="0" rIns="0" bIns="0" rtlCol="0" anchor="ctr"/>
+          <a:lstStyle/>
+          <a:p>
+            <a:pPr algn="ctr" indent="0" marL="0">
+              <a:buNone/>
+            </a:pPr>
+            <a:r>
+              <a:rPr lang="en-US" sz="1300" b="1" dirty="0">
+                <a:solidFill>
+                  <a:srgbClr val="FFFFFF"/>
+                </a:solidFill>
+                <a:latin typeface="Calibri" pitchFamily="34" charset="0"/>
+                <a:ea typeface="Calibri" pitchFamily="34" charset="-122"/>
+                <a:cs typeface="Calibri" pitchFamily="34" charset="-120"/>
+              </a:rPr>
+              <a:t>✓</a:t>
+            </a:r>
+            <a:endParaRPr lang="en-US" sz="1300" dirty="0"/>
+          </a:p>
+        </p:txBody>
+      </p:sp>
+      <p:sp>
+        <p:nvSpPr>
+          <p:cNvPr id="22" name="Text 20"/>
+          <p:cNvSpPr txBox="1"/>
+          <p:nvPr/>
+        </p:nvSpPr>
+        <p:spPr>
+          <a:xfrm>
+            <a:off x="1143000" y="3977640"/>
+            <a:ext cx="4297680" cy="530352"/>
+          </a:xfrm>
+          <a:prstGeom prst="rect">
+            <a:avLst/>
+          </a:prstGeom>
+          <a:noFill/>
+          <a:ln/>
+        </p:spPr>
+        <p:txBody>
+          <a:bodyPr wrap="square" lIns="0" tIns="0" rIns="0" bIns="0" rtlCol="0" anchor="ctr"/>
+          <a:lstStyle/>
+          <a:p>
+            <a:pPr indent="0" marL="0">
+              <a:buNone/>
+            </a:pPr>
+            <a:r>
+              <a:rPr lang="en-US" sz="1200" b="1" dirty="0">
+                <a:solidFill>
+                  <a:srgbClr val="1E2761"/>
+                </a:solidFill>
+                <a:latin typeface="Calibri" pitchFamily="34" charset="0"/>
+                <a:ea typeface="Calibri" pitchFamily="34" charset="-122"/>
+                <a:cs typeface="Calibri" pitchFamily="34" charset="-120"/>
+              </a:rPr>
+              <a:t>Justify augmentations physically</a:t>
+            </a:r>
+            <a:endParaRPr lang="en-US" sz="1200" dirty="0"/>
+          </a:p>
+        </p:txBody>
+      </p:sp>
+      <p:sp>
+        <p:nvSpPr>
+          <p:cNvPr id="23" name="Text 21"/>
+          <p:cNvSpPr txBox="1"/>
+          <p:nvPr/>
+        </p:nvSpPr>
+        <p:spPr>
+          <a:xfrm>
+            <a:off x="5577840" y="3977640"/>
+            <a:ext cx="5852160" cy="530352"/>
+          </a:xfrm>
+          <a:prstGeom prst="rect">
+            <a:avLst/>
+          </a:prstGeom>
+          <a:noFill/>
+          <a:ln/>
+        </p:spPr>
+        <p:txBody>
+          <a:bodyPr wrap="square" lIns="0" tIns="0" rIns="0" bIns="0" rtlCol="0" anchor="ctr"/>
+          <a:lstStyle/>
+          <a:p>
+            <a:pPr indent="0" marL="0">
+              <a:buNone/>
+            </a:pPr>
+            <a:r>
+              <a:rPr lang="en-US" sz="1100" dirty="0">
+                <a:solidFill>
+                  <a:srgbClr val="555B6E"/>
+                </a:solidFill>
+                <a:latin typeface="Calibri" pitchFamily="34" charset="0"/>
+                <a:ea typeface="Calibri" pitchFamily="34" charset="-122"/>
+                <a:cs typeface="Calibri" pitchFamily="34" charset="-120"/>
+              </a:rPr>
+              <a:t>Done: Manhattan-geometry closure + local-diffraction-physics argument</a:t>
+            </a:r>
+            <a:endParaRPr lang="en-US" sz="1100" dirty="0"/>
+          </a:p>
+        </p:txBody>
+      </p:sp>
+      <p:sp>
+        <p:nvSpPr>
+          <p:cNvPr id="24" name="Shape 22"/>
+          <p:cNvSpPr/>
+          <p:nvPr/>
+        </p:nvSpPr>
+        <p:spPr>
+          <a:xfrm>
+            <a:off x="548640" y="4636008"/>
+            <a:ext cx="11064240" cy="640080"/>
+          </a:xfrm>
+          <a:prstGeom prst="roundRect">
+            <a:avLst>
+              <a:gd name="adj" fmla="val 8571"/>
+            </a:avLst>
+          </a:prstGeom>
+          <a:solidFill>
+            <a:srgbClr val="F4F5F9"/>
+          </a:solidFill>
+          <a:ln/>
+        </p:spPr>
+      </p:sp>
+      <p:sp>
+        <p:nvSpPr>
+          <p:cNvPr id="25" name="Shape 23"/>
+          <p:cNvSpPr/>
+          <p:nvPr/>
+        </p:nvSpPr>
+        <p:spPr>
+          <a:xfrm>
+            <a:off x="731520" y="4837176"/>
+            <a:ext cx="237744" cy="237744"/>
+          </a:xfrm>
+          <a:prstGeom prst="ellipse">
+            <a:avLst/>
+          </a:prstGeom>
+          <a:solidFill>
+            <a:srgbClr val="2E7D32"/>
+          </a:solidFill>
+          <a:ln/>
+        </p:spPr>
+      </p:sp>
+      <p:sp>
+        <p:nvSpPr>
+          <p:cNvPr id="26" name="Text 24"/>
+          <p:cNvSpPr txBox="1"/>
+          <p:nvPr/>
+        </p:nvSpPr>
+        <p:spPr>
+          <a:xfrm>
+            <a:off x="731520" y="4818888"/>
+            <a:ext cx="237744" cy="274320"/>
+          </a:xfrm>
+          <a:prstGeom prst="rect">
+            <a:avLst/>
+          </a:prstGeom>
+          <a:noFill/>
+          <a:ln/>
+        </p:spPr>
+        <p:txBody>
+          <a:bodyPr wrap="square" lIns="0" tIns="0" rIns="0" bIns="0" rtlCol="0" anchor="ctr"/>
+          <a:lstStyle/>
+          <a:p>
+            <a:pPr algn="ctr" indent="0" marL="0">
+              <a:buNone/>
+            </a:pPr>
+            <a:r>
+              <a:rPr lang="en-US" sz="1300" b="1" dirty="0">
+                <a:solidFill>
+                  <a:srgbClr val="FFFFFF"/>
+                </a:solidFill>
+                <a:latin typeface="Calibri" pitchFamily="34" charset="0"/>
+                <a:ea typeface="Calibri" pitchFamily="34" charset="-122"/>
+                <a:cs typeface="Calibri" pitchFamily="34" charset="-120"/>
+              </a:rPr>
+              <a:t>✓</a:t>
+            </a:r>
+            <a:endParaRPr lang="en-US" sz="1300" dirty="0"/>
+          </a:p>
+        </p:txBody>
+      </p:sp>
+      <p:sp>
+        <p:nvSpPr>
+          <p:cNvPr id="27" name="Text 25"/>
+          <p:cNvSpPr txBox="1"/>
+          <p:nvPr/>
+        </p:nvSpPr>
+        <p:spPr>
+          <a:xfrm>
+            <a:off x="1143000" y="4690872"/>
+            <a:ext cx="4297680" cy="530352"/>
+          </a:xfrm>
+          <a:prstGeom prst="rect">
+            <a:avLst/>
+          </a:prstGeom>
+          <a:noFill/>
+          <a:ln/>
+        </p:spPr>
+        <p:txBody>
+          <a:bodyPr wrap="square" lIns="0" tIns="0" rIns="0" bIns="0" rtlCol="0" anchor="ctr"/>
+          <a:lstStyle/>
+          <a:p>
+            <a:pPr indent="0" marL="0">
+              <a:buNone/>
+            </a:pPr>
+            <a:r>
+              <a:rPr lang="en-US" sz="1200" b="1" dirty="0">
+                <a:solidFill>
+                  <a:srgbClr val="1E2761"/>
+                </a:solidFill>
+                <a:latin typeface="Calibri" pitchFamily="34" charset="0"/>
+                <a:ea typeface="Calibri" pitchFamily="34" charset="-122"/>
+                <a:cs typeface="Calibri" pitchFamily="34" charset="-120"/>
+              </a:rPr>
+              <a:t>Explain mechanistically why RUS fails</a:t>
+            </a:r>
+            <a:endParaRPr lang="en-US" sz="1200" dirty="0"/>
+          </a:p>
+        </p:txBody>
+      </p:sp>
+      <p:sp>
+        <p:nvSpPr>
+          <p:cNvPr id="28" name="Text 26"/>
+          <p:cNvSpPr txBox="1"/>
+          <p:nvPr/>
+        </p:nvSpPr>
+        <p:spPr>
+          <a:xfrm>
+            <a:off x="5577840" y="4690872"/>
+            <a:ext cx="5852160" cy="530352"/>
+          </a:xfrm>
+          <a:prstGeom prst="rect">
+            <a:avLst/>
+          </a:prstGeom>
+          <a:noFill/>
+          <a:ln/>
+        </p:spPr>
+        <p:txBody>
+          <a:bodyPr wrap="square" lIns="0" tIns="0" rIns="0" bIns="0" rtlCol="0" anchor="ctr"/>
+          <a:lstStyle/>
+          <a:p>
+            <a:pPr indent="0" marL="0">
+              <a:buNone/>
+            </a:pPr>
+            <a:r>
+              <a:rPr lang="en-US" sz="1100" dirty="0">
+                <a:solidFill>
+                  <a:srgbClr val="555B6E"/>
+                </a:solidFill>
+                <a:latin typeface="Calibri" pitchFamily="34" charset="0"/>
+                <a:ea typeface="Calibri" pitchFamily="34" charset="-122"/>
+                <a:cs typeface="Calibri" pitchFamily="34" charset="-120"/>
+              </a:rPr>
+              <a:t>Revised: it doesn't, once trained fairly; learning curves show why DA2 was wrong</a:t>
+            </a:r>
+            <a:endParaRPr lang="en-US" sz="1100" dirty="0"/>
+          </a:p>
+        </p:txBody>
+      </p:sp>
+      <p:sp>
+        <p:nvSpPr>
+          <p:cNvPr id="29" name="Shape 27"/>
+          <p:cNvSpPr/>
+          <p:nvPr/>
+        </p:nvSpPr>
+        <p:spPr>
+          <a:xfrm>
+            <a:off x="548640" y="5349240"/>
+            <a:ext cx="11064240" cy="640080"/>
+          </a:xfrm>
+          <a:prstGeom prst="roundRect">
+            <a:avLst>
+              <a:gd name="adj" fmla="val 8571"/>
+            </a:avLst>
+          </a:prstGeom>
+          <a:solidFill>
+            <a:srgbClr val="F4F5F9"/>
+          </a:solidFill>
+          <a:ln/>
+        </p:spPr>
+      </p:sp>
+      <p:sp>
+        <p:nvSpPr>
+          <p:cNvPr id="30" name="Shape 28"/>
+          <p:cNvSpPr/>
+          <p:nvPr/>
+        </p:nvSpPr>
+        <p:spPr>
+          <a:xfrm>
+            <a:off x="731520" y="5550408"/>
+            <a:ext cx="237744" cy="237744"/>
+          </a:xfrm>
+          <a:prstGeom prst="ellipse">
+            <a:avLst/>
+          </a:prstGeom>
+          <a:solidFill>
+            <a:srgbClr val="2E7D32"/>
+          </a:solidFill>
+          <a:ln/>
+        </p:spPr>
+      </p:sp>
+      <p:sp>
+        <p:nvSpPr>
+          <p:cNvPr id="31" name="Text 29"/>
+          <p:cNvSpPr txBox="1"/>
+          <p:nvPr/>
+        </p:nvSpPr>
+        <p:spPr>
+          <a:xfrm>
+            <a:off x="731520" y="5532120"/>
+            <a:ext cx="237744" cy="274320"/>
+          </a:xfrm>
+          <a:prstGeom prst="rect">
+            <a:avLst/>
+          </a:prstGeom>
+          <a:noFill/>
+          <a:ln/>
+        </p:spPr>
+        <p:txBody>
+          <a:bodyPr wrap="square" lIns="0" tIns="0" rIns="0" bIns="0" rtlCol="0" anchor="ctr"/>
+          <a:lstStyle/>
+          <a:p>
+            <a:pPr algn="ctr" indent="0" marL="0">
+              <a:buNone/>
+            </a:pPr>
+            <a:r>
+              <a:rPr lang="en-US" sz="1300" b="1" dirty="0">
+                <a:solidFill>
+                  <a:srgbClr val="FFFFFF"/>
+                </a:solidFill>
+                <a:latin typeface="Calibri" pitchFamily="34" charset="0"/>
+                <a:ea typeface="Calibri" pitchFamily="34" charset="-122"/>
+                <a:cs typeface="Calibri" pitchFamily="34" charset="-120"/>
+              </a:rPr>
+              <a:t>✓</a:t>
+            </a:r>
+            <a:endParaRPr lang="en-US" sz="1300" dirty="0"/>
+          </a:p>
+        </p:txBody>
+      </p:sp>
+      <p:sp>
+        <p:nvSpPr>
+          <p:cNvPr id="32" name="Text 30"/>
+          <p:cNvSpPr txBox="1"/>
+          <p:nvPr/>
+        </p:nvSpPr>
+        <p:spPr>
+          <a:xfrm>
+            <a:off x="1143000" y="5404104"/>
+            <a:ext cx="4297680" cy="530352"/>
+          </a:xfrm>
+          <a:prstGeom prst="rect">
+            <a:avLst/>
+          </a:prstGeom>
+          <a:noFill/>
+          <a:ln/>
+        </p:spPr>
+        <p:txBody>
+          <a:bodyPr wrap="square" lIns="0" tIns="0" rIns="0" bIns="0" rtlCol="0" anchor="ctr"/>
+          <a:lstStyle/>
+          <a:p>
+            <a:pPr indent="0" marL="0">
+              <a:buNone/>
+            </a:pPr>
+            <a:r>
+              <a:rPr lang="en-US" sz="1200" b="1" dirty="0">
+                <a:solidFill>
+                  <a:srgbClr val="1E2761"/>
+                </a:solidFill>
+                <a:latin typeface="Calibri" pitchFamily="34" charset="0"/>
+                <a:ea typeface="Calibri" pitchFamily="34" charset="-122"/>
+                <a:cs typeface="Calibri" pitchFamily="34" charset="-120"/>
+              </a:rPr>
+              <a:t>30–35+ references, validation-only tuning, published comparison</a:t>
+            </a:r>
+            <a:endParaRPr lang="en-US" sz="1200" dirty="0"/>
+          </a:p>
+        </p:txBody>
+      </p:sp>
+      <p:sp>
+        <p:nvSpPr>
+          <p:cNvPr id="33" name="Text 31"/>
+          <p:cNvSpPr txBox="1"/>
+          <p:nvPr/>
+        </p:nvSpPr>
+        <p:spPr>
+          <a:xfrm>
+            <a:off x="5577840" y="5404104"/>
+            <a:ext cx="5852160" cy="530352"/>
+          </a:xfrm>
+          <a:prstGeom prst="rect">
+            <a:avLst/>
+          </a:prstGeom>
+          <a:noFill/>
+          <a:ln/>
+        </p:spPr>
+        <p:txBody>
+          <a:bodyPr wrap="square" lIns="0" tIns="0" rIns="0" bIns="0" rtlCol="0" anchor="ctr"/>
+          <a:lstStyle/>
+          <a:p>
+            <a:pPr indent="0" marL="0">
+              <a:buNone/>
+            </a:pPr>
+            <a:r>
+              <a:rPr lang="en-US" sz="1100" dirty="0">
+                <a:solidFill>
+                  <a:srgbClr val="555B6E"/>
+                </a:solidFill>
+                <a:latin typeface="Calibri" pitchFamily="34" charset="0"/>
+                <a:ea typeface="Calibri" pitchFamily="34" charset="-122"/>
+                <a:cs typeface="Calibri" pitchFamily="34" charset="-120"/>
+              </a:rPr>
+              <a:t>Done: 40 refs, test touched once, compared vs. 2 published ICCAD-12 detectors</a:t>
+            </a:r>
+            <a:endParaRPr lang="en-US" sz="1100" dirty="0"/>
+          </a:p>
+        </p:txBody>
+      </p:sp>
+      <p:sp>
+        <p:nvSpPr>
+          <p:cNvPr id="34" name="Text 32"/>
+          <p:cNvSpPr txBox="1"/>
+          <p:nvPr/>
+        </p:nvSpPr>
+        <p:spPr>
+          <a:xfrm>
+            <a:off x="457200" y="6473952"/>
+            <a:ext cx="9144000" cy="274320"/>
+          </a:xfrm>
+          <a:prstGeom prst="rect">
+            <a:avLst/>
+          </a:prstGeom>
+          <a:noFill/>
+          <a:ln/>
+        </p:spPr>
+        <p:txBody>
+          <a:bodyPr wrap="square" lIns="0" tIns="0" rIns="0" bIns="0" rtlCol="0" anchor="ctr"/>
+          <a:lstStyle/>
+          <a:p>
+            <a:pPr indent="0" marL="0">
+              <a:buNone/>
+            </a:pPr>
+            <a:r>
+              <a:rPr lang="en-US" sz="900" dirty="0">
+                <a:solidFill>
+                  <a:srgbClr val="9AA0B4"/>
+                </a:solidFill>
+                <a:latin typeface="Calibri" pitchFamily="34" charset="0"/>
+                <a:ea typeface="Calibri" pitchFamily="34" charset="-122"/>
+                <a:cs typeface="Calibri" pitchFamily="34" charset="-120"/>
+              </a:rPr>
+              <a:t>Group 11 (DA3 Revision) · Data Balancing and Augmentation Strategies for Hotspot Detection</a:t>
+            </a:r>
+            <a:endParaRPr lang="en-US" sz="900" dirty="0"/>
+          </a:p>
+        </p:txBody>
+      </p:sp>
+      <p:sp>
+        <p:nvSpPr>
+          <p:cNvPr id="35" name="Text 33"/>
+          <p:cNvSpPr txBox="1"/>
+          <p:nvPr/>
+        </p:nvSpPr>
+        <p:spPr>
+          <a:xfrm>
+            <a:off x="11274552" y="6473952"/>
+            <a:ext cx="457200" cy="274320"/>
+          </a:xfrm>
+          <a:prstGeom prst="rect">
+            <a:avLst/>
+          </a:prstGeom>
+          <a:noFill/>
+          <a:ln/>
+        </p:spPr>
+        <p:txBody>
+          <a:bodyPr wrap="square" lIns="0" tIns="0" rIns="0" bIns="0" rtlCol="0" anchor="ctr"/>
+          <a:lstStyle/>
+          <a:p>
+            <a:pPr algn="r" indent="0" marL="0">
+              <a:buNone/>
+            </a:pPr>
+            <a:r>
+              <a:rPr lang="en-US" sz="900" dirty="0">
+                <a:solidFill>
+                  <a:srgbClr val="9AA0B4"/>
+                </a:solidFill>
+                <a:latin typeface="Calibri" pitchFamily="34" charset="0"/>
+                <a:ea typeface="Calibri" pitchFamily="34" charset="-122"/>
+                <a:cs typeface="Calibri" pitchFamily="34" charset="-120"/>
+              </a:rPr>
+              <a:t>14</a:t>
+            </a:r>
+            <a:endParaRPr lang="en-US" sz="900" dirty="0"/>
+          </a:p>
+        </p:txBody>
+      </p:sp>
+    </p:spTree>
+  </p:cSld>
+  <p:clrMapOvr>
+    <a:masterClrMapping/>
+  </p:clrMapOvr>
+</p:sld>
+</file>
+
+<file path=ppt/slides/slide15.xml><?xml version="1.0" encoding="utf-8"?>
+<p:sld xmlns:a="http://schemas.openxmlformats.org/drawingml/2006/main" xmlns:r="http://schemas.openxmlformats.org/officeDocument/2006/relationships" xmlns:p="http://schemas.openxmlformats.org/presentationml/2006/main">
+  <p:cSld name="Slide 15">
+    <p:bg>
+      <p:bgPr>
+        <a:solidFill>
+          <a:srgbClr val="FFFFFF"/>
+        </a:solidFill>
+      </p:bgPr>
+    </p:bg>
+    <p:spTree>
+      <p:nvGrpSpPr>
+        <p:cNvPr id="1" name=""/>
+        <p:cNvGrpSpPr/>
+        <p:nvPr/>
+      </p:nvGrpSpPr>
+      <p:grpSpPr>
+        <a:xfrm>
+          <a:off x="0" y="0"/>
+          <a:ext cx="0" cy="0"/>
+          <a:chOff x="0" y="0"/>
+          <a:chExt cx="0" cy="0"/>
+        </a:xfrm>
+      </p:grpSpPr>
+      <p:sp>
+        <p:nvSpPr>
+          <p:cNvPr id="2" name="Text 0"/>
+          <p:cNvSpPr txBox="1"/>
+          <p:nvPr/>
+        </p:nvSpPr>
+        <p:spPr>
+          <a:xfrm>
+            <a:off x="548640" y="411480"/>
+            <a:ext cx="11091672" cy="640080"/>
+          </a:xfrm>
+          <a:prstGeom prst="rect">
+            <a:avLst/>
+          </a:prstGeom>
+          <a:noFill/>
+          <a:ln/>
+        </p:spPr>
+        <p:txBody>
+          <a:bodyPr wrap="square" lIns="0" tIns="0" rIns="0" bIns="0" rtlCol="0" anchor="ctr"/>
+          <a:lstStyle/>
+          <a:p>
+            <a:pPr indent="0" marL="0">
+              <a:buNone/>
+            </a:pPr>
+            <a:r>
+              <a:rPr lang="en-US" sz="3000" b="1" dirty="0">
+                <a:solidFill>
+                  <a:srgbClr val="1E2761"/>
+                </a:solidFill>
+                <a:latin typeface="Cambria" pitchFamily="34" charset="0"/>
+                <a:ea typeface="Cambria" pitchFamily="34" charset="-122"/>
+                <a:cs typeface="Cambria" pitchFamily="34" charset="-120"/>
+              </a:rPr>
+              <a:t>Ablation: Effect of the Target Class Ratio</a:t>
+            </a:r>
+            <a:endParaRPr lang="en-US" sz="3000" dirty="0"/>
+          </a:p>
+        </p:txBody>
+      </p:sp>
+      <p:sp>
+        <p:nvSpPr>
+          <p:cNvPr id="3" name="Text 1"/>
+          <p:cNvSpPr txBox="1"/>
+          <p:nvPr/>
+        </p:nvSpPr>
+        <p:spPr>
+          <a:xfrm>
+            <a:off x="548640" y="1005840"/>
+            <a:ext cx="11091672" cy="411480"/>
+          </a:xfrm>
+          <a:prstGeom prst="rect">
+            <a:avLst/>
+          </a:prstGeom>
+          <a:noFill/>
+          <a:ln/>
+        </p:spPr>
+        <p:txBody>
+          <a:bodyPr wrap="square" lIns="0" tIns="0" rIns="0" bIns="0" rtlCol="0" anchor="ctr"/>
+          <a:lstStyle/>
+          <a:p>
+            <a:pPr indent="0" marL="0">
+              <a:buNone/>
+            </a:pPr>
+            <a:r>
+              <a:rPr lang="en-US" sz="1500" dirty="0">
+                <a:solidFill>
+                  <a:srgbClr val="555B6E"/>
+                </a:solidFill>
+                <a:latin typeface="Calibri" pitchFamily="34" charset="0"/>
+                <a:ea typeface="Calibri" pitchFamily="34" charset="-122"/>
+                <a:cs typeface="Calibri" pitchFamily="34" charset="-120"/>
+              </a:rPr>
+              <a:t>Sweeping HS:NHS target ratio 0.1–1.0 for RUS, ROS+Aug, Combo (single seed)</a:t>
+            </a:r>
+            <a:endParaRPr lang="en-US" sz="1500" dirty="0"/>
+          </a:p>
+        </p:txBody>
+      </p:sp>
+      <p:sp>
+        <p:nvSpPr>
+          <p:cNvPr id="4" name="Shape 2"/>
+          <p:cNvSpPr/>
+          <p:nvPr/>
+        </p:nvSpPr>
+        <p:spPr>
+          <a:xfrm>
+            <a:off x="548640" y="1874520"/>
+            <a:ext cx="11064240" cy="1371600"/>
+          </a:xfrm>
+          <a:prstGeom prst="roundRect">
+            <a:avLst>
+              <a:gd name="adj" fmla="val 5333"/>
+            </a:avLst>
+          </a:prstGeom>
+          <a:solidFill>
+            <a:srgbClr val="F4F5F9"/>
+          </a:solidFill>
+          <a:ln/>
+        </p:spPr>
+      </p:sp>
+      <p:sp>
+        <p:nvSpPr>
+          <p:cNvPr id="5" name="Shape 3"/>
+          <p:cNvSpPr/>
+          <p:nvPr/>
+        </p:nvSpPr>
+        <p:spPr>
+          <a:xfrm>
+            <a:off x="548640" y="1874520"/>
+            <a:ext cx="109728" cy="1371600"/>
+          </a:xfrm>
+          <a:prstGeom prst="rect">
+            <a:avLst/>
+          </a:prstGeom>
+          <a:solidFill>
+            <a:srgbClr val="2E7D32"/>
+          </a:solidFill>
+          <a:ln/>
+        </p:spPr>
+      </p:sp>
+      <p:sp>
+        <p:nvSpPr>
+          <p:cNvPr id="6" name="Text 4"/>
+          <p:cNvSpPr txBox="1"/>
+          <p:nvPr/>
+        </p:nvSpPr>
+        <p:spPr>
+          <a:xfrm>
+            <a:off x="914400" y="2011680"/>
+            <a:ext cx="4023360" cy="1097280"/>
+          </a:xfrm>
+          <a:prstGeom prst="rect">
+            <a:avLst/>
+          </a:prstGeom>
+          <a:noFill/>
+          <a:ln/>
+        </p:spPr>
+        <p:txBody>
+          <a:bodyPr wrap="square" lIns="0" tIns="0" rIns="0" bIns="0" rtlCol="0" anchor="t"/>
+          <a:lstStyle/>
+          <a:p>
+            <a:pPr indent="0" marL="0">
+              <a:buNone/>
+            </a:pPr>
+            <a:r>
+              <a:rPr lang="en-US" sz="1350" b="1" dirty="0">
+                <a:solidFill>
+                  <a:srgbClr val="1E2761"/>
+                </a:solidFill>
+                <a:latin typeface="Calibri" pitchFamily="34" charset="0"/>
+                <a:ea typeface="Calibri" pitchFamily="34" charset="-122"/>
+                <a:cs typeface="Calibri" pitchFamily="34" charset="-120"/>
+              </a:rPr>
+              <a:t>RUS now stable across every ratio</a:t>
+            </a:r>
+            <a:endParaRPr lang="en-US" sz="1350" dirty="0"/>
+          </a:p>
+        </p:txBody>
+      </p:sp>
+      <p:sp>
+        <p:nvSpPr>
+          <p:cNvPr id="7" name="Text 5"/>
+          <p:cNvSpPr txBox="1"/>
+          <p:nvPr/>
+        </p:nvSpPr>
+        <p:spPr>
+          <a:xfrm>
+            <a:off x="5029200" y="2011680"/>
+            <a:ext cx="6309360" cy="1097280"/>
+          </a:xfrm>
+          <a:prstGeom prst="rect">
+            <a:avLst/>
+          </a:prstGeom>
+          <a:noFill/>
+          <a:ln/>
+        </p:spPr>
+        <p:txBody>
+          <a:bodyPr wrap="square" lIns="0" tIns="0" rIns="0" bIns="0" rtlCol="0" anchor="t"/>
+          <a:lstStyle/>
+          <a:p>
+            <a:pPr indent="0" marL="0">
+              <a:buNone/>
+            </a:pPr>
+            <a:r>
+              <a:rPr lang="en-US" sz="1100" dirty="0">
+                <a:solidFill>
+                  <a:srgbClr val="555B6E"/>
+                </a:solidFill>
+                <a:latin typeface="Calibri" pitchFamily="34" charset="0"/>
+                <a:ea typeface="Calibri" pitchFamily="34" charset="-122"/>
+                <a:cs typeface="Calibri" pitchFamily="34" charset="-120"/>
+              </a:rPr>
+              <a:t>Recall/specificity stay high (≥0.90 / ≥0.95) on B5 at every tested ratio, a complete reversal of the DA2 ablation, which showed RUS stuck at 0% recall regardless of ratio.</a:t>
+            </a:r>
+            <a:endParaRPr lang="en-US" sz="1100" dirty="0"/>
+          </a:p>
+        </p:txBody>
+      </p:sp>
+      <p:sp>
+        <p:nvSpPr>
+          <p:cNvPr id="8" name="Shape 6"/>
+          <p:cNvSpPr/>
+          <p:nvPr/>
+        </p:nvSpPr>
+        <p:spPr>
+          <a:xfrm>
+            <a:off x="548640" y="3410712"/>
+            <a:ext cx="11064240" cy="1371600"/>
+          </a:xfrm>
+          <a:prstGeom prst="roundRect">
+            <a:avLst>
+              <a:gd name="adj" fmla="val 5333"/>
+            </a:avLst>
+          </a:prstGeom>
+          <a:solidFill>
+            <a:srgbClr val="F4F5F9"/>
+          </a:solidFill>
+          <a:ln/>
+        </p:spPr>
+      </p:sp>
+      <p:sp>
+        <p:nvSpPr>
+          <p:cNvPr id="9" name="Shape 7"/>
+          <p:cNvSpPr/>
+          <p:nvPr/>
+        </p:nvSpPr>
+        <p:spPr>
+          <a:xfrm>
+            <a:off x="548640" y="3410712"/>
+            <a:ext cx="109728" cy="1371600"/>
+          </a:xfrm>
+          <a:prstGeom prst="rect">
+            <a:avLst/>
+          </a:prstGeom>
+          <a:solidFill>
+            <a:srgbClr val="E63946"/>
+          </a:solidFill>
+          <a:ln/>
+        </p:spPr>
+      </p:sp>
+      <p:sp>
+        <p:nvSpPr>
+          <p:cNvPr id="10" name="Text 8"/>
+          <p:cNvSpPr txBox="1"/>
+          <p:nvPr/>
+        </p:nvSpPr>
+        <p:spPr>
+          <a:xfrm>
+            <a:off x="914400" y="3547872"/>
+            <a:ext cx="4023360" cy="1097280"/>
+          </a:xfrm>
+          <a:prstGeom prst="rect">
+            <a:avLst/>
+          </a:prstGeom>
+          <a:noFill/>
+          <a:ln/>
+        </p:spPr>
+        <p:txBody>
+          <a:bodyPr wrap="square" lIns="0" tIns="0" rIns="0" bIns="0" rtlCol="0" anchor="t"/>
+          <a:lstStyle/>
+          <a:p>
+            <a:pPr indent="0" marL="0">
+              <a:buNone/>
+            </a:pPr>
+            <a:r>
+              <a:rPr lang="en-US" sz="1350" b="1" dirty="0">
+                <a:solidFill>
+                  <a:srgbClr val="1E2761"/>
+                </a:solidFill>
+                <a:latin typeface="Calibri" pitchFamily="34" charset="0"/>
+                <a:ea typeface="Calibri" pitchFamily="34" charset="-122"/>
+                <a:cs typeface="Calibri" pitchFamily="34" charset="-120"/>
+              </a:rPr>
+              <a:t>But RUS's PR-AUC still degrades with aggressive undersampling</a:t>
+            </a:r>
+            <a:endParaRPr lang="en-US" sz="1350" dirty="0"/>
+          </a:p>
+        </p:txBody>
+      </p:sp>
+      <p:sp>
+        <p:nvSpPr>
+          <p:cNvPr id="11" name="Text 9"/>
+          <p:cNvSpPr txBox="1"/>
+          <p:nvPr/>
+        </p:nvSpPr>
+        <p:spPr>
+          <a:xfrm>
+            <a:off x="5029200" y="3547872"/>
+            <a:ext cx="6309360" cy="1097280"/>
+          </a:xfrm>
+          <a:prstGeom prst="rect">
+            <a:avLst/>
+          </a:prstGeom>
+          <a:noFill/>
+          <a:ln/>
+        </p:spPr>
+        <p:txBody>
+          <a:bodyPr wrap="square" lIns="0" tIns="0" rIns="0" bIns="0" rtlCol="0" anchor="t"/>
+          <a:lstStyle/>
+          <a:p>
+            <a:pPr indent="0" marL="0">
+              <a:buNone/>
+            </a:pPr>
+            <a:r>
+              <a:rPr lang="en-US" sz="1100" dirty="0">
+                <a:solidFill>
+                  <a:srgbClr val="555B6E"/>
+                </a:solidFill>
+                <a:latin typeface="Calibri" pitchFamily="34" charset="0"/>
+                <a:ea typeface="Calibri" pitchFamily="34" charset="-122"/>
+                <a:cs typeface="Calibri" pitchFamily="34" charset="-120"/>
+              </a:rPr>
+              <a:t>On B5, RUS's PR-AUC falls from 0.80 (mild ratio) to ~0.08–0.11 (aggressive ratios) even while balanced accuracy stays flat. That is the ablation-level confirmation of the mechanistic story.</a:t>
+            </a:r>
+            <a:endParaRPr lang="en-US" sz="1100" dirty="0"/>
+          </a:p>
+        </p:txBody>
+      </p:sp>
+      <p:sp>
+        <p:nvSpPr>
+          <p:cNvPr id="12" name="Shape 10"/>
+          <p:cNvSpPr/>
+          <p:nvPr/>
+        </p:nvSpPr>
+        <p:spPr>
+          <a:xfrm>
+            <a:off x="548640" y="4946904"/>
+            <a:ext cx="11064240" cy="1371600"/>
+          </a:xfrm>
+          <a:prstGeom prst="roundRect">
+            <a:avLst>
+              <a:gd name="adj" fmla="val 5333"/>
+            </a:avLst>
+          </a:prstGeom>
+          <a:solidFill>
+            <a:srgbClr val="F4F5F9"/>
+          </a:solidFill>
+          <a:ln/>
+        </p:spPr>
+      </p:sp>
+      <p:sp>
+        <p:nvSpPr>
+          <p:cNvPr id="13" name="Shape 11"/>
+          <p:cNvSpPr/>
+          <p:nvPr/>
+        </p:nvSpPr>
+        <p:spPr>
+          <a:xfrm>
+            <a:off x="548640" y="4946904"/>
+            <a:ext cx="109728" cy="1371600"/>
+          </a:xfrm>
+          <a:prstGeom prst="rect">
+            <a:avLst/>
+          </a:prstGeom>
+          <a:solidFill>
+            <a:srgbClr val="1E2761"/>
+          </a:solidFill>
+          <a:ln/>
+        </p:spPr>
+      </p:sp>
+      <p:sp>
+        <p:nvSpPr>
+          <p:cNvPr id="14" name="Text 12"/>
+          <p:cNvSpPr txBox="1"/>
+          <p:nvPr/>
+        </p:nvSpPr>
+        <p:spPr>
+          <a:xfrm>
+            <a:off x="914400" y="5084064"/>
+            <a:ext cx="4023360" cy="1097280"/>
+          </a:xfrm>
+          <a:prstGeom prst="rect">
+            <a:avLst/>
+          </a:prstGeom>
+          <a:noFill/>
+          <a:ln/>
+        </p:spPr>
+        <p:txBody>
+          <a:bodyPr wrap="square" lIns="0" tIns="0" rIns="0" bIns="0" rtlCol="0" anchor="t"/>
+          <a:lstStyle/>
+          <a:p>
+            <a:pPr indent="0" marL="0">
+              <a:buNone/>
+            </a:pPr>
+            <a:r>
+              <a:rPr lang="en-US" sz="1350" b="1" dirty="0">
+                <a:solidFill>
+                  <a:srgbClr val="1E2761"/>
+                </a:solidFill>
+                <a:latin typeface="Calibri" pitchFamily="34" charset="0"/>
+                <a:ea typeface="Calibri" pitchFamily="34" charset="-122"/>
+                <a:cs typeface="Calibri" pitchFamily="34" charset="-120"/>
+              </a:rPr>
+              <a:t>Combined strategy is flat across ratios, no DA2-style collapse</a:t>
+            </a:r>
+            <a:endParaRPr lang="en-US" sz="1350" dirty="0"/>
+          </a:p>
+        </p:txBody>
+      </p:sp>
+      <p:sp>
+        <p:nvSpPr>
+          <p:cNvPr id="15" name="Text 13"/>
+          <p:cNvSpPr txBox="1"/>
+          <p:nvPr/>
+        </p:nvSpPr>
+        <p:spPr>
+          <a:xfrm>
+            <a:off x="5029200" y="5084064"/>
+            <a:ext cx="6309360" cy="1097280"/>
+          </a:xfrm>
+          <a:prstGeom prst="rect">
+            <a:avLst/>
+          </a:prstGeom>
+          <a:noFill/>
+          <a:ln/>
+        </p:spPr>
+        <p:txBody>
+          <a:bodyPr wrap="square" lIns="0" tIns="0" rIns="0" bIns="0" rtlCol="0" anchor="t"/>
+          <a:lstStyle/>
+          <a:p>
+            <a:pPr indent="0" marL="0">
+              <a:buNone/>
+            </a:pPr>
+            <a:r>
+              <a:rPr lang="en-US" sz="1100" dirty="0">
+                <a:solidFill>
+                  <a:srgbClr val="555B6E"/>
+                </a:solidFill>
+                <a:latin typeface="Calibri" pitchFamily="34" charset="0"/>
+                <a:ea typeface="Calibri" pitchFamily="34" charset="-122"/>
+                <a:cs typeface="Calibri" pitchFamily="34" charset="-120"/>
+              </a:rPr>
+              <a:t>No ratio on any benchmark reproduces DA2's dramatic collapse-and-recover pattern; remaining variation is single-seed noise, a limitation we flag directly.</a:t>
+            </a:r>
+            <a:endParaRPr lang="en-US" sz="1100" dirty="0"/>
+          </a:p>
+        </p:txBody>
+      </p:sp>
+      <p:sp>
+        <p:nvSpPr>
+          <p:cNvPr id="16" name="Text 14"/>
+          <p:cNvSpPr txBox="1"/>
+          <p:nvPr/>
+        </p:nvSpPr>
+        <p:spPr>
+          <a:xfrm>
+            <a:off x="457200" y="6473952"/>
+            <a:ext cx="9144000" cy="274320"/>
+          </a:xfrm>
+          <a:prstGeom prst="rect">
+            <a:avLst/>
+          </a:prstGeom>
+          <a:noFill/>
+          <a:ln/>
+        </p:spPr>
+        <p:txBody>
+          <a:bodyPr wrap="square" lIns="0" tIns="0" rIns="0" bIns="0" rtlCol="0" anchor="ctr"/>
+          <a:lstStyle/>
+          <a:p>
+            <a:pPr indent="0" marL="0">
+              <a:buNone/>
+            </a:pPr>
+            <a:r>
+              <a:rPr lang="en-US" sz="900" dirty="0">
+                <a:solidFill>
+                  <a:srgbClr val="9AA0B4"/>
+                </a:solidFill>
+                <a:latin typeface="Calibri" pitchFamily="34" charset="0"/>
+                <a:ea typeface="Calibri" pitchFamily="34" charset="-122"/>
+                <a:cs typeface="Calibri" pitchFamily="34" charset="-120"/>
+              </a:rPr>
+              <a:t>Group 11 (DA3 Revision) · Data Balancing and Augmentation Strategies for Hotspot Detection</a:t>
+            </a:r>
+            <a:endParaRPr lang="en-US" sz="900" dirty="0"/>
+          </a:p>
+        </p:txBody>
+      </p:sp>
+      <p:sp>
+        <p:nvSpPr>
+          <p:cNvPr id="17" name="Text 15"/>
+          <p:cNvSpPr txBox="1"/>
+          <p:nvPr/>
+        </p:nvSpPr>
+        <p:spPr>
+          <a:xfrm>
+            <a:off x="11274552" y="6473952"/>
+            <a:ext cx="457200" cy="274320"/>
+          </a:xfrm>
+          <a:prstGeom prst="rect">
+            <a:avLst/>
+          </a:prstGeom>
+          <a:noFill/>
+          <a:ln/>
+        </p:spPr>
+        <p:txBody>
+          <a:bodyPr wrap="square" lIns="0" tIns="0" rIns="0" bIns="0" rtlCol="0" anchor="ctr"/>
+          <a:lstStyle/>
+          <a:p>
+            <a:pPr algn="r" indent="0" marL="0">
+              <a:buNone/>
+            </a:pPr>
+            <a:r>
+              <a:rPr lang="en-US" sz="900" dirty="0">
+                <a:solidFill>
+                  <a:srgbClr val="9AA0B4"/>
+                </a:solidFill>
+                <a:latin typeface="Calibri" pitchFamily="34" charset="0"/>
+                <a:ea typeface="Calibri" pitchFamily="34" charset="-122"/>
+                <a:cs typeface="Calibri" pitchFamily="34" charset="-120"/>
+              </a:rPr>
+              <a:t>15</a:t>
+            </a:r>
+            <a:endParaRPr lang="en-US" sz="900" dirty="0"/>
+          </a:p>
+        </p:txBody>
+      </p:sp>
+    </p:spTree>
+  </p:cSld>
+  <p:clrMapOvr>
+    <a:masterClrMapping/>
+  </p:clrMapOvr>
+</p:sld>
+</file>
+
+<file path=ppt/slides/slide16.xml><?xml version="1.0" encoding="utf-8"?>
+<p:sld xmlns:a="http://schemas.openxmlformats.org/drawingml/2006/main" xmlns:r="http://schemas.openxmlformats.org/officeDocument/2006/relationships" xmlns:p="http://schemas.openxmlformats.org/presentationml/2006/main">
+  <p:cSld name="Slide 16">
     <p:bg>
       <p:bgPr>
         <a:solidFill>
@@ -6629,34 +8309,6 @@
         </p:nvSpPr>
         <p:spPr>
           <a:xfrm>
-            <a:off x="548640" y="411480"/>
-            <a:ext cx="11091672" cy="640080"/>
-          </a:xfrm>
-          <a:prstGeom prst="rect">
-            <a:avLst/>
-          </a:prstGeom>
-          <a:noFill/>
-          <a:ln/>
-        </p:spPr>
-        <p:txBody>
-          <a:bodyPr wrap="square" lIns="0" tIns="0" rIns="0" bIns="0" rtlCol="0" anchor="ctr"/>
-          <a:lstStyle/>
-          <a:p>
-            <a:pPr indent="0" marL="0">
-              <a:buNone/>
-            </a:pPr>
-            <a:endParaRPr lang="en-US" sz="3000" dirty="0"/>
-          </a:p>
-        </p:txBody>
-      </p:sp>
-      <p:sp>
-        <p:nvSpPr>
-          <p:cNvPr id="3" name="Text 1"/>
-          <p:cNvSpPr txBox="1"/>
-          <p:nvPr/>
-        </p:nvSpPr>
-        <p:spPr>
-          <a:xfrm>
             <a:off x="640080" y="457200"/>
             <a:ext cx="5486400" cy="365760"/>
           </a:xfrm>
@@ -6690,7 +8342,7 @@
       </p:sp>
       <p:sp>
         <p:nvSpPr>
-          <p:cNvPr id="4" name="Text 2"/>
+          <p:cNvPr id="3" name="Text 1"/>
           <p:cNvSpPr txBox="1"/>
           <p:nvPr/>
         </p:nvSpPr>
@@ -6721,7 +8373,7 @@
                 <a:ea typeface="Cambria" pitchFamily="34" charset="-122"/>
                 <a:cs typeface="Cambria" pitchFamily="34" charset="-120"/>
               </a:rPr>
-              <a:t>Three answers to our research question</a:t>
+              <a:t>A more cautious, more honest answer than DA2</a:t>
             </a:r>
             <a:endParaRPr lang="en-US" sz="2400" dirty="0"/>
           </a:p>
@@ -6729,7 +8381,7 @@
       </p:sp>
       <p:sp>
         <p:nvSpPr>
-          <p:cNvPr id="5" name="Shape 3"/>
+          <p:cNvPr id="4" name="Shape 2"/>
           <p:cNvSpPr/>
           <p:nvPr/>
         </p:nvSpPr>
@@ -6749,7 +8401,7 @@
       </p:sp>
       <p:sp>
         <p:nvSpPr>
-          <p:cNvPr id="6" name="Text 4"/>
+          <p:cNvPr id="5" name="Text 3"/>
           <p:cNvSpPr txBox="1"/>
           <p:nvPr/>
         </p:nvSpPr>
@@ -6788,7 +8440,7 @@
       </p:sp>
       <p:sp>
         <p:nvSpPr>
-          <p:cNvPr id="7" name="Text 5"/>
+          <p:cNvPr id="6" name="Text 4"/>
           <p:cNvSpPr txBox="1"/>
           <p:nvPr/>
         </p:nvSpPr>
@@ -6819,7 +8471,7 @@
                 <a:ea typeface="Calibri" pitchFamily="34" charset="-122"/>
                 <a:cs typeface="Calibri" pitchFamily="34" charset="-120"/>
               </a:rPr>
-              <a:t>Do something — but not undersampling</a:t>
+              <a:t>Balancing strategy matters far less than DA2 suggested</a:t>
             </a:r>
             <a:endParaRPr lang="en-US" sz="1500" dirty="0"/>
           </a:p>
@@ -6827,7 +8479,7 @@
       </p:sp>
       <p:sp>
         <p:nvSpPr>
-          <p:cNvPr id="8" name="Text 6"/>
+          <p:cNvPr id="7" name="Text 5"/>
           <p:cNvSpPr txBox="1"/>
           <p:nvPr/>
         </p:nvSpPr>
@@ -6858,7 +8510,7 @@
                 <a:ea typeface="Calibri" pitchFamily="34" charset="-122"/>
                 <a:cs typeface="Calibri" pitchFamily="34" charset="-120"/>
               </a:rPr>
-              <a:t>Every strategy that adds information beats the baseline on average. RUS, which only removes information, is the single worst performer and the only one that collapses completely on extreme imbalance.</a:t>
+              <a:t>Under fair training, no strategy's balanced accuracy is statistically distinguishable from any other's, including the baseline. Most of our DA2 spread was a protocol artifact.</a:t>
             </a:r>
             <a:endParaRPr lang="en-US" sz="1200" dirty="0"/>
           </a:p>
@@ -6866,7 +8518,7 @@
       </p:sp>
       <p:sp>
         <p:nvSpPr>
-          <p:cNvPr id="9" name="Shape 7"/>
+          <p:cNvPr id="8" name="Shape 6"/>
           <p:cNvSpPr/>
           <p:nvPr/>
         </p:nvSpPr>
@@ -6886,7 +8538,7 @@
       </p:sp>
       <p:sp>
         <p:nvSpPr>
-          <p:cNvPr id="10" name="Text 8"/>
+          <p:cNvPr id="9" name="Text 7"/>
           <p:cNvSpPr txBox="1"/>
           <p:nvPr/>
         </p:nvSpPr>
@@ -6925,7 +8577,7 @@
       </p:sp>
       <p:sp>
         <p:nvSpPr>
-          <p:cNvPr id="11" name="Text 9"/>
+          <p:cNvPr id="10" name="Text 8"/>
           <p:cNvSpPr txBox="1"/>
           <p:nvPr/>
         </p:nvSpPr>
@@ -6956,7 +8608,7 @@
                 <a:ea typeface="Calibri" pitchFamily="34" charset="-122"/>
                 <a:cs typeface="Calibri" pitchFamily="34" charset="-120"/>
               </a:rPr>
-              <a:t>Balanced mini-batch sampling is the safest default</a:t>
+              <a:t>PR-AUC recovers real, significant structure</a:t>
             </a:r>
             <a:endParaRPr lang="en-US" sz="1500" dirty="0"/>
           </a:p>
@@ -6964,7 +8616,7 @@
       </p:sp>
       <p:sp>
         <p:nvSpPr>
-          <p:cNvPr id="12" name="Text 10"/>
+          <p:cNvPr id="11" name="Text 9"/>
           <p:cNvSpPr txBox="1"/>
           <p:nvPr/>
         </p:nvSpPr>
@@ -6995,7 +8647,7 @@
                 <a:ea typeface="Calibri" pitchFamily="34" charset="-122"/>
                 <a:cs typeface="Calibri" pitchFamily="34" charset="-120"/>
               </a:rPr>
-              <a:t>Strongest average result, and the only strategy that stayed reliable on the most extreme benchmark — without touching the underlying dataset at all.</a:t>
+              <a:t>Oversampling-based strategies (ROS especially) significantly outperform RUS on ranking quality, even though their balanced accuracies are statistically tied.</a:t>
             </a:r>
             <a:endParaRPr lang="en-US" sz="1200" dirty="0"/>
           </a:p>
@@ -7003,7 +8655,7 @@
       </p:sp>
       <p:sp>
         <p:nvSpPr>
-          <p:cNvPr id="13" name="Shape 11"/>
+          <p:cNvPr id="12" name="Shape 10"/>
           <p:cNvSpPr/>
           <p:nvPr/>
         </p:nvSpPr>
@@ -7023,7 +8675,7 @@
       </p:sp>
       <p:sp>
         <p:nvSpPr>
-          <p:cNvPr id="14" name="Text 12"/>
+          <p:cNvPr id="13" name="Text 11"/>
           <p:cNvSpPr txBox="1"/>
           <p:nvPr/>
         </p:nvSpPr>
@@ -7062,7 +8714,7 @@
       </p:sp>
       <p:sp>
         <p:nvSpPr>
-          <p:cNvPr id="15" name="Text 13"/>
+          <p:cNvPr id="14" name="Text 12"/>
           <p:cNvSpPr txBox="1"/>
           <p:nvPr/>
         </p:nvSpPr>
@@ -7093,7 +8745,7 @@
                 <a:ea typeface="Calibri" pitchFamily="34" charset="-122"/>
                 <a:cs typeface="Calibri" pitchFamily="34" charset="-120"/>
               </a:rPr>
-              <a:t>The right strategy is benchmark-dependent</a:t>
+              <a:t>RUS's real weakness is calibration, not detection</a:t>
             </a:r>
             <a:endParaRPr lang="en-US" sz="1500" dirty="0"/>
           </a:p>
@@ -7101,7 +8753,7 @@
       </p:sp>
       <p:sp>
         <p:nvSpPr>
-          <p:cNvPr id="16" name="Text 14"/>
+          <p:cNvPr id="15" name="Text 13"/>
           <p:cNvSpPr txBox="1"/>
           <p:nvPr/>
         </p:nvSpPr>
@@ -7132,7 +8784,7 @@
                 <a:ea typeface="Calibri" pitchFamily="34" charset="-122"/>
                 <a:cs typeface="Calibri" pitchFamily="34" charset="-120"/>
               </a:rPr>
-              <a:t>Augmentation is a clear win on moderately imbalanced benchmarks and a clear loss on the most extreme one. There is no single recipe that is best everywhere.</a:t>
+              <a:t>Its tiny effective training set makes probability outputs fragile and poorly ranked: a narrower, more defensible mechanistic claim than DA2's “fails outright.”</a:t>
             </a:r>
             <a:endParaRPr lang="en-US" sz="1200" dirty="0"/>
           </a:p>
@@ -7140,46 +8792,46 @@
       </p:sp>
       <p:sp>
         <p:nvSpPr>
+          <p:cNvPr id="16" name="Text 14"/>
+          <p:cNvSpPr txBox="1"/>
+          <p:nvPr/>
+        </p:nvSpPr>
+        <p:spPr>
+          <a:xfrm>
+            <a:off x="457200" y="6473952"/>
+            <a:ext cx="9144000" cy="274320"/>
+          </a:xfrm>
+          <a:prstGeom prst="rect">
+            <a:avLst/>
+          </a:prstGeom>
+          <a:noFill/>
+          <a:ln/>
+        </p:spPr>
+        <p:txBody>
+          <a:bodyPr wrap="square" lIns="0" tIns="0" rIns="0" bIns="0" rtlCol="0" anchor="ctr"/>
+          <a:lstStyle/>
+          <a:p>
+            <a:pPr indent="0" marL="0">
+              <a:buNone/>
+            </a:pPr>
+            <a:r>
+              <a:rPr lang="en-US" sz="900" dirty="0">
+                <a:solidFill>
+                  <a:srgbClr val="8B93C4"/>
+                </a:solidFill>
+                <a:latin typeface="Calibri" pitchFamily="34" charset="0"/>
+                <a:ea typeface="Calibri" pitchFamily="34" charset="-122"/>
+                <a:cs typeface="Calibri" pitchFamily="34" charset="-120"/>
+              </a:rPr>
+              <a:t>Group 11 (DA3 Revision) · Data Balancing and Augmentation Strategies for Hotspot Detection</a:t>
+            </a:r>
+            <a:endParaRPr lang="en-US" sz="900" dirty="0"/>
+          </a:p>
+        </p:txBody>
+      </p:sp>
+      <p:sp>
+        <p:nvSpPr>
           <p:cNvPr id="17" name="Text 15"/>
-          <p:cNvSpPr txBox="1"/>
-          <p:nvPr/>
-        </p:nvSpPr>
-        <p:spPr>
-          <a:xfrm>
-            <a:off x="457200" y="6473952"/>
-            <a:ext cx="8229600" cy="274320"/>
-          </a:xfrm>
-          <a:prstGeom prst="rect">
-            <a:avLst/>
-          </a:prstGeom>
-          <a:noFill/>
-          <a:ln/>
-        </p:spPr>
-        <p:txBody>
-          <a:bodyPr wrap="square" lIns="0" tIns="0" rIns="0" bIns="0" rtlCol="0" anchor="ctr"/>
-          <a:lstStyle/>
-          <a:p>
-            <a:pPr indent="0" marL="0">
-              <a:buNone/>
-            </a:pPr>
-            <a:r>
-              <a:rPr lang="en-US" sz="900" dirty="0">
-                <a:solidFill>
-                  <a:srgbClr val="8B93C4"/>
-                </a:solidFill>
-                <a:latin typeface="Calibri" pitchFamily="34" charset="0"/>
-                <a:ea typeface="Calibri" pitchFamily="34" charset="-122"/>
-                <a:cs typeface="Calibri" pitchFamily="34" charset="-120"/>
-              </a:rPr>
-              <a:t>Group 11 · Data Balancing and Augmentation Strategies for Hotspot Detection</a:t>
-            </a:r>
-            <a:endParaRPr lang="en-US" sz="900" dirty="0"/>
-          </a:p>
-        </p:txBody>
-      </p:sp>
-      <p:sp>
-        <p:nvSpPr>
-          <p:cNvPr id="18" name="Text 16"/>
           <p:cNvSpPr txBox="1"/>
           <p:nvPr/>
         </p:nvSpPr>
@@ -7210,7 +8862,7 @@
                 <a:ea typeface="Calibri" pitchFamily="34" charset="-122"/>
                 <a:cs typeface="Calibri" pitchFamily="34" charset="-120"/>
               </a:rPr>
-              <a:t>14</a:t>
+              <a:t>16</a:t>
             </a:r>
             <a:endParaRPr lang="en-US" sz="900" dirty="0"/>
           </a:p>
@@ -7224,9 +8876,9 @@
 </p:sld>
 </file>
 
-<file path=ppt/slides/slide15.xml><?xml version="1.0" encoding="utf-8"?>
+<file path=ppt/slides/slide17.xml><?xml version="1.0" encoding="utf-8"?>
 <p:sld xmlns:a="http://schemas.openxmlformats.org/drawingml/2006/main" xmlns:r="http://schemas.openxmlformats.org/officeDocument/2006/relationships" xmlns:p="http://schemas.openxmlformats.org/presentationml/2006/main">
-  <p:cSld name="Slide 15">
+  <p:cSld name="Slide 17">
     <p:bg>
       <p:bgPr>
         <a:solidFill>
@@ -7298,7 +8950,7 @@
         </p:nvSpPr>
         <p:spPr>
           <a:xfrm>
-            <a:off x="731520" y="2468880"/>
+            <a:off x="731520" y="2286000"/>
             <a:ext cx="9144000" cy="914400"/>
           </a:xfrm>
           <a:prstGeom prst="rect">
@@ -7337,7 +8989,7 @@
         </p:nvSpPr>
         <p:spPr>
           <a:xfrm>
-            <a:off x="731520" y="3291840"/>
+            <a:off x="731520" y="3108960"/>
             <a:ext cx="9144000" cy="548640"/>
           </a:xfrm>
           <a:prstGeom prst="rect">
@@ -7370,13 +9022,113 @@
       </p:sp>
       <p:sp>
         <p:nvSpPr>
-          <p:cNvPr id="6" name="Text 4"/>
-          <p:cNvSpPr txBox="1"/>
-          <p:nvPr/>
-        </p:nvSpPr>
-        <p:spPr>
-          <a:xfrm>
-            <a:off x="731520" y="4023360"/>
+          <p:cNvPr id="6" name="Shape 4"/>
+          <p:cNvSpPr/>
+          <p:nvPr/>
+        </p:nvSpPr>
+        <p:spPr>
+          <a:xfrm>
+            <a:off x="731520" y="3931920"/>
+            <a:ext cx="9875520" cy="822960"/>
+          </a:xfrm>
+          <a:prstGeom prst="roundRect">
+            <a:avLst>
+              <a:gd name="adj" fmla="val 8889"/>
+            </a:avLst>
+          </a:prstGeom>
+          <a:solidFill>
+            <a:srgbClr val="1E2761"/>
+          </a:solidFill>
+          <a:ln/>
+        </p:spPr>
+      </p:sp>
+      <p:sp>
+        <p:nvSpPr>
+          <p:cNvPr id="7" name="Text 5"/>
+          <p:cNvSpPr txBox="1"/>
+          <p:nvPr/>
+        </p:nvSpPr>
+        <p:spPr>
+          <a:xfrm>
+            <a:off x="960120" y="4041648"/>
+            <a:ext cx="9144000" cy="274320"/>
+          </a:xfrm>
+          <a:prstGeom prst="rect">
+            <a:avLst/>
+          </a:prstGeom>
+          <a:noFill/>
+          <a:ln/>
+        </p:spPr>
+        <p:txBody>
+          <a:bodyPr wrap="square" lIns="0" tIns="0" rIns="0" bIns="0" rtlCol="0" anchor="ctr"/>
+          <a:lstStyle/>
+          <a:p>
+            <a:pPr indent="0" marL="0">
+              <a:buNone/>
+            </a:pPr>
+            <a:r>
+              <a:rPr lang="en-US" sz="1000" b="1" spc="200" kern="0" dirty="0">
+                <a:solidFill>
+                  <a:srgbClr val="8B93C4"/>
+                </a:solidFill>
+                <a:latin typeface="Calibri" pitchFamily="34" charset="0"/>
+                <a:ea typeface="Calibri" pitchFamily="34" charset="-122"/>
+                <a:cs typeface="Calibri" pitchFamily="34" charset="-120"/>
+              </a:rPr>
+              <a:t>CODE &amp; REPRODUCIBILITY</a:t>
+            </a:r>
+            <a:endParaRPr lang="en-US" sz="1000" dirty="0"/>
+          </a:p>
+        </p:txBody>
+      </p:sp>
+      <p:sp>
+        <p:nvSpPr>
+          <p:cNvPr id="8" name="Text 6"/>
+          <p:cNvSpPr txBox="1"/>
+          <p:nvPr/>
+        </p:nvSpPr>
+        <p:spPr>
+          <a:xfrm>
+            <a:off x="960120" y="4279392"/>
+            <a:ext cx="9418320" cy="411480"/>
+          </a:xfrm>
+          <a:prstGeom prst="rect">
+            <a:avLst/>
+          </a:prstGeom>
+          <a:noFill/>
+          <a:ln/>
+        </p:spPr>
+        <p:txBody>
+          <a:bodyPr wrap="square" lIns="0" tIns="0" rIns="0" bIns="0" rtlCol="0" anchor="ctr"/>
+          <a:lstStyle/>
+          <a:p>
+            <a:pPr indent="0" marL="0">
+              <a:buNone/>
+            </a:pPr>
+            <a:r>
+              <a:rPr lang="en-US" sz="1500" b="1" dirty="0">
+                <a:solidFill>
+                  <a:srgbClr val="FFFFFF"/>
+                </a:solidFill>
+                <a:latin typeface="Calibri" pitchFamily="34" charset="0"/>
+                <a:ea typeface="Calibri" pitchFamily="34" charset="-122"/>
+                <a:cs typeface="Calibri" pitchFamily="34" charset="-120"/>
+              </a:rPr>
+              <a:t>https://github.com/&lt;your-github-username&gt;/Lithography-Hotspot-Detection-G11</a:t>
+            </a:r>
+            <a:endParaRPr lang="en-US" sz="1500" dirty="0"/>
+          </a:p>
+        </p:txBody>
+      </p:sp>
+      <p:sp>
+        <p:nvSpPr>
+          <p:cNvPr id="9" name="Text 7"/>
+          <p:cNvSpPr txBox="1"/>
+          <p:nvPr/>
+        </p:nvSpPr>
+        <p:spPr>
+          <a:xfrm>
+            <a:off x="731520" y="4983480"/>
             <a:ext cx="9144000" cy="457200"/>
           </a:xfrm>
           <a:prstGeom prst="rect">
@@ -7401,7 +9153,7 @@
                 <a:ea typeface="Calibri" pitchFamily="34" charset="-122"/>
                 <a:cs typeface="Calibri" pitchFamily="34" charset="-120"/>
               </a:rPr>
-              <a:t>Full code, cached data, figures, and the IEEE-format report are in the accompanying repository.</a:t>
+              <a:t>Full code, cached data, figures, significance tests, and the IEEE-format report are in the repository above.</a:t>
             </a:r>
             <a:endParaRPr lang="en-US" sz="1200" dirty="0"/>
           </a:p>
@@ -7409,14 +9161,14 @@
       </p:sp>
       <p:sp>
         <p:nvSpPr>
-          <p:cNvPr id="7" name="Text 5"/>
+          <p:cNvPr id="10" name="Text 8"/>
           <p:cNvSpPr txBox="1"/>
           <p:nvPr/>
         </p:nvSpPr>
         <p:spPr>
           <a:xfrm>
             <a:off x="457200" y="6473952"/>
-            <a:ext cx="8229600" cy="274320"/>
+            <a:ext cx="9144000" cy="274320"/>
           </a:xfrm>
           <a:prstGeom prst="rect">
             <a:avLst/>
@@ -7440,7 +9192,7 @@
                 <a:ea typeface="Calibri" pitchFamily="34" charset="-122"/>
                 <a:cs typeface="Calibri" pitchFamily="34" charset="-120"/>
               </a:rPr>
-              <a:t>Group 11 · Data Balancing and Augmentation Strategies for Hotspot Detection</a:t>
+              <a:t>Group 11 (DA3 Revision) · Data Balancing and Augmentation Strategies for Hotspot Detection</a:t>
             </a:r>
             <a:endParaRPr lang="en-US" sz="900" dirty="0"/>
           </a:p>
@@ -7448,7 +9200,7 @@
       </p:sp>
       <p:sp>
         <p:nvSpPr>
-          <p:cNvPr id="8" name="Text 6"/>
+          <p:cNvPr id="11" name="Text 9"/>
           <p:cNvSpPr txBox="1"/>
           <p:nvPr/>
         </p:nvSpPr>
@@ -7479,7 +9231,7 @@
                 <a:ea typeface="Calibri" pitchFamily="34" charset="-122"/>
                 <a:cs typeface="Calibri" pitchFamily="34" charset="-120"/>
               </a:rPr>
-              <a:t>15</a:t>
+              <a:t>17</a:t>
             </a:r>
             <a:endParaRPr lang="en-US" sz="900" dirty="0"/>
           </a:p>
@@ -7689,7 +9441,7 @@
                 <a:ea typeface="Calibri" pitchFamily="34" charset="-122"/>
                 <a:cs typeface="Calibri" pitchFamily="34" charset="-120"/>
               </a:rPr>
-              <a:t>Lithography hotspots &amp; why detecting them is hard</a:t>
+              <a:t>Lithography hotspots &amp; severe class imbalance</a:t>
             </a:r>
             <a:endParaRPr lang="en-US" sz="1150" dirty="0"/>
           </a:p>
@@ -7789,7 +9541,7 @@
                 <a:ea typeface="Calibri" pitchFamily="34" charset="-122"/>
                 <a:cs typeface="Calibri" pitchFamily="34" charset="-120"/>
               </a:rPr>
-              <a:t>The Real Challenge</a:t>
+              <a:t>What We Revised</a:t>
             </a:r>
             <a:endParaRPr lang="en-US" sz="1500" dirty="0"/>
           </a:p>
@@ -7828,7 +9580,7 @@
                 <a:ea typeface="Calibri" pitchFamily="34" charset="-122"/>
                 <a:cs typeface="Calibri" pitchFamily="34" charset="-120"/>
               </a:rPr>
-              <a:t>Severe class imbalance in ICCAD-12</a:t>
+              <a:t>Validation split, equal steps, seeds, PR-AUC</a:t>
             </a:r>
             <a:endParaRPr lang="en-US" sz="1150" dirty="0"/>
           </a:p>
@@ -7928,7 +9680,7 @@
                 <a:ea typeface="Calibri" pitchFamily="34" charset="-122"/>
                 <a:cs typeface="Calibri" pitchFamily="34" charset="-120"/>
               </a:rPr>
-              <a:t>Our Research Question</a:t>
+              <a:t>Method</a:t>
             </a:r>
             <a:endParaRPr lang="en-US" sz="1500" dirty="0"/>
           </a:p>
@@ -7967,7 +9719,7 @@
                 <a:ea typeface="Calibri" pitchFamily="34" charset="-122"/>
                 <a:cs typeface="Calibri" pitchFamily="34" charset="-120"/>
               </a:rPr>
-              <a:t>Which balancing strategy works best?</a:t>
+              <a:t>Common CNN backbone + 8 balancing strategies</a:t>
             </a:r>
             <a:endParaRPr lang="en-US" sz="1150" dirty="0"/>
           </a:p>
@@ -8067,7 +9819,7 @@
                 <a:ea typeface="Calibri" pitchFamily="34" charset="-122"/>
                 <a:cs typeface="Calibri" pitchFamily="34" charset="-120"/>
               </a:rPr>
-              <a:t>Method</a:t>
+              <a:t>Results</a:t>
             </a:r>
             <a:endParaRPr lang="en-US" sz="1500" dirty="0"/>
           </a:p>
@@ -8106,7 +9858,7 @@
                 <a:ea typeface="Calibri" pitchFamily="34" charset="-122"/>
                 <a:cs typeface="Calibri" pitchFamily="34" charset="-120"/>
               </a:rPr>
-              <a:t>Common CNN backbone + 6 balancing strategies</a:t>
+              <a:t>Main comparison across 5 benchmarks, 3 seeds</a:t>
             </a:r>
             <a:endParaRPr lang="en-US" sz="1150" dirty="0"/>
           </a:p>
@@ -8206,7 +9958,7 @@
                 <a:ea typeface="Calibri" pitchFamily="34" charset="-122"/>
                 <a:cs typeface="Calibri" pitchFamily="34" charset="-120"/>
               </a:rPr>
-              <a:t>Results</a:t>
+              <a:t>Key Findings</a:t>
             </a:r>
             <a:endParaRPr lang="en-US" sz="1500" dirty="0"/>
           </a:p>
@@ -8245,7 +9997,7 @@
                 <a:ea typeface="Calibri" pitchFamily="34" charset="-122"/>
                 <a:cs typeface="Calibri" pitchFamily="34" charset="-120"/>
               </a:rPr>
-              <a:t>Main comparison across 5 benchmarks</a:t>
+              <a:t>Why DA2's conclusions changed</a:t>
             </a:r>
             <a:endParaRPr lang="en-US" sz="1150" dirty="0"/>
           </a:p>
@@ -8345,7 +10097,7 @@
                 <a:ea typeface="Calibri" pitchFamily="34" charset="-122"/>
                 <a:cs typeface="Calibri" pitchFamily="34" charset="-120"/>
               </a:rPr>
-              <a:t>Key Findings &amp; Ablation</a:t>
+              <a:t>Feedback Addressed</a:t>
             </a:r>
             <a:endParaRPr lang="en-US" sz="1500" dirty="0"/>
           </a:p>
@@ -8384,7 +10136,7 @@
                 <a:ea typeface="Calibri" pitchFamily="34" charset="-122"/>
                 <a:cs typeface="Calibri" pitchFamily="34" charset="-120"/>
               </a:rPr>
-              <a:t>What actually works, and why</a:t>
+              <a:t>Every reviewer point, mapped to our response</a:t>
             </a:r>
             <a:endParaRPr lang="en-US" sz="1150" dirty="0"/>
           </a:p>
@@ -8399,7 +10151,7 @@
         <p:spPr>
           <a:xfrm>
             <a:off x="457200" y="6473952"/>
-            <a:ext cx="8229600" cy="274320"/>
+            <a:ext cx="9144000" cy="274320"/>
           </a:xfrm>
           <a:prstGeom prst="rect">
             <a:avLst/>
@@ -8423,7 +10175,7 @@
                 <a:ea typeface="Calibri" pitchFamily="34" charset="-122"/>
                 <a:cs typeface="Calibri" pitchFamily="34" charset="-120"/>
               </a:rPr>
-              <a:t>Group 11 · Data Balancing and Augmentation Strategies for Hotspot Detection</a:t>
+              <a:t>Group 11 (DA3 Revision) · Data Balancing and Augmentation Strategies for Hotspot Detection</a:t>
             </a:r>
             <a:endParaRPr lang="en-US" sz="900" dirty="0"/>
           </a:p>
@@ -9110,7 +10862,7 @@
         <p:spPr>
           <a:xfrm>
             <a:off x="457200" y="6473952"/>
-            <a:ext cx="8229600" cy="274320"/>
+            <a:ext cx="9144000" cy="274320"/>
           </a:xfrm>
           <a:prstGeom prst="rect">
             <a:avLst/>
@@ -9134,7 +10886,7 @@
                 <a:ea typeface="Calibri" pitchFamily="34" charset="-122"/>
                 <a:cs typeface="Calibri" pitchFamily="34" charset="-120"/>
               </a:rPr>
-              <a:t>Group 11 · Data Balancing and Augmentation Strategies for Hotspot Detection</a:t>
+              <a:t>Group 11 (DA3 Revision) · Data Balancing and Augmentation Strategies for Hotspot Detection</a:t>
             </a:r>
             <a:endParaRPr lang="en-US" sz="900" dirty="0"/>
           </a:p>
@@ -10407,7 +12159,7 @@
                 <a:ea typeface="Calibri" pitchFamily="34" charset="-122"/>
                 <a:cs typeface="Calibri" pitchFamily="34" charset="-120"/>
               </a:rPr>
-              <a:t>A classifier that always predicts “Non-Hotspot” scores &gt;99% raw accuracy on B5 — and catches zero hotspots. This is why Balanced Accuracy, not accuracy, drives this whole study.</a:t>
+              <a:t>A classifier that always predicts “Non-Hotspot” scores &gt;99% raw accuracy on B5, and catches zero hotspots. This is why Balanced Accuracy and PR-AUC, not accuracy, drive this whole study.</a:t>
             </a:r>
             <a:endParaRPr lang="en-US" sz="1350" dirty="0"/>
           </a:p>
@@ -10422,7 +12174,7 @@
         <p:spPr>
           <a:xfrm>
             <a:off x="457200" y="6473952"/>
-            <a:ext cx="8229600" cy="274320"/>
+            <a:ext cx="9144000" cy="274320"/>
           </a:xfrm>
           <a:prstGeom prst="rect">
             <a:avLst/>
@@ -10446,7 +12198,7 @@
                 <a:ea typeface="Calibri" pitchFamily="34" charset="-122"/>
                 <a:cs typeface="Calibri" pitchFamily="34" charset="-120"/>
               </a:rPr>
-              <a:t>Group 11 · Data Balancing and Augmentation Strategies for Hotspot Detection</a:t>
+              <a:t>Group 11 (DA3 Revision) · Data Balancing and Augmentation Strategies for Hotspot Detection</a:t>
             </a:r>
             <a:endParaRPr lang="en-US" sz="900" dirty="0"/>
           </a:p>
@@ -10657,7 +12409,7 @@
                 <a:ea typeface="Calibri" pitchFamily="34" charset="-122"/>
                 <a:cs typeface="Calibri" pitchFamily="34" charset="-120"/>
               </a:rPr>
-              <a:t>Group 11 focus: undersampling · oversampling · augmentation · balanced mini-batches · combinations — compared on an identical backbone, across all 5 benchmarks independently.</a:t>
+              <a:t>DA3 revision: our DA2 answer was contaminated by an unfair training protocol. This talk is as much about that correction as it is about the original question.</a:t>
             </a:r>
             <a:endParaRPr lang="en-US" sz="1500" dirty="0"/>
           </a:p>
@@ -10672,7 +12424,7 @@
         <p:spPr>
           <a:xfrm>
             <a:off x="457200" y="6473952"/>
-            <a:ext cx="8229600" cy="274320"/>
+            <a:ext cx="9144000" cy="274320"/>
           </a:xfrm>
           <a:prstGeom prst="rect">
             <a:avLst/>
@@ -10696,7 +12448,7 @@
                 <a:ea typeface="Calibri" pitchFamily="34" charset="-122"/>
                 <a:cs typeface="Calibri" pitchFamily="34" charset="-120"/>
               </a:rPr>
-              <a:t>Group 11 · Data Balancing and Augmentation Strategies for Hotspot Detection</a:t>
+              <a:t>Group 11 (DA3 Revision) · Data Balancing and Augmentation Strategies for Hotspot Detection</a:t>
             </a:r>
             <a:endParaRPr lang="en-US" sz="900" dirty="0"/>
           </a:p>
@@ -10845,7 +12597,7 @@
                 <a:ea typeface="Calibri" pitchFamily="34" charset="-122"/>
                 <a:cs typeface="Calibri" pitchFamily="34" charset="-120"/>
               </a:rPr>
-              <a:t>Identical lightweight CNN for every strategy — isolates the effect of the training data</a:t>
+              <a:t>Identical lightweight CNN for every strategy isolates the effect of the training data</a:t>
             </a:r>
             <a:endParaRPr lang="en-US" sz="1500" dirty="0"/>
           </a:p>
@@ -10859,7 +12611,7 @@
         </p:nvSpPr>
         <p:spPr>
           <a:xfrm>
-            <a:off x="640080" y="2011680"/>
+            <a:off x="640080" y="1920240"/>
             <a:ext cx="2011680" cy="1371600"/>
           </a:xfrm>
           <a:prstGeom prst="roundRect">
@@ -10881,7 +12633,7 @@
         </p:nvSpPr>
         <p:spPr>
           <a:xfrm>
-            <a:off x="731520" y="2176272"/>
+            <a:off x="731520" y="2084832"/>
             <a:ext cx="1828800" cy="365760"/>
           </a:xfrm>
           <a:prstGeom prst="rect">
@@ -10920,7 +12672,7 @@
         </p:nvSpPr>
         <p:spPr>
           <a:xfrm>
-            <a:off x="731520" y="2606040"/>
+            <a:off x="731520" y="2514600"/>
             <a:ext cx="1828800" cy="731520"/>
           </a:xfrm>
           <a:prstGeom prst="rect">
@@ -10976,7 +12728,7 @@
         </p:nvSpPr>
         <p:spPr>
           <a:xfrm>
-            <a:off x="2651760" y="2468880"/>
+            <a:off x="2651760" y="2377440"/>
             <a:ext cx="256032" cy="457200"/>
           </a:xfrm>
           <a:prstGeom prst="rect">
@@ -11015,7 +12767,7 @@
         </p:nvSpPr>
         <p:spPr>
           <a:xfrm>
-            <a:off x="2907792" y="2011680"/>
+            <a:off x="2907792" y="1920240"/>
             <a:ext cx="2011680" cy="1371600"/>
           </a:xfrm>
           <a:prstGeom prst="roundRect">
@@ -11037,7 +12789,7 @@
         </p:nvSpPr>
         <p:spPr>
           <a:xfrm>
-            <a:off x="2999232" y="2176272"/>
+            <a:off x="2999232" y="2084832"/>
             <a:ext cx="1828800" cy="365760"/>
           </a:xfrm>
           <a:prstGeom prst="rect">
@@ -11076,7 +12828,7 @@
         </p:nvSpPr>
         <p:spPr>
           <a:xfrm>
-            <a:off x="2999232" y="2606040"/>
+            <a:off x="2999232" y="2514600"/>
             <a:ext cx="1828800" cy="731520"/>
           </a:xfrm>
           <a:prstGeom prst="rect">
@@ -11132,7 +12884,7 @@
         </p:nvSpPr>
         <p:spPr>
           <a:xfrm>
-            <a:off x="4919472" y="2468880"/>
+            <a:off x="4919472" y="2377440"/>
             <a:ext cx="256032" cy="457200"/>
           </a:xfrm>
           <a:prstGeom prst="rect">
@@ -11171,7 +12923,7 @@
         </p:nvSpPr>
         <p:spPr>
           <a:xfrm>
-            <a:off x="5175504" y="2011680"/>
+            <a:off x="5175504" y="1920240"/>
             <a:ext cx="2011680" cy="1371600"/>
           </a:xfrm>
           <a:prstGeom prst="roundRect">
@@ -11193,7 +12945,7 @@
         </p:nvSpPr>
         <p:spPr>
           <a:xfrm>
-            <a:off x="5266944" y="2176272"/>
+            <a:off x="5266944" y="2084832"/>
             <a:ext cx="1828800" cy="365760"/>
           </a:xfrm>
           <a:prstGeom prst="rect">
@@ -11232,7 +12984,7 @@
         </p:nvSpPr>
         <p:spPr>
           <a:xfrm>
-            <a:off x="5266944" y="2606040"/>
+            <a:off x="5266944" y="2514600"/>
             <a:ext cx="1828800" cy="731520"/>
           </a:xfrm>
           <a:prstGeom prst="rect">
@@ -11271,7 +13023,7 @@
         </p:nvSpPr>
         <p:spPr>
           <a:xfrm>
-            <a:off x="7187184" y="2468880"/>
+            <a:off x="7187184" y="2377440"/>
             <a:ext cx="256032" cy="457200"/>
           </a:xfrm>
           <a:prstGeom prst="rect">
@@ -11310,7 +13062,7 @@
         </p:nvSpPr>
         <p:spPr>
           <a:xfrm>
-            <a:off x="7443216" y="2011680"/>
+            <a:off x="7443216" y="1920240"/>
             <a:ext cx="2011680" cy="1371600"/>
           </a:xfrm>
           <a:prstGeom prst="roundRect">
@@ -11332,7 +13084,7 @@
         </p:nvSpPr>
         <p:spPr>
           <a:xfrm>
-            <a:off x="7534656" y="2176272"/>
+            <a:off x="7534656" y="2084832"/>
             <a:ext cx="1828800" cy="365760"/>
           </a:xfrm>
           <a:prstGeom prst="rect">
@@ -11371,7 +13123,7 @@
         </p:nvSpPr>
         <p:spPr>
           <a:xfrm>
-            <a:off x="7534656" y="2606040"/>
+            <a:off x="7534656" y="2514600"/>
             <a:ext cx="1828800" cy="731520"/>
           </a:xfrm>
           <a:prstGeom prst="rect">
@@ -11427,7 +13179,7 @@
         </p:nvSpPr>
         <p:spPr>
           <a:xfrm>
-            <a:off x="9454896" y="2468880"/>
+            <a:off x="9454896" y="2377440"/>
             <a:ext cx="256032" cy="457200"/>
           </a:xfrm>
           <a:prstGeom prst="rect">
@@ -11466,7 +13218,7 @@
         </p:nvSpPr>
         <p:spPr>
           <a:xfrm>
-            <a:off x="9710928" y="2011680"/>
+            <a:off x="9710928" y="1920240"/>
             <a:ext cx="2011680" cy="1371600"/>
           </a:xfrm>
           <a:prstGeom prst="roundRect">
@@ -11488,7 +13240,7 @@
         </p:nvSpPr>
         <p:spPr>
           <a:xfrm>
-            <a:off x="9802368" y="2176272"/>
+            <a:off x="9802368" y="2084832"/>
             <a:ext cx="1828800" cy="365760"/>
           </a:xfrm>
           <a:prstGeom prst="rect">
@@ -11527,7 +13279,7 @@
         </p:nvSpPr>
         <p:spPr>
           <a:xfrm>
-            <a:off x="9802368" y="2606040"/>
+            <a:off x="9802368" y="2514600"/>
             <a:ext cx="1828800" cy="731520"/>
           </a:xfrm>
           <a:prstGeom prst="rect">
@@ -11583,12 +13335,12 @@
         </p:nvSpPr>
         <p:spPr>
           <a:xfrm>
-            <a:off x="640080" y="3931920"/>
-            <a:ext cx="3383280" cy="1234440"/>
+            <a:off x="640080" y="3749040"/>
+            <a:ext cx="3383280" cy="1417320"/>
           </a:xfrm>
           <a:prstGeom prst="roundRect">
             <a:avLst>
-              <a:gd name="adj" fmla="val 5926"/>
+              <a:gd name="adj" fmla="val 5161"/>
             </a:avLst>
           </a:prstGeom>
           <a:solidFill>
@@ -11605,7 +13357,7 @@
         </p:nvSpPr>
         <p:spPr>
           <a:xfrm>
-            <a:off x="868680" y="4041648"/>
+            <a:off x="868680" y="3858768"/>
             <a:ext cx="2926080" cy="548640"/>
           </a:xfrm>
           <a:prstGeom prst="rect">
@@ -11622,7 +13374,7 @@
               <a:buNone/>
             </a:pPr>
             <a:r>
-              <a:rPr lang="en-US" sz="2200" b="1" dirty="0">
+              <a:rPr lang="en-US" sz="2000" b="1" dirty="0">
                 <a:solidFill>
                   <a:srgbClr val="1E2761"/>
                 </a:solidFill>
@@ -11632,7 +13384,7 @@
               </a:rPr>
               <a:t>8,649</a:t>
             </a:r>
-            <a:endParaRPr lang="en-US" sz="2200" dirty="0"/>
+            <a:endParaRPr lang="en-US" sz="2000" dirty="0"/>
           </a:p>
         </p:txBody>
       </p:sp>
@@ -11644,24 +13396,24 @@
         </p:nvSpPr>
         <p:spPr>
           <a:xfrm>
-            <a:off x="868680" y="4572000"/>
-            <a:ext cx="2926080" cy="457200"/>
-          </a:xfrm>
-          <a:prstGeom prst="rect">
-            <a:avLst/>
-          </a:prstGeom>
-          <a:noFill/>
-          <a:ln/>
-        </p:spPr>
-        <p:txBody>
-          <a:bodyPr wrap="square" lIns="0" tIns="0" rIns="0" bIns="0" rtlCol="0" anchor="ctr"/>
-          <a:lstStyle/>
-          <a:p>
-            <a:pPr indent="0" marL="0">
-              <a:buNone/>
-            </a:pPr>
-            <a:r>
-              <a:rPr lang="en-US" sz="1200" dirty="0">
+            <a:off x="868680" y="4389120"/>
+            <a:ext cx="2926080" cy="685800"/>
+          </a:xfrm>
+          <a:prstGeom prst="rect">
+            <a:avLst/>
+          </a:prstGeom>
+          <a:noFill/>
+          <a:ln/>
+        </p:spPr>
+        <p:txBody>
+          <a:bodyPr wrap="square" lIns="0" tIns="0" rIns="0" bIns="0" rtlCol="0" anchor="ctr"/>
+          <a:lstStyle/>
+          <a:p>
+            <a:pPr indent="0" marL="0">
+              <a:buNone/>
+            </a:pPr>
+            <a:r>
+              <a:rPr lang="en-US" sz="1150" dirty="0">
                 <a:solidFill>
                   <a:srgbClr val="555B6E"/>
                 </a:solidFill>
@@ -11671,7 +13423,7 @@
               </a:rPr>
               <a:t>trainable parameters</a:t>
             </a:r>
-            <a:endParaRPr lang="en-US" sz="1200" dirty="0"/>
+            <a:endParaRPr lang="en-US" sz="1150" dirty="0"/>
           </a:p>
         </p:txBody>
       </p:sp>
@@ -11683,12 +13435,12 @@
         </p:nvSpPr>
         <p:spPr>
           <a:xfrm>
-            <a:off x="4297680" y="3931920"/>
-            <a:ext cx="3383280" cy="1234440"/>
+            <a:off x="4297680" y="3749040"/>
+            <a:ext cx="3383280" cy="1417320"/>
           </a:xfrm>
           <a:prstGeom prst="roundRect">
             <a:avLst>
-              <a:gd name="adj" fmla="val 5926"/>
+              <a:gd name="adj" fmla="val 5161"/>
             </a:avLst>
           </a:prstGeom>
           <a:solidFill>
@@ -11705,7 +13457,7 @@
         </p:nvSpPr>
         <p:spPr>
           <a:xfrm>
-            <a:off x="4526280" y="4041648"/>
+            <a:off x="4526280" y="3858768"/>
             <a:ext cx="2926080" cy="548640"/>
           </a:xfrm>
           <a:prstGeom prst="rect">
@@ -11722,7 +13474,7 @@
               <a:buNone/>
             </a:pPr>
             <a:r>
-              <a:rPr lang="en-US" sz="2200" b="1" dirty="0">
+              <a:rPr lang="en-US" sz="2000" b="1" dirty="0">
                 <a:solidFill>
                   <a:srgbClr val="1E2761"/>
                 </a:solidFill>
@@ -11732,7 +13484,7 @@
               </a:rPr>
               <a:t>PyTorch</a:t>
             </a:r>
-            <a:endParaRPr lang="en-US" sz="2200" dirty="0"/>
+            <a:endParaRPr lang="en-US" sz="2000" dirty="0"/>
           </a:p>
         </p:txBody>
       </p:sp>
@@ -11744,24 +13496,24 @@
         </p:nvSpPr>
         <p:spPr>
           <a:xfrm>
-            <a:off x="4526280" y="4572000"/>
-            <a:ext cx="2926080" cy="457200"/>
-          </a:xfrm>
-          <a:prstGeom prst="rect">
-            <a:avLst/>
-          </a:prstGeom>
-          <a:noFill/>
-          <a:ln/>
-        </p:spPr>
-        <p:txBody>
-          <a:bodyPr wrap="square" lIns="0" tIns="0" rIns="0" bIns="0" rtlCol="0" anchor="ctr"/>
-          <a:lstStyle/>
-          <a:p>
-            <a:pPr indent="0" marL="0">
-              <a:buNone/>
-            </a:pPr>
-            <a:r>
-              <a:rPr lang="en-US" sz="1200" dirty="0">
+            <a:off x="4526280" y="4389120"/>
+            <a:ext cx="2926080" cy="685800"/>
+          </a:xfrm>
+          <a:prstGeom prst="rect">
+            <a:avLst/>
+          </a:prstGeom>
+          <a:noFill/>
+          <a:ln/>
+        </p:spPr>
+        <p:txBody>
+          <a:bodyPr wrap="square" lIns="0" tIns="0" rIns="0" bIns="0" rtlCol="0" anchor="ctr"/>
+          <a:lstStyle/>
+          <a:p>
+            <a:pPr indent="0" marL="0">
+              <a:buNone/>
+            </a:pPr>
+            <a:r>
+              <a:rPr lang="en-US" sz="1150" dirty="0">
                 <a:solidFill>
                   <a:srgbClr val="555B6E"/>
                 </a:solidFill>
@@ -11771,7 +13523,7 @@
               </a:rPr>
               <a:t>re-implementation</a:t>
             </a:r>
-            <a:endParaRPr lang="en-US" sz="1200" dirty="0"/>
+            <a:endParaRPr lang="en-US" sz="1150" dirty="0"/>
           </a:p>
         </p:txBody>
       </p:sp>
@@ -11783,12 +13535,12 @@
         </p:nvSpPr>
         <p:spPr>
           <a:xfrm>
-            <a:off x="7955280" y="3931920"/>
-            <a:ext cx="3383280" cy="1234440"/>
+            <a:off x="7955280" y="3749040"/>
+            <a:ext cx="3383280" cy="1417320"/>
           </a:xfrm>
           <a:prstGeom prst="roundRect">
             <a:avLst>
-              <a:gd name="adj" fmla="val 5926"/>
+              <a:gd name="adj" fmla="val 5161"/>
             </a:avLst>
           </a:prstGeom>
           <a:solidFill>
@@ -11805,7 +13557,7 @@
         </p:nvSpPr>
         <p:spPr>
           <a:xfrm>
-            <a:off x="8183880" y="4041648"/>
+            <a:off x="8183880" y="3858768"/>
             <a:ext cx="2926080" cy="548640"/>
           </a:xfrm>
           <a:prstGeom prst="rect">
@@ -11822,7 +13574,7 @@
               <a:buNone/>
             </a:pPr>
             <a:r>
-              <a:rPr lang="en-US" sz="2200" b="1" dirty="0">
+              <a:rPr lang="en-US" sz="2000" b="1" dirty="0">
                 <a:solidFill>
                   <a:srgbClr val="1E2761"/>
                 </a:solidFill>
@@ -11830,9 +13582,9 @@
                 <a:ea typeface="Cambria" pitchFamily="34" charset="-122"/>
                 <a:cs typeface="Cambria" pitchFamily="34" charset="-120"/>
               </a:rPr>
-              <a:t>8 epochs</a:t>
-            </a:r>
-            <a:endParaRPr lang="en-US" sz="2200" dirty="0"/>
+              <a:t>Equal steps</a:t>
+            </a:r>
+            <a:endParaRPr lang="en-US" sz="2000" dirty="0"/>
           </a:p>
         </p:txBody>
       </p:sp>
@@ -11844,24 +13596,24 @@
         </p:nvSpPr>
         <p:spPr>
           <a:xfrm>
-            <a:off x="8183880" y="4572000"/>
-            <a:ext cx="2926080" cy="457200"/>
-          </a:xfrm>
-          <a:prstGeom prst="rect">
-            <a:avLst/>
-          </a:prstGeom>
-          <a:noFill/>
-          <a:ln/>
-        </p:spPr>
-        <p:txBody>
-          <a:bodyPr wrap="square" lIns="0" tIns="0" rIns="0" bIns="0" rtlCol="0" anchor="ctr"/>
-          <a:lstStyle/>
-          <a:p>
-            <a:pPr indent="0" marL="0">
-              <a:buNone/>
-            </a:pPr>
-            <a:r>
-              <a:rPr lang="en-US" sz="1200" dirty="0">
+            <a:off x="8183880" y="4389120"/>
+            <a:ext cx="2926080" cy="685800"/>
+          </a:xfrm>
+          <a:prstGeom prst="rect">
+            <a:avLst/>
+          </a:prstGeom>
+          <a:noFill/>
+          <a:ln/>
+        </p:spPr>
+        <p:txBody>
+          <a:bodyPr wrap="square" lIns="0" tIns="0" rIns="0" bIns="0" rtlCol="0" anchor="ctr"/>
+          <a:lstStyle/>
+          <a:p>
+            <a:pPr indent="0" marL="0">
+              <a:buNone/>
+            </a:pPr>
+            <a:r>
+              <a:rPr lang="en-US" sz="1150" dirty="0">
                 <a:solidFill>
                   <a:srgbClr val="555B6E"/>
                 </a:solidFill>
@@ -11869,7 +13621,46 @@
                 <a:ea typeface="Calibri" pitchFamily="34" charset="-122"/>
                 <a:cs typeface="Calibri" pitchFamily="34" charset="-120"/>
               </a:rPr>
-              <a:t>Nadam optimizer, fixed seed</a:t>
+              <a:t>not epochs: fixed per-benchmark gradient-update budget for every strategy (DA3)</a:t>
+            </a:r>
+            <a:endParaRPr lang="en-US" sz="1150" dirty="0"/>
+          </a:p>
+        </p:txBody>
+      </p:sp>
+      <p:sp>
+        <p:nvSpPr>
+          <p:cNvPr id="32" name="Text 30"/>
+          <p:cNvSpPr txBox="1"/>
+          <p:nvPr/>
+        </p:nvSpPr>
+        <p:spPr>
+          <a:xfrm>
+            <a:off x="640080" y="5349240"/>
+            <a:ext cx="10972800" cy="731520"/>
+          </a:xfrm>
+          <a:prstGeom prst="rect">
+            <a:avLst/>
+          </a:prstGeom>
+          <a:noFill/>
+          <a:ln/>
+        </p:spPr>
+        <p:txBody>
+          <a:bodyPr wrap="square" lIns="0" tIns="0" rIns="0" bIns="0" rtlCol="0" anchor="ctr"/>
+          <a:lstStyle/>
+          <a:p>
+            <a:pPr indent="0" marL="0">
+              <a:buNone/>
+            </a:pPr>
+            <a:r>
+              <a:rPr lang="en-US" sz="1200" i="1" dirty="0">
+                <a:solidFill>
+                  <a:srgbClr val="555B6E"/>
+                </a:solidFill>
+                <a:latin typeface="Calibri" pitchFamily="34" charset="0"/>
+                <a:ea typeface="Calibri" pitchFamily="34" charset="-122"/>
+                <a:cs typeface="Calibri" pitchFamily="34" charset="-120"/>
+              </a:rPr>
+              <a:t>Same order of magnitude as the reference paper's custom CNN (12,873 params). A held-out validation split now selects the training checkpoint; the test split is touched exactly once per run.</a:t>
             </a:r>
             <a:endParaRPr lang="en-US" sz="1200" dirty="0"/>
           </a:p>
@@ -11877,45 +13668,6 @@
       </p:sp>
       <p:sp>
         <p:nvSpPr>
-          <p:cNvPr id="32" name="Text 30"/>
-          <p:cNvSpPr txBox="1"/>
-          <p:nvPr/>
-        </p:nvSpPr>
-        <p:spPr>
-          <a:xfrm>
-            <a:off x="640080" y="5440680"/>
-            <a:ext cx="10972800" cy="640080"/>
-          </a:xfrm>
-          <a:prstGeom prst="rect">
-            <a:avLst/>
-          </a:prstGeom>
-          <a:noFill/>
-          <a:ln/>
-        </p:spPr>
-        <p:txBody>
-          <a:bodyPr wrap="square" lIns="0" tIns="0" rIns="0" bIns="0" rtlCol="0" anchor="ctr"/>
-          <a:lstStyle/>
-          <a:p>
-            <a:pPr indent="0" marL="0">
-              <a:buNone/>
-            </a:pPr>
-            <a:r>
-              <a:rPr lang="en-US" sz="1200" i="1" dirty="0">
-                <a:solidFill>
-                  <a:srgbClr val="555B6E"/>
-                </a:solidFill>
-                <a:latin typeface="Calibri" pitchFamily="34" charset="0"/>
-                <a:ea typeface="Calibri" pitchFamily="34" charset="-122"/>
-                <a:cs typeface="Calibri" pitchFamily="34" charset="-120"/>
-              </a:rPr>
-              <a:t>Same order of magnitude as the reference paper's custom CNN (12,873 params) — rescaled from 224×224×3 to 64×64×1 so the full experiment grid is tractable on CPU.</a:t>
-            </a:r>
-            <a:endParaRPr lang="en-US" sz="1200" dirty="0"/>
-          </a:p>
-        </p:txBody>
-      </p:sp>
-      <p:sp>
-        <p:nvSpPr>
           <p:cNvPr id="33" name="Text 31"/>
           <p:cNvSpPr txBox="1"/>
           <p:nvPr/>
@@ -11923,7 +13675,7 @@
         <p:spPr>
           <a:xfrm>
             <a:off x="457200" y="6473952"/>
-            <a:ext cx="8229600" cy="274320"/>
+            <a:ext cx="9144000" cy="274320"/>
           </a:xfrm>
           <a:prstGeom prst="rect">
             <a:avLst/>
@@ -11947,7 +13699,7 @@
                 <a:ea typeface="Calibri" pitchFamily="34" charset="-122"/>
                 <a:cs typeface="Calibri" pitchFamily="34" charset="-120"/>
               </a:rPr>
-              <a:t>Group 11 · Data Balancing and Augmentation Strategies for Hotspot Detection</a:t>
+              <a:t>Group 11 (DA3 Revision) · Data Balancing and Augmentation Strategies for Hotspot Detection</a:t>
             </a:r>
             <a:endParaRPr lang="en-US" sz="900" dirty="0"/>
           </a:p>
@@ -12057,7 +13809,7 @@
                 <a:ea typeface="Cambria" pitchFamily="34" charset="-122"/>
                 <a:cs typeface="Cambria" pitchFamily="34" charset="-120"/>
               </a:rPr>
-              <a:t>Six Data Strategies, One Fair Comparison</a:t>
+              <a:t>Eight Data Strategies, One Fair Comparison</a:t>
             </a:r>
             <a:endParaRPr lang="en-US" sz="3000" dirty="0"/>
           </a:p>
@@ -12065,14 +13817,53 @@
       </p:sp>
       <p:sp>
         <p:nvSpPr>
-          <p:cNvPr id="3" name="Shape 1"/>
+          <p:cNvPr id="3" name="Text 1"/>
+          <p:cNvSpPr txBox="1"/>
+          <p:nvPr/>
+        </p:nvSpPr>
+        <p:spPr>
+          <a:xfrm>
+            <a:off x="548640" y="1005840"/>
+            <a:ext cx="11091672" cy="411480"/>
+          </a:xfrm>
+          <a:prstGeom prst="rect">
+            <a:avLst/>
+          </a:prstGeom>
+          <a:noFill/>
+          <a:ln/>
+        </p:spPr>
+        <p:txBody>
+          <a:bodyPr wrap="square" lIns="0" tIns="0" rIns="0" bIns="0" rtlCol="0" anchor="ctr"/>
+          <a:lstStyle/>
+          <a:p>
+            <a:pPr indent="0" marL="0">
+              <a:buNone/>
+            </a:pPr>
+            <a:r>
+              <a:rPr lang="en-US" sz="1500" dirty="0">
+                <a:solidFill>
+                  <a:srgbClr val="555B6E"/>
+                </a:solidFill>
+                <a:latin typeface="Calibri" pitchFamily="34" charset="0"/>
+                <a:ea typeface="Calibri" pitchFamily="34" charset="-122"/>
+                <a:cs typeface="Calibri" pitchFamily="34" charset="-120"/>
+              </a:rPr>
+              <a:t>Two new combined variants added in direct response to DA3 feedback</a:t>
+            </a:r>
+            <a:endParaRPr lang="en-US" sz="1500" dirty="0"/>
+          </a:p>
+        </p:txBody>
+      </p:sp>
+      <p:sp>
+        <p:nvSpPr>
+          <p:cNvPr id="4" name="Shape 2"/>
           <p:cNvSpPr/>
           <p:nvPr/>
         </p:nvSpPr>
         <p:spPr>
           <a:xfrm>
-            <a:off x="548640" y="1600200"/>
-            <a:ext cx="3611880" cy="1508760"/>
+            <a:off x="502920" y="1737360"/>
+            <a:ext cx="2697480" cy="1508760"/>
           </a:xfrm>
           <a:prstGeom prst="roundRect">
             <a:avLst>
@@ -12087,14 +13878,14 @@
       </p:sp>
       <p:sp>
         <p:nvSpPr>
-          <p:cNvPr id="4" name="Shape 2"/>
+          <p:cNvPr id="5" name="Shape 3"/>
           <p:cNvSpPr/>
           <p:nvPr/>
         </p:nvSpPr>
         <p:spPr>
           <a:xfrm>
-            <a:off x="731520" y="1783080"/>
-            <a:ext cx="502920" cy="502920"/>
+            <a:off x="667512" y="1901952"/>
+            <a:ext cx="457200" cy="457200"/>
           </a:xfrm>
           <a:prstGeom prst="ellipse">
             <a:avLst/>
@@ -12107,14 +13898,14 @@
       </p:sp>
       <p:sp>
         <p:nvSpPr>
-          <p:cNvPr id="5" name="Text 3"/>
-          <p:cNvSpPr txBox="1"/>
-          <p:nvPr/>
-        </p:nvSpPr>
-        <p:spPr>
-          <a:xfrm>
-            <a:off x="731520" y="1783080"/>
-            <a:ext cx="502920" cy="502920"/>
+          <p:cNvPr id="6" name="Text 4"/>
+          <p:cNvSpPr txBox="1"/>
+          <p:nvPr/>
+        </p:nvSpPr>
+        <p:spPr>
+          <a:xfrm>
+            <a:off x="667512" y="1901952"/>
+            <a:ext cx="457200" cy="457200"/>
           </a:xfrm>
           <a:prstGeom prst="rect">
             <a:avLst/>
@@ -12130,7 +13921,7 @@
               <a:buNone/>
             </a:pPr>
             <a:r>
-              <a:rPr lang="en-US" sz="1600" b="1" dirty="0">
+              <a:rPr lang="en-US" sz="1400" b="1" dirty="0">
                 <a:solidFill>
                   <a:srgbClr val="FFFFFF"/>
                 </a:solidFill>
@@ -12140,36 +13931,36 @@
               </a:rPr>
               <a:t>1</a:t>
             </a:r>
-            <a:endParaRPr lang="en-US" sz="1600" dirty="0"/>
-          </a:p>
-        </p:txBody>
-      </p:sp>
-      <p:sp>
-        <p:nvSpPr>
-          <p:cNvPr id="6" name="Text 4"/>
-          <p:cNvSpPr txBox="1"/>
-          <p:nvPr/>
-        </p:nvSpPr>
-        <p:spPr>
-          <a:xfrm>
-            <a:off x="1371600" y="1764792"/>
-            <a:ext cx="2606040" cy="502920"/>
-          </a:xfrm>
-          <a:prstGeom prst="rect">
-            <a:avLst/>
-          </a:prstGeom>
-          <a:noFill/>
-          <a:ln/>
-        </p:spPr>
-        <p:txBody>
-          <a:bodyPr wrap="square" lIns="0" tIns="0" rIns="0" bIns="0" rtlCol="0" anchor="ctr"/>
-          <a:lstStyle/>
-          <a:p>
-            <a:pPr indent="0" marL="0">
-              <a:buNone/>
-            </a:pPr>
-            <a:r>
-              <a:rPr lang="en-US" sz="1300" b="1" dirty="0">
+            <a:endParaRPr lang="en-US" sz="1400" dirty="0"/>
+          </a:p>
+        </p:txBody>
+      </p:sp>
+      <p:sp>
+        <p:nvSpPr>
+          <p:cNvPr id="7" name="Text 5"/>
+          <p:cNvSpPr txBox="1"/>
+          <p:nvPr/>
+        </p:nvSpPr>
+        <p:spPr>
+          <a:xfrm>
+            <a:off x="667512" y="2395728"/>
+            <a:ext cx="2368296" cy="457200"/>
+          </a:xfrm>
+          <a:prstGeom prst="rect">
+            <a:avLst/>
+          </a:prstGeom>
+          <a:noFill/>
+          <a:ln/>
+        </p:spPr>
+        <p:txBody>
+          <a:bodyPr wrap="square" lIns="0" tIns="0" rIns="0" bIns="0" rtlCol="0" anchor="ctr"/>
+          <a:lstStyle/>
+          <a:p>
+            <a:pPr indent="0" marL="0">
+              <a:buNone/>
+            </a:pPr>
+            <a:r>
+              <a:rPr lang="en-US" sz="1150" b="1" dirty="0">
                 <a:solidFill>
                   <a:srgbClr val="1E2761"/>
                 </a:solidFill>
@@ -12179,36 +13970,36 @@
               </a:rPr>
               <a:t>Baseline</a:t>
             </a:r>
-            <a:endParaRPr lang="en-US" sz="1300" dirty="0"/>
-          </a:p>
-        </p:txBody>
-      </p:sp>
-      <p:sp>
-        <p:nvSpPr>
-          <p:cNvPr id="7" name="Text 5"/>
-          <p:cNvSpPr txBox="1"/>
-          <p:nvPr/>
-        </p:nvSpPr>
-        <p:spPr>
-          <a:xfrm>
-            <a:off x="731520" y="2377440"/>
-            <a:ext cx="3246120" cy="658368"/>
-          </a:xfrm>
-          <a:prstGeom prst="rect">
-            <a:avLst/>
-          </a:prstGeom>
-          <a:noFill/>
-          <a:ln/>
-        </p:spPr>
-        <p:txBody>
-          <a:bodyPr wrap="square" lIns="0" tIns="0" rIns="0" bIns="0" rtlCol="0" anchor="ctr"/>
-          <a:lstStyle/>
-          <a:p>
-            <a:pPr indent="0" marL="0">
-              <a:buNone/>
-            </a:pPr>
-            <a:r>
-              <a:rPr lang="en-US" sz="1050" dirty="0">
+            <a:endParaRPr lang="en-US" sz="1150" dirty="0"/>
+          </a:p>
+        </p:txBody>
+      </p:sp>
+      <p:sp>
+        <p:nvSpPr>
+          <p:cNvPr id="8" name="Text 6"/>
+          <p:cNvSpPr txBox="1"/>
+          <p:nvPr/>
+        </p:nvSpPr>
+        <p:spPr>
+          <a:xfrm>
+            <a:off x="667512" y="2816352"/>
+            <a:ext cx="2368296" cy="384048"/>
+          </a:xfrm>
+          <a:prstGeom prst="rect">
+            <a:avLst/>
+          </a:prstGeom>
+          <a:noFill/>
+          <a:ln/>
+        </p:spPr>
+        <p:txBody>
+          <a:bodyPr wrap="square" lIns="0" tIns="0" rIns="0" bIns="0" rtlCol="0" anchor="ctr"/>
+          <a:lstStyle/>
+          <a:p>
+            <a:pPr indent="0" marL="0">
+              <a:buNone/>
+            </a:pPr>
+            <a:r>
+              <a:rPr lang="en-US" sz="950" dirty="0">
                 <a:solidFill>
                   <a:srgbClr val="555B6E"/>
                 </a:solidFill>
@@ -12216,22 +14007,22 @@
                 <a:ea typeface="Calibri" pitchFamily="34" charset="-122"/>
                 <a:cs typeface="Calibri" pitchFamily="34" charset="-120"/>
               </a:rPr>
-              <a:t>Natural imbalance, no intervention — the reference point</a:t>
-            </a:r>
-            <a:endParaRPr lang="en-US" sz="1050" dirty="0"/>
-          </a:p>
-        </p:txBody>
-      </p:sp>
-      <p:sp>
-        <p:nvSpPr>
-          <p:cNvPr id="8" name="Shape 6"/>
+              <a:t>Natural imbalance, no intervention</a:t>
+            </a:r>
+            <a:endParaRPr lang="en-US" sz="950" dirty="0"/>
+          </a:p>
+        </p:txBody>
+      </p:sp>
+      <p:sp>
+        <p:nvSpPr>
+          <p:cNvPr id="9" name="Shape 7"/>
           <p:cNvSpPr/>
           <p:nvPr/>
         </p:nvSpPr>
         <p:spPr>
           <a:xfrm>
-            <a:off x="4343400" y="1600200"/>
-            <a:ext cx="3611880" cy="1508760"/>
+            <a:off x="3364992" y="1737360"/>
+            <a:ext cx="2697480" cy="1508760"/>
           </a:xfrm>
           <a:prstGeom prst="roundRect">
             <a:avLst>
@@ -12246,14 +14037,14 @@
       </p:sp>
       <p:sp>
         <p:nvSpPr>
-          <p:cNvPr id="9" name="Shape 7"/>
+          <p:cNvPr id="10" name="Shape 8"/>
           <p:cNvSpPr/>
           <p:nvPr/>
         </p:nvSpPr>
         <p:spPr>
           <a:xfrm>
-            <a:off x="4526280" y="1783080"/>
-            <a:ext cx="502920" cy="502920"/>
+            <a:off x="3529584" y="1901952"/>
+            <a:ext cx="457200" cy="457200"/>
           </a:xfrm>
           <a:prstGeom prst="ellipse">
             <a:avLst/>
@@ -12266,14 +14057,14 @@
       </p:sp>
       <p:sp>
         <p:nvSpPr>
-          <p:cNvPr id="10" name="Text 8"/>
-          <p:cNvSpPr txBox="1"/>
-          <p:nvPr/>
-        </p:nvSpPr>
-        <p:spPr>
-          <a:xfrm>
-            <a:off x="4526280" y="1783080"/>
-            <a:ext cx="502920" cy="502920"/>
+          <p:cNvPr id="11" name="Text 9"/>
+          <p:cNvSpPr txBox="1"/>
+          <p:nvPr/>
+        </p:nvSpPr>
+        <p:spPr>
+          <a:xfrm>
+            <a:off x="3529584" y="1901952"/>
+            <a:ext cx="457200" cy="457200"/>
           </a:xfrm>
           <a:prstGeom prst="rect">
             <a:avLst/>
@@ -12289,7 +14080,7 @@
               <a:buNone/>
             </a:pPr>
             <a:r>
-              <a:rPr lang="en-US" sz="1600" b="1" dirty="0">
+              <a:rPr lang="en-US" sz="1400" b="1" dirty="0">
                 <a:solidFill>
                   <a:srgbClr val="FFFFFF"/>
                 </a:solidFill>
@@ -12299,36 +14090,36 @@
               </a:rPr>
               <a:t>2</a:t>
             </a:r>
-            <a:endParaRPr lang="en-US" sz="1600" dirty="0"/>
-          </a:p>
-        </p:txBody>
-      </p:sp>
-      <p:sp>
-        <p:nvSpPr>
-          <p:cNvPr id="11" name="Text 9"/>
-          <p:cNvSpPr txBox="1"/>
-          <p:nvPr/>
-        </p:nvSpPr>
-        <p:spPr>
-          <a:xfrm>
-            <a:off x="5166360" y="1764792"/>
-            <a:ext cx="2606040" cy="502920"/>
-          </a:xfrm>
-          <a:prstGeom prst="rect">
-            <a:avLst/>
-          </a:prstGeom>
-          <a:noFill/>
-          <a:ln/>
-        </p:spPr>
-        <p:txBody>
-          <a:bodyPr wrap="square" lIns="0" tIns="0" rIns="0" bIns="0" rtlCol="0" anchor="ctr"/>
-          <a:lstStyle/>
-          <a:p>
-            <a:pPr indent="0" marL="0">
-              <a:buNone/>
-            </a:pPr>
-            <a:r>
-              <a:rPr lang="en-US" sz="1300" b="1" dirty="0">
+            <a:endParaRPr lang="en-US" sz="1400" dirty="0"/>
+          </a:p>
+        </p:txBody>
+      </p:sp>
+      <p:sp>
+        <p:nvSpPr>
+          <p:cNvPr id="12" name="Text 10"/>
+          <p:cNvSpPr txBox="1"/>
+          <p:nvPr/>
+        </p:nvSpPr>
+        <p:spPr>
+          <a:xfrm>
+            <a:off x="3529584" y="2395728"/>
+            <a:ext cx="2368296" cy="457200"/>
+          </a:xfrm>
+          <a:prstGeom prst="rect">
+            <a:avLst/>
+          </a:prstGeom>
+          <a:noFill/>
+          <a:ln/>
+        </p:spPr>
+        <p:txBody>
+          <a:bodyPr wrap="square" lIns="0" tIns="0" rIns="0" bIns="0" rtlCol="0" anchor="ctr"/>
+          <a:lstStyle/>
+          <a:p>
+            <a:pPr indent="0" marL="0">
+              <a:buNone/>
+            </a:pPr>
+            <a:r>
+              <a:rPr lang="en-US" sz="1150" b="1" dirty="0">
                 <a:solidFill>
                   <a:srgbClr val="1E2761"/>
                 </a:solidFill>
@@ -12338,36 +14129,36 @@
               </a:rPr>
               <a:t>Random Undersampling</a:t>
             </a:r>
-            <a:endParaRPr lang="en-US" sz="1300" dirty="0"/>
-          </a:p>
-        </p:txBody>
-      </p:sp>
-      <p:sp>
-        <p:nvSpPr>
-          <p:cNvPr id="12" name="Text 10"/>
-          <p:cNvSpPr txBox="1"/>
-          <p:nvPr/>
-        </p:nvSpPr>
-        <p:spPr>
-          <a:xfrm>
-            <a:off x="4526280" y="2377440"/>
-            <a:ext cx="3246120" cy="658368"/>
-          </a:xfrm>
-          <a:prstGeom prst="rect">
-            <a:avLst/>
-          </a:prstGeom>
-          <a:noFill/>
-          <a:ln/>
-        </p:spPr>
-        <p:txBody>
-          <a:bodyPr wrap="square" lIns="0" tIns="0" rIns="0" bIns="0" rtlCol="0" anchor="ctr"/>
-          <a:lstStyle/>
-          <a:p>
-            <a:pPr indent="0" marL="0">
-              <a:buNone/>
-            </a:pPr>
-            <a:r>
-              <a:rPr lang="en-US" sz="1050" dirty="0">
+            <a:endParaRPr lang="en-US" sz="1150" dirty="0"/>
+          </a:p>
+        </p:txBody>
+      </p:sp>
+      <p:sp>
+        <p:nvSpPr>
+          <p:cNvPr id="13" name="Text 11"/>
+          <p:cNvSpPr txBox="1"/>
+          <p:nvPr/>
+        </p:nvSpPr>
+        <p:spPr>
+          <a:xfrm>
+            <a:off x="3529584" y="2816352"/>
+            <a:ext cx="2368296" cy="384048"/>
+          </a:xfrm>
+          <a:prstGeom prst="rect">
+            <a:avLst/>
+          </a:prstGeom>
+          <a:noFill/>
+          <a:ln/>
+        </p:spPr>
+        <p:txBody>
+          <a:bodyPr wrap="square" lIns="0" tIns="0" rIns="0" bIns="0" rtlCol="0" anchor="ctr"/>
+          <a:lstStyle/>
+          <a:p>
+            <a:pPr indent="0" marL="0">
+              <a:buNone/>
+            </a:pPr>
+            <a:r>
+              <a:rPr lang="en-US" sz="950" dirty="0">
                 <a:solidFill>
                   <a:srgbClr val="555B6E"/>
                 </a:solidFill>
@@ -12375,22 +14166,22 @@
                 <a:ea typeface="Calibri" pitchFamily="34" charset="-122"/>
                 <a:cs typeface="Calibri" pitchFamily="34" charset="-120"/>
               </a:rPr>
-              <a:t>Discard majority (NHS) samples down to target ratio</a:t>
-            </a:r>
-            <a:endParaRPr lang="en-US" sz="1050" dirty="0"/>
-          </a:p>
-        </p:txBody>
-      </p:sp>
-      <p:sp>
-        <p:nvSpPr>
-          <p:cNvPr id="13" name="Shape 11"/>
+              <a:t>Discard majority (NHS) samples</a:t>
+            </a:r>
+            <a:endParaRPr lang="en-US" sz="950" dirty="0"/>
+          </a:p>
+        </p:txBody>
+      </p:sp>
+      <p:sp>
+        <p:nvSpPr>
+          <p:cNvPr id="14" name="Shape 12"/>
           <p:cNvSpPr/>
           <p:nvPr/>
         </p:nvSpPr>
         <p:spPr>
           <a:xfrm>
-            <a:off x="8138160" y="1600200"/>
-            <a:ext cx="3611880" cy="1508760"/>
+            <a:off x="6227064" y="1737360"/>
+            <a:ext cx="2697480" cy="1508760"/>
           </a:xfrm>
           <a:prstGeom prst="roundRect">
             <a:avLst>
@@ -12405,14 +14196,14 @@
       </p:sp>
       <p:sp>
         <p:nvSpPr>
-          <p:cNvPr id="14" name="Shape 12"/>
+          <p:cNvPr id="15" name="Shape 13"/>
           <p:cNvSpPr/>
           <p:nvPr/>
         </p:nvSpPr>
         <p:spPr>
           <a:xfrm>
-            <a:off x="8321040" y="1783080"/>
-            <a:ext cx="502920" cy="502920"/>
+            <a:off x="6391656" y="1901952"/>
+            <a:ext cx="457200" cy="457200"/>
           </a:xfrm>
           <a:prstGeom prst="ellipse">
             <a:avLst/>
@@ -12425,14 +14216,14 @@
       </p:sp>
       <p:sp>
         <p:nvSpPr>
-          <p:cNvPr id="15" name="Text 13"/>
-          <p:cNvSpPr txBox="1"/>
-          <p:nvPr/>
-        </p:nvSpPr>
-        <p:spPr>
-          <a:xfrm>
-            <a:off x="8321040" y="1783080"/>
-            <a:ext cx="502920" cy="502920"/>
+          <p:cNvPr id="16" name="Text 14"/>
+          <p:cNvSpPr txBox="1"/>
+          <p:nvPr/>
+        </p:nvSpPr>
+        <p:spPr>
+          <a:xfrm>
+            <a:off x="6391656" y="1901952"/>
+            <a:ext cx="457200" cy="457200"/>
           </a:xfrm>
           <a:prstGeom prst="rect">
             <a:avLst/>
@@ -12448,7 +14239,7 @@
               <a:buNone/>
             </a:pPr>
             <a:r>
-              <a:rPr lang="en-US" sz="1600" b="1" dirty="0">
+              <a:rPr lang="en-US" sz="1400" b="1" dirty="0">
                 <a:solidFill>
                   <a:srgbClr val="FFFFFF"/>
                 </a:solidFill>
@@ -12458,36 +14249,36 @@
               </a:rPr>
               <a:t>3</a:t>
             </a:r>
-            <a:endParaRPr lang="en-US" sz="1600" dirty="0"/>
-          </a:p>
-        </p:txBody>
-      </p:sp>
-      <p:sp>
-        <p:nvSpPr>
-          <p:cNvPr id="16" name="Text 14"/>
-          <p:cNvSpPr txBox="1"/>
-          <p:nvPr/>
-        </p:nvSpPr>
-        <p:spPr>
-          <a:xfrm>
-            <a:off x="8961120" y="1764792"/>
-            <a:ext cx="2606040" cy="502920"/>
-          </a:xfrm>
-          <a:prstGeom prst="rect">
-            <a:avLst/>
-          </a:prstGeom>
-          <a:noFill/>
-          <a:ln/>
-        </p:spPr>
-        <p:txBody>
-          <a:bodyPr wrap="square" lIns="0" tIns="0" rIns="0" bIns="0" rtlCol="0" anchor="ctr"/>
-          <a:lstStyle/>
-          <a:p>
-            <a:pPr indent="0" marL="0">
-              <a:buNone/>
-            </a:pPr>
-            <a:r>
-              <a:rPr lang="en-US" sz="1300" b="1" dirty="0">
+            <a:endParaRPr lang="en-US" sz="1400" dirty="0"/>
+          </a:p>
+        </p:txBody>
+      </p:sp>
+      <p:sp>
+        <p:nvSpPr>
+          <p:cNvPr id="17" name="Text 15"/>
+          <p:cNvSpPr txBox="1"/>
+          <p:nvPr/>
+        </p:nvSpPr>
+        <p:spPr>
+          <a:xfrm>
+            <a:off x="6391656" y="2395728"/>
+            <a:ext cx="2368296" cy="457200"/>
+          </a:xfrm>
+          <a:prstGeom prst="rect">
+            <a:avLst/>
+          </a:prstGeom>
+          <a:noFill/>
+          <a:ln/>
+        </p:spPr>
+        <p:txBody>
+          <a:bodyPr wrap="square" lIns="0" tIns="0" rIns="0" bIns="0" rtlCol="0" anchor="ctr"/>
+          <a:lstStyle/>
+          <a:p>
+            <a:pPr indent="0" marL="0">
+              <a:buNone/>
+            </a:pPr>
+            <a:r>
+              <a:rPr lang="en-US" sz="1150" b="1" dirty="0">
                 <a:solidFill>
                   <a:srgbClr val="1E2761"/>
                 </a:solidFill>
@@ -12497,36 +14288,36 @@
               </a:rPr>
               <a:t>Random Oversampling</a:t>
             </a:r>
-            <a:endParaRPr lang="en-US" sz="1300" dirty="0"/>
-          </a:p>
-        </p:txBody>
-      </p:sp>
-      <p:sp>
-        <p:nvSpPr>
-          <p:cNvPr id="17" name="Text 15"/>
-          <p:cNvSpPr txBox="1"/>
-          <p:nvPr/>
-        </p:nvSpPr>
-        <p:spPr>
-          <a:xfrm>
-            <a:off x="8321040" y="2377440"/>
-            <a:ext cx="3246120" cy="658368"/>
-          </a:xfrm>
-          <a:prstGeom prst="rect">
-            <a:avLst/>
-          </a:prstGeom>
-          <a:noFill/>
-          <a:ln/>
-        </p:spPr>
-        <p:txBody>
-          <a:bodyPr wrap="square" lIns="0" tIns="0" rIns="0" bIns="0" rtlCol="0" anchor="ctr"/>
-          <a:lstStyle/>
-          <a:p>
-            <a:pPr indent="0" marL="0">
-              <a:buNone/>
-            </a:pPr>
-            <a:r>
-              <a:rPr lang="en-US" sz="1050" dirty="0">
+            <a:endParaRPr lang="en-US" sz="1150" dirty="0"/>
+          </a:p>
+        </p:txBody>
+      </p:sp>
+      <p:sp>
+        <p:nvSpPr>
+          <p:cNvPr id="18" name="Text 16"/>
+          <p:cNvSpPr txBox="1"/>
+          <p:nvPr/>
+        </p:nvSpPr>
+        <p:spPr>
+          <a:xfrm>
+            <a:off x="6391656" y="2816352"/>
+            <a:ext cx="2368296" cy="384048"/>
+          </a:xfrm>
+          <a:prstGeom prst="rect">
+            <a:avLst/>
+          </a:prstGeom>
+          <a:noFill/>
+          <a:ln/>
+        </p:spPr>
+        <p:txBody>
+          <a:bodyPr wrap="square" lIns="0" tIns="0" rIns="0" bIns="0" rtlCol="0" anchor="ctr"/>
+          <a:lstStyle/>
+          <a:p>
+            <a:pPr indent="0" marL="0">
+              <a:buNone/>
+            </a:pPr>
+            <a:r>
+              <a:rPr lang="en-US" sz="950" dirty="0">
                 <a:solidFill>
                   <a:srgbClr val="555B6E"/>
                 </a:solidFill>
@@ -12534,22 +14325,22 @@
                 <a:ea typeface="Calibri" pitchFamily="34" charset="-122"/>
                 <a:cs typeface="Calibri" pitchFamily="34" charset="-120"/>
               </a:rPr>
-              <a:t>Duplicate minority (HS) samples up to target ratio</a:t>
-            </a:r>
-            <a:endParaRPr lang="en-US" sz="1050" dirty="0"/>
-          </a:p>
-        </p:txBody>
-      </p:sp>
-      <p:sp>
-        <p:nvSpPr>
-          <p:cNvPr id="18" name="Shape 16"/>
+              <a:t>Duplicate minority (HS) samples</a:t>
+            </a:r>
+            <a:endParaRPr lang="en-US" sz="950" dirty="0"/>
+          </a:p>
+        </p:txBody>
+      </p:sp>
+      <p:sp>
+        <p:nvSpPr>
+          <p:cNvPr id="19" name="Shape 17"/>
           <p:cNvSpPr/>
           <p:nvPr/>
         </p:nvSpPr>
         <p:spPr>
           <a:xfrm>
-            <a:off x="548640" y="3291840"/>
-            <a:ext cx="3611880" cy="1508760"/>
+            <a:off x="9089136" y="1737360"/>
+            <a:ext cx="2697480" cy="1508760"/>
           </a:xfrm>
           <a:prstGeom prst="roundRect">
             <a:avLst>
@@ -12564,14 +14355,14 @@
       </p:sp>
       <p:sp>
         <p:nvSpPr>
-          <p:cNvPr id="19" name="Shape 17"/>
+          <p:cNvPr id="20" name="Shape 18"/>
           <p:cNvSpPr/>
           <p:nvPr/>
         </p:nvSpPr>
         <p:spPr>
           <a:xfrm>
-            <a:off x="731520" y="3474720"/>
-            <a:ext cx="502920" cy="502920"/>
+            <a:off x="9253728" y="1901952"/>
+            <a:ext cx="457200" cy="457200"/>
           </a:xfrm>
           <a:prstGeom prst="ellipse">
             <a:avLst/>
@@ -12584,14 +14375,14 @@
       </p:sp>
       <p:sp>
         <p:nvSpPr>
-          <p:cNvPr id="20" name="Text 18"/>
-          <p:cNvSpPr txBox="1"/>
-          <p:nvPr/>
-        </p:nvSpPr>
-        <p:spPr>
-          <a:xfrm>
-            <a:off x="731520" y="3474720"/>
-            <a:ext cx="502920" cy="502920"/>
+          <p:cNvPr id="21" name="Text 19"/>
+          <p:cNvSpPr txBox="1"/>
+          <p:nvPr/>
+        </p:nvSpPr>
+        <p:spPr>
+          <a:xfrm>
+            <a:off x="9253728" y="1901952"/>
+            <a:ext cx="457200" cy="457200"/>
           </a:xfrm>
           <a:prstGeom prst="rect">
             <a:avLst/>
@@ -12607,7 +14398,7 @@
               <a:buNone/>
             </a:pPr>
             <a:r>
-              <a:rPr lang="en-US" sz="1600" b="1" dirty="0">
+              <a:rPr lang="en-US" sz="1400" b="1" dirty="0">
                 <a:solidFill>
                   <a:srgbClr val="FFFFFF"/>
                 </a:solidFill>
@@ -12617,36 +14408,36 @@
               </a:rPr>
               <a:t>4</a:t>
             </a:r>
-            <a:endParaRPr lang="en-US" sz="1600" dirty="0"/>
-          </a:p>
-        </p:txBody>
-      </p:sp>
-      <p:sp>
-        <p:nvSpPr>
-          <p:cNvPr id="21" name="Text 19"/>
-          <p:cNvSpPr txBox="1"/>
-          <p:nvPr/>
-        </p:nvSpPr>
-        <p:spPr>
-          <a:xfrm>
-            <a:off x="1371600" y="3456432"/>
-            <a:ext cx="2606040" cy="502920"/>
-          </a:xfrm>
-          <a:prstGeom prst="rect">
-            <a:avLst/>
-          </a:prstGeom>
-          <a:noFill/>
-          <a:ln/>
-        </p:spPr>
-        <p:txBody>
-          <a:bodyPr wrap="square" lIns="0" tIns="0" rIns="0" bIns="0" rtlCol="0" anchor="ctr"/>
-          <a:lstStyle/>
-          <a:p>
-            <a:pPr indent="0" marL="0">
-              <a:buNone/>
-            </a:pPr>
-            <a:r>
-              <a:rPr lang="en-US" sz="1300" b="1" dirty="0">
+            <a:endParaRPr lang="en-US" sz="1400" dirty="0"/>
+          </a:p>
+        </p:txBody>
+      </p:sp>
+      <p:sp>
+        <p:nvSpPr>
+          <p:cNvPr id="22" name="Text 20"/>
+          <p:cNvSpPr txBox="1"/>
+          <p:nvPr/>
+        </p:nvSpPr>
+        <p:spPr>
+          <a:xfrm>
+            <a:off x="9253728" y="2395728"/>
+            <a:ext cx="2368296" cy="457200"/>
+          </a:xfrm>
+          <a:prstGeom prst="rect">
+            <a:avLst/>
+          </a:prstGeom>
+          <a:noFill/>
+          <a:ln/>
+        </p:spPr>
+        <p:txBody>
+          <a:bodyPr wrap="square" lIns="0" tIns="0" rIns="0" bIns="0" rtlCol="0" anchor="ctr"/>
+          <a:lstStyle/>
+          <a:p>
+            <a:pPr indent="0" marL="0">
+              <a:buNone/>
+            </a:pPr>
+            <a:r>
+              <a:rPr lang="en-US" sz="1150" b="1" dirty="0">
                 <a:solidFill>
                   <a:srgbClr val="1E2761"/>
                 </a:solidFill>
@@ -12654,38 +14445,38 @@
                 <a:ea typeface="Calibri" pitchFamily="34" charset="-122"/>
                 <a:cs typeface="Calibri" pitchFamily="34" charset="-120"/>
               </a:rPr>
-              <a:t>Oversampling + Augmentation</a:t>
-            </a:r>
-            <a:endParaRPr lang="en-US" sz="1300" dirty="0"/>
-          </a:p>
-        </p:txBody>
-      </p:sp>
-      <p:sp>
-        <p:nvSpPr>
-          <p:cNvPr id="22" name="Text 20"/>
-          <p:cNvSpPr txBox="1"/>
-          <p:nvPr/>
-        </p:nvSpPr>
-        <p:spPr>
-          <a:xfrm>
-            <a:off x="731520" y="4069080"/>
-            <a:ext cx="3246120" cy="658368"/>
-          </a:xfrm>
-          <a:prstGeom prst="rect">
-            <a:avLst/>
-          </a:prstGeom>
-          <a:noFill/>
-          <a:ln/>
-        </p:spPr>
-        <p:txBody>
-          <a:bodyPr wrap="square" lIns="0" tIns="0" rIns="0" bIns="0" rtlCol="0" anchor="ctr"/>
-          <a:lstStyle/>
-          <a:p>
-            <a:pPr indent="0" marL="0">
-              <a:buNone/>
-            </a:pPr>
-            <a:r>
-              <a:rPr lang="en-US" sz="1050" dirty="0">
+              <a:t>Oversampling + Aug.</a:t>
+            </a:r>
+            <a:endParaRPr lang="en-US" sz="1150" dirty="0"/>
+          </a:p>
+        </p:txBody>
+      </p:sp>
+      <p:sp>
+        <p:nvSpPr>
+          <p:cNvPr id="23" name="Text 21"/>
+          <p:cNvSpPr txBox="1"/>
+          <p:nvPr/>
+        </p:nvSpPr>
+        <p:spPr>
+          <a:xfrm>
+            <a:off x="9253728" y="2816352"/>
+            <a:ext cx="2368296" cy="384048"/>
+          </a:xfrm>
+          <a:prstGeom prst="rect">
+            <a:avLst/>
+          </a:prstGeom>
+          <a:noFill/>
+          <a:ln/>
+        </p:spPr>
+        <p:txBody>
+          <a:bodyPr wrap="square" lIns="0" tIns="0" rIns="0" bIns="0" rtlCol="0" anchor="ctr"/>
+          <a:lstStyle/>
+          <a:p>
+            <a:pPr indent="0" marL="0">
+              <a:buNone/>
+            </a:pPr>
+            <a:r>
+              <a:rPr lang="en-US" sz="950" dirty="0">
                 <a:solidFill>
                   <a:srgbClr val="555B6E"/>
                 </a:solidFill>
@@ -12693,22 +14484,22 @@
                 <a:ea typeface="Calibri" pitchFamily="34" charset="-122"/>
                 <a:cs typeface="Calibri" pitchFamily="34" charset="-120"/>
               </a:rPr>
-              <a:t>Duplicate + flip/rotate HS so copies aren't pixel-identical</a:t>
-            </a:r>
-            <a:endParaRPr lang="en-US" sz="1050" dirty="0"/>
-          </a:p>
-        </p:txBody>
-      </p:sp>
-      <p:sp>
-        <p:nvSpPr>
-          <p:cNvPr id="23" name="Shape 21"/>
+              <a:t>Duplicate + flip/rotate HS</a:t>
+            </a:r>
+            <a:endParaRPr lang="en-US" sz="950" dirty="0"/>
+          </a:p>
+        </p:txBody>
+      </p:sp>
+      <p:sp>
+        <p:nvSpPr>
+          <p:cNvPr id="24" name="Shape 22"/>
           <p:cNvSpPr/>
           <p:nvPr/>
         </p:nvSpPr>
         <p:spPr>
           <a:xfrm>
-            <a:off x="4343400" y="3291840"/>
-            <a:ext cx="3611880" cy="1508760"/>
+            <a:off x="502920" y="3429000"/>
+            <a:ext cx="2697480" cy="1508760"/>
           </a:xfrm>
           <a:prstGeom prst="roundRect">
             <a:avLst>
@@ -12723,14 +14514,14 @@
       </p:sp>
       <p:sp>
         <p:nvSpPr>
-          <p:cNvPr id="24" name="Shape 22"/>
+          <p:cNvPr id="25" name="Shape 23"/>
           <p:cNvSpPr/>
           <p:nvPr/>
         </p:nvSpPr>
         <p:spPr>
           <a:xfrm>
-            <a:off x="4526280" y="3474720"/>
-            <a:ext cx="502920" cy="502920"/>
+            <a:off x="667512" y="3593592"/>
+            <a:ext cx="457200" cy="457200"/>
           </a:xfrm>
           <a:prstGeom prst="ellipse">
             <a:avLst/>
@@ -12743,14 +14534,14 @@
       </p:sp>
       <p:sp>
         <p:nvSpPr>
-          <p:cNvPr id="25" name="Text 23"/>
-          <p:cNvSpPr txBox="1"/>
-          <p:nvPr/>
-        </p:nvSpPr>
-        <p:spPr>
-          <a:xfrm>
-            <a:off x="4526280" y="3474720"/>
-            <a:ext cx="502920" cy="502920"/>
+          <p:cNvPr id="26" name="Text 24"/>
+          <p:cNvSpPr txBox="1"/>
+          <p:nvPr/>
+        </p:nvSpPr>
+        <p:spPr>
+          <a:xfrm>
+            <a:off x="667512" y="3593592"/>
+            <a:ext cx="457200" cy="457200"/>
           </a:xfrm>
           <a:prstGeom prst="rect">
             <a:avLst/>
@@ -12766,7 +14557,7 @@
               <a:buNone/>
             </a:pPr>
             <a:r>
-              <a:rPr lang="en-US" sz="1600" b="1" dirty="0">
+              <a:rPr lang="en-US" sz="1400" b="1" dirty="0">
                 <a:solidFill>
                   <a:srgbClr val="FFFFFF"/>
                 </a:solidFill>
@@ -12776,36 +14567,36 @@
               </a:rPr>
               <a:t>5</a:t>
             </a:r>
-            <a:endParaRPr lang="en-US" sz="1600" dirty="0"/>
-          </a:p>
-        </p:txBody>
-      </p:sp>
-      <p:sp>
-        <p:nvSpPr>
-          <p:cNvPr id="26" name="Text 24"/>
-          <p:cNvSpPr txBox="1"/>
-          <p:nvPr/>
-        </p:nvSpPr>
-        <p:spPr>
-          <a:xfrm>
-            <a:off x="5166360" y="3456432"/>
-            <a:ext cx="2606040" cy="502920"/>
-          </a:xfrm>
-          <a:prstGeom prst="rect">
-            <a:avLst/>
-          </a:prstGeom>
-          <a:noFill/>
-          <a:ln/>
-        </p:spPr>
-        <p:txBody>
-          <a:bodyPr wrap="square" lIns="0" tIns="0" rIns="0" bIns="0" rtlCol="0" anchor="ctr"/>
-          <a:lstStyle/>
-          <a:p>
-            <a:pPr indent="0" marL="0">
-              <a:buNone/>
-            </a:pPr>
-            <a:r>
-              <a:rPr lang="en-US" sz="1300" b="1" dirty="0">
+            <a:endParaRPr lang="en-US" sz="1400" dirty="0"/>
+          </a:p>
+        </p:txBody>
+      </p:sp>
+      <p:sp>
+        <p:nvSpPr>
+          <p:cNvPr id="27" name="Text 25"/>
+          <p:cNvSpPr txBox="1"/>
+          <p:nvPr/>
+        </p:nvSpPr>
+        <p:spPr>
+          <a:xfrm>
+            <a:off x="667512" y="4087368"/>
+            <a:ext cx="2368296" cy="457200"/>
+          </a:xfrm>
+          <a:prstGeom prst="rect">
+            <a:avLst/>
+          </a:prstGeom>
+          <a:noFill/>
+          <a:ln/>
+        </p:spPr>
+        <p:txBody>
+          <a:bodyPr wrap="square" lIns="0" tIns="0" rIns="0" bIns="0" rtlCol="0" anchor="ctr"/>
+          <a:lstStyle/>
+          <a:p>
+            <a:pPr indent="0" marL="0">
+              <a:buNone/>
+            </a:pPr>
+            <a:r>
+              <a:rPr lang="en-US" sz="1150" b="1" dirty="0">
                 <a:solidFill>
                   <a:srgbClr val="1E2761"/>
                 </a:solidFill>
@@ -12815,36 +14606,36 @@
               </a:rPr>
               <a:t>Balanced Mini-Batch</a:t>
             </a:r>
-            <a:endParaRPr lang="en-US" sz="1300" dirty="0"/>
-          </a:p>
-        </p:txBody>
-      </p:sp>
-      <p:sp>
-        <p:nvSpPr>
-          <p:cNvPr id="27" name="Text 25"/>
-          <p:cNvSpPr txBox="1"/>
-          <p:nvPr/>
-        </p:nvSpPr>
-        <p:spPr>
-          <a:xfrm>
-            <a:off x="4526280" y="4069080"/>
-            <a:ext cx="3246120" cy="658368"/>
-          </a:xfrm>
-          <a:prstGeom prst="rect">
-            <a:avLst/>
-          </a:prstGeom>
-          <a:noFill/>
-          <a:ln/>
-        </p:spPr>
-        <p:txBody>
-          <a:bodyPr wrap="square" lIns="0" tIns="0" rIns="0" bIns="0" rtlCol="0" anchor="ctr"/>
-          <a:lstStyle/>
-          <a:p>
-            <a:pPr indent="0" marL="0">
-              <a:buNone/>
-            </a:pPr>
-            <a:r>
-              <a:rPr lang="en-US" sz="1050" dirty="0">
+            <a:endParaRPr lang="en-US" sz="1150" dirty="0"/>
+          </a:p>
+        </p:txBody>
+      </p:sp>
+      <p:sp>
+        <p:nvSpPr>
+          <p:cNvPr id="28" name="Text 26"/>
+          <p:cNvSpPr txBox="1"/>
+          <p:nvPr/>
+        </p:nvSpPr>
+        <p:spPr>
+          <a:xfrm>
+            <a:off x="667512" y="4507992"/>
+            <a:ext cx="2368296" cy="384048"/>
+          </a:xfrm>
+          <a:prstGeom prst="rect">
+            <a:avLst/>
+          </a:prstGeom>
+          <a:noFill/>
+          <a:ln/>
+        </p:spPr>
+        <p:txBody>
+          <a:bodyPr wrap="square" lIns="0" tIns="0" rIns="0" bIns="0" rtlCol="0" anchor="ctr"/>
+          <a:lstStyle/>
+          <a:p>
+            <a:pPr indent="0" marL="0">
+              <a:buNone/>
+            </a:pPr>
+            <a:r>
+              <a:rPr lang="en-US" sz="950" dirty="0">
                 <a:solidFill>
                   <a:srgbClr val="555B6E"/>
                 </a:solidFill>
@@ -12852,22 +14643,22 @@
                 <a:ea typeface="Calibri" pitchFamily="34" charset="-122"/>
                 <a:cs typeface="Calibri" pitchFamily="34" charset="-120"/>
               </a:rPr>
-              <a:t>Dataset untouched; sampler forces ~50:50 HS:NHS per batch</a:t>
-            </a:r>
-            <a:endParaRPr lang="en-US" sz="1050" dirty="0"/>
-          </a:p>
-        </p:txBody>
-      </p:sp>
-      <p:sp>
-        <p:nvSpPr>
-          <p:cNvPr id="28" name="Shape 26"/>
+              <a:t>Sampler forces ~50:50 per batch</a:t>
+            </a:r>
+            <a:endParaRPr lang="en-US" sz="950" dirty="0"/>
+          </a:p>
+        </p:txBody>
+      </p:sp>
+      <p:sp>
+        <p:nvSpPr>
+          <p:cNvPr id="29" name="Shape 27"/>
           <p:cNvSpPr/>
           <p:nvPr/>
         </p:nvSpPr>
         <p:spPr>
           <a:xfrm>
-            <a:off x="8138160" y="3291840"/>
-            <a:ext cx="3611880" cy="1508760"/>
+            <a:off x="3364992" y="3429000"/>
+            <a:ext cx="2697480" cy="1508760"/>
           </a:xfrm>
           <a:prstGeom prst="roundRect">
             <a:avLst>
@@ -12882,14 +14673,14 @@
       </p:sp>
       <p:sp>
         <p:nvSpPr>
-          <p:cNvPr id="29" name="Shape 27"/>
+          <p:cNvPr id="30" name="Shape 28"/>
           <p:cNvSpPr/>
           <p:nvPr/>
         </p:nvSpPr>
         <p:spPr>
           <a:xfrm>
-            <a:off x="8321040" y="3474720"/>
-            <a:ext cx="502920" cy="502920"/>
+            <a:off x="3529584" y="3593592"/>
+            <a:ext cx="457200" cy="457200"/>
           </a:xfrm>
           <a:prstGeom prst="ellipse">
             <a:avLst/>
@@ -12902,14 +14693,14 @@
       </p:sp>
       <p:sp>
         <p:nvSpPr>
-          <p:cNvPr id="30" name="Text 28"/>
-          <p:cNvSpPr txBox="1"/>
-          <p:nvPr/>
-        </p:nvSpPr>
-        <p:spPr>
-          <a:xfrm>
-            <a:off x="8321040" y="3474720"/>
-            <a:ext cx="502920" cy="502920"/>
+          <p:cNvPr id="31" name="Text 29"/>
+          <p:cNvSpPr txBox="1"/>
+          <p:nvPr/>
+        </p:nvSpPr>
+        <p:spPr>
+          <a:xfrm>
+            <a:off x="3529584" y="3593592"/>
+            <a:ext cx="457200" cy="457200"/>
           </a:xfrm>
           <a:prstGeom prst="rect">
             <a:avLst/>
@@ -12925,7 +14716,7 @@
               <a:buNone/>
             </a:pPr>
             <a:r>
-              <a:rPr lang="en-US" sz="1600" b="1" dirty="0">
+              <a:rPr lang="en-US" sz="1400" b="1" dirty="0">
                 <a:solidFill>
                   <a:srgbClr val="FFFFFF"/>
                 </a:solidFill>
@@ -12935,36 +14726,36 @@
               </a:rPr>
               <a:t>6</a:t>
             </a:r>
-            <a:endParaRPr lang="en-US" sz="1600" dirty="0"/>
-          </a:p>
-        </p:txBody>
-      </p:sp>
-      <p:sp>
-        <p:nvSpPr>
-          <p:cNvPr id="31" name="Text 29"/>
-          <p:cNvSpPr txBox="1"/>
-          <p:nvPr/>
-        </p:nvSpPr>
-        <p:spPr>
-          <a:xfrm>
-            <a:off x="8961120" y="3456432"/>
-            <a:ext cx="2606040" cy="502920"/>
-          </a:xfrm>
-          <a:prstGeom prst="rect">
-            <a:avLst/>
-          </a:prstGeom>
-          <a:noFill/>
-          <a:ln/>
-        </p:spPr>
-        <p:txBody>
-          <a:bodyPr wrap="square" lIns="0" tIns="0" rIns="0" bIns="0" rtlCol="0" anchor="ctr"/>
-          <a:lstStyle/>
-          <a:p>
-            <a:pPr indent="0" marL="0">
-              <a:buNone/>
-            </a:pPr>
-            <a:r>
-              <a:rPr lang="en-US" sz="1300" b="1" dirty="0">
+            <a:endParaRPr lang="en-US" sz="1400" dirty="0"/>
+          </a:p>
+        </p:txBody>
+      </p:sp>
+      <p:sp>
+        <p:nvSpPr>
+          <p:cNvPr id="32" name="Text 30"/>
+          <p:cNvSpPr txBox="1"/>
+          <p:nvPr/>
+        </p:nvSpPr>
+        <p:spPr>
+          <a:xfrm>
+            <a:off x="3529584" y="4087368"/>
+            <a:ext cx="2368296" cy="457200"/>
+          </a:xfrm>
+          <a:prstGeom prst="rect">
+            <a:avLst/>
+          </a:prstGeom>
+          <a:noFill/>
+          <a:ln/>
+        </p:spPr>
+        <p:txBody>
+          <a:bodyPr wrap="square" lIns="0" tIns="0" rIns="0" bIns="0" rtlCol="0" anchor="ctr"/>
+          <a:lstStyle/>
+          <a:p>
+            <a:pPr indent="0" marL="0">
+              <a:buNone/>
+            </a:pPr>
+            <a:r>
+              <a:rPr lang="en-US" sz="1150" b="1" dirty="0">
                 <a:solidFill>
                   <a:srgbClr val="1E2761"/>
                 </a:solidFill>
@@ -12972,38 +14763,38 @@
                 <a:ea typeface="Calibri" pitchFamily="34" charset="-122"/>
                 <a:cs typeface="Calibri" pitchFamily="34" charset="-120"/>
               </a:rPr>
-              <a:t>Combined</a:t>
-            </a:r>
-            <a:endParaRPr lang="en-US" sz="1300" dirty="0"/>
-          </a:p>
-        </p:txBody>
-      </p:sp>
-      <p:sp>
-        <p:nvSpPr>
-          <p:cNvPr id="32" name="Text 30"/>
-          <p:cNvSpPr txBox="1"/>
-          <p:nvPr/>
-        </p:nvSpPr>
-        <p:spPr>
-          <a:xfrm>
-            <a:off x="8321040" y="4069080"/>
-            <a:ext cx="3246120" cy="658368"/>
-          </a:xfrm>
-          <a:prstGeom prst="rect">
-            <a:avLst/>
-          </a:prstGeom>
-          <a:noFill/>
-          <a:ln/>
-        </p:spPr>
-        <p:txBody>
-          <a:bodyPr wrap="square" lIns="0" tIns="0" rIns="0" bIns="0" rtlCol="0" anchor="ctr"/>
-          <a:lstStyle/>
-          <a:p>
-            <a:pPr indent="0" marL="0">
-              <a:buNone/>
-            </a:pPr>
-            <a:r>
-              <a:rPr lang="en-US" sz="1050" dirty="0">
+              <a:t>Combo (50% US)</a:t>
+            </a:r>
+            <a:endParaRPr lang="en-US" sz="1150" dirty="0"/>
+          </a:p>
+        </p:txBody>
+      </p:sp>
+      <p:sp>
+        <p:nvSpPr>
+          <p:cNvPr id="33" name="Text 31"/>
+          <p:cNvSpPr txBox="1"/>
+          <p:nvPr/>
+        </p:nvSpPr>
+        <p:spPr>
+          <a:xfrm>
+            <a:off x="3529584" y="4507992"/>
+            <a:ext cx="2368296" cy="384048"/>
+          </a:xfrm>
+          <a:prstGeom prst="rect">
+            <a:avLst/>
+          </a:prstGeom>
+          <a:noFill/>
+          <a:ln/>
+        </p:spPr>
+        <p:txBody>
+          <a:bodyPr wrap="square" lIns="0" tIns="0" rIns="0" bIns="0" rtlCol="0" anchor="ctr"/>
+          <a:lstStyle/>
+          <a:p>
+            <a:pPr indent="0" marL="0">
+              <a:buNone/>
+            </a:pPr>
+            <a:r>
+              <a:rPr lang="en-US" sz="950" dirty="0">
                 <a:solidFill>
                   <a:srgbClr val="555B6E"/>
                 </a:solidFill>
@@ -13011,22 +14802,340 @@
                 <a:ea typeface="Calibri" pitchFamily="34" charset="-122"/>
                 <a:cs typeface="Calibri" pitchFamily="34" charset="-120"/>
               </a:rPr>
-              <a:t>Moderate undersample NHS + augmented oversample HS</a:t>
-            </a:r>
-            <a:endParaRPr lang="en-US" sz="1050" dirty="0"/>
-          </a:p>
-        </p:txBody>
-      </p:sp>
-      <p:sp>
-        <p:nvSpPr>
-          <p:cNvPr id="33" name="Text 31"/>
+              <a:t>Undersample NHS + aug-oversample HS</a:t>
+            </a:r>
+            <a:endParaRPr lang="en-US" sz="950" dirty="0"/>
+          </a:p>
+        </p:txBody>
+      </p:sp>
+      <p:sp>
+        <p:nvSpPr>
+          <p:cNvPr id="34" name="Shape 32"/>
+          <p:cNvSpPr/>
+          <p:nvPr/>
+        </p:nvSpPr>
+        <p:spPr>
+          <a:xfrm>
+            <a:off x="6227064" y="3429000"/>
+            <a:ext cx="2697480" cy="1508760"/>
+          </a:xfrm>
+          <a:prstGeom prst="roundRect">
+            <a:avLst>
+              <a:gd name="adj" fmla="val 4848"/>
+            </a:avLst>
+          </a:prstGeom>
+          <a:solidFill>
+            <a:srgbClr val="F4F5F9"/>
+          </a:solidFill>
+          <a:ln/>
+        </p:spPr>
+      </p:sp>
+      <p:sp>
+        <p:nvSpPr>
+          <p:cNvPr id="35" name="Shape 33"/>
+          <p:cNvSpPr/>
+          <p:nvPr/>
+        </p:nvSpPr>
+        <p:spPr>
+          <a:xfrm>
+            <a:off x="6391656" y="3593592"/>
+            <a:ext cx="457200" cy="457200"/>
+          </a:xfrm>
+          <a:prstGeom prst="ellipse">
+            <a:avLst/>
+          </a:prstGeom>
+          <a:solidFill>
+            <a:srgbClr val="64B5CD"/>
+          </a:solidFill>
+          <a:ln/>
+        </p:spPr>
+      </p:sp>
+      <p:sp>
+        <p:nvSpPr>
+          <p:cNvPr id="36" name="Text 34"/>
+          <p:cNvSpPr txBox="1"/>
+          <p:nvPr/>
+        </p:nvSpPr>
+        <p:spPr>
+          <a:xfrm>
+            <a:off x="6391656" y="3593592"/>
+            <a:ext cx="457200" cy="457200"/>
+          </a:xfrm>
+          <a:prstGeom prst="rect">
+            <a:avLst/>
+          </a:prstGeom>
+          <a:noFill/>
+          <a:ln/>
+        </p:spPr>
+        <p:txBody>
+          <a:bodyPr wrap="square" lIns="0" tIns="0" rIns="0" bIns="0" rtlCol="0" anchor="ctr"/>
+          <a:lstStyle/>
+          <a:p>
+            <a:pPr algn="ctr" indent="0" marL="0">
+              <a:buNone/>
+            </a:pPr>
+            <a:r>
+              <a:rPr lang="en-US" sz="1400" b="1" dirty="0">
+                <a:solidFill>
+                  <a:srgbClr val="FFFFFF"/>
+                </a:solidFill>
+                <a:latin typeface="Calibri" pitchFamily="34" charset="0"/>
+                <a:ea typeface="Calibri" pitchFamily="34" charset="-122"/>
+                <a:cs typeface="Calibri" pitchFamily="34" charset="-120"/>
+              </a:rPr>
+              <a:t>7</a:t>
+            </a:r>
+            <a:endParaRPr lang="en-US" sz="1400" dirty="0"/>
+          </a:p>
+        </p:txBody>
+      </p:sp>
+      <p:sp>
+        <p:nvSpPr>
+          <p:cNvPr id="37" name="Text 35"/>
+          <p:cNvSpPr txBox="1"/>
+          <p:nvPr/>
+        </p:nvSpPr>
+        <p:spPr>
+          <a:xfrm>
+            <a:off x="6391656" y="4087368"/>
+            <a:ext cx="2368296" cy="457200"/>
+          </a:xfrm>
+          <a:prstGeom prst="rect">
+            <a:avLst/>
+          </a:prstGeom>
+          <a:noFill/>
+          <a:ln/>
+        </p:spPr>
+        <p:txBody>
+          <a:bodyPr wrap="square" lIns="0" tIns="0" rIns="0" bIns="0" rtlCol="0" anchor="ctr"/>
+          <a:lstStyle/>
+          <a:p>
+            <a:pPr indent="0" marL="0">
+              <a:buNone/>
+            </a:pPr>
+            <a:r>
+              <a:rPr lang="en-US" sz="1150" b="1" dirty="0">
+                <a:solidFill>
+                  <a:srgbClr val="1E2761"/>
+                </a:solidFill>
+                <a:latin typeface="Calibri" pitchFamily="34" charset="0"/>
+                <a:ea typeface="Calibri" pitchFamily="34" charset="-122"/>
+                <a:cs typeface="Calibri" pitchFamily="34" charset="-120"/>
+              </a:rPr>
+              <a:t>Combo-Mild (25% US)</a:t>
+            </a:r>
+            <a:endParaRPr lang="en-US" sz="1150" dirty="0"/>
+          </a:p>
+        </p:txBody>
+      </p:sp>
+      <p:sp>
+        <p:nvSpPr>
+          <p:cNvPr id="38" name="Text 36"/>
+          <p:cNvSpPr txBox="1"/>
+          <p:nvPr/>
+        </p:nvSpPr>
+        <p:spPr>
+          <a:xfrm>
+            <a:off x="6391656" y="4507992"/>
+            <a:ext cx="2368296" cy="384048"/>
+          </a:xfrm>
+          <a:prstGeom prst="rect">
+            <a:avLst/>
+          </a:prstGeom>
+          <a:noFill/>
+          <a:ln/>
+        </p:spPr>
+        <p:txBody>
+          <a:bodyPr wrap="square" lIns="0" tIns="0" rIns="0" bIns="0" rtlCol="0" anchor="ctr"/>
+          <a:lstStyle/>
+          <a:p>
+            <a:pPr indent="0" marL="0">
+              <a:buNone/>
+            </a:pPr>
+            <a:r>
+              <a:rPr lang="en-US" sz="950" dirty="0">
+                <a:solidFill>
+                  <a:srgbClr val="555B6E"/>
+                </a:solidFill>
+                <a:latin typeface="Calibri" pitchFamily="34" charset="0"/>
+                <a:ea typeface="Calibri" pitchFamily="34" charset="-122"/>
+                <a:cs typeface="Calibri" pitchFamily="34" charset="-120"/>
+              </a:rPr>
+              <a:t>Same, milder undersampling</a:t>
+            </a:r>
+            <a:endParaRPr lang="en-US" sz="950" dirty="0"/>
+          </a:p>
+        </p:txBody>
+      </p:sp>
+      <p:sp>
+        <p:nvSpPr>
+          <p:cNvPr id="39" name="Shape 37"/>
+          <p:cNvSpPr/>
+          <p:nvPr/>
+        </p:nvSpPr>
+        <p:spPr>
+          <a:xfrm>
+            <a:off x="9089136" y="3429000"/>
+            <a:ext cx="2697480" cy="1508760"/>
+          </a:xfrm>
+          <a:prstGeom prst="roundRect">
+            <a:avLst>
+              <a:gd name="adj" fmla="val 4848"/>
+            </a:avLst>
+          </a:prstGeom>
+          <a:solidFill>
+            <a:srgbClr val="F4F5F9"/>
+          </a:solidFill>
+          <a:ln/>
+        </p:spPr>
+      </p:sp>
+      <p:sp>
+        <p:nvSpPr>
+          <p:cNvPr id="40" name="Shape 38"/>
+          <p:cNvSpPr/>
+          <p:nvPr/>
+        </p:nvSpPr>
+        <p:spPr>
+          <a:xfrm>
+            <a:off x="9253728" y="3593592"/>
+            <a:ext cx="457200" cy="457200"/>
+          </a:xfrm>
+          <a:prstGeom prst="ellipse">
+            <a:avLst/>
+          </a:prstGeom>
+          <a:solidFill>
+            <a:srgbClr val="E07B39"/>
+          </a:solidFill>
+          <a:ln/>
+        </p:spPr>
+      </p:sp>
+      <p:sp>
+        <p:nvSpPr>
+          <p:cNvPr id="41" name="Text 39"/>
+          <p:cNvSpPr txBox="1"/>
+          <p:nvPr/>
+        </p:nvSpPr>
+        <p:spPr>
+          <a:xfrm>
+            <a:off x="9253728" y="3593592"/>
+            <a:ext cx="457200" cy="457200"/>
+          </a:xfrm>
+          <a:prstGeom prst="rect">
+            <a:avLst/>
+          </a:prstGeom>
+          <a:noFill/>
+          <a:ln/>
+        </p:spPr>
+        <p:txBody>
+          <a:bodyPr wrap="square" lIns="0" tIns="0" rIns="0" bIns="0" rtlCol="0" anchor="ctr"/>
+          <a:lstStyle/>
+          <a:p>
+            <a:pPr algn="ctr" indent="0" marL="0">
+              <a:buNone/>
+            </a:pPr>
+            <a:r>
+              <a:rPr lang="en-US" sz="1400" b="1" dirty="0">
+                <a:solidFill>
+                  <a:srgbClr val="FFFFFF"/>
+                </a:solidFill>
+                <a:latin typeface="Calibri" pitchFamily="34" charset="0"/>
+                <a:ea typeface="Calibri" pitchFamily="34" charset="-122"/>
+                <a:cs typeface="Calibri" pitchFamily="34" charset="-120"/>
+              </a:rPr>
+              <a:t>8</a:t>
+            </a:r>
+            <a:endParaRPr lang="en-US" sz="1400" dirty="0"/>
+          </a:p>
+        </p:txBody>
+      </p:sp>
+      <p:sp>
+        <p:nvSpPr>
+          <p:cNvPr id="42" name="Text 40"/>
+          <p:cNvSpPr txBox="1"/>
+          <p:nvPr/>
+        </p:nvSpPr>
+        <p:spPr>
+          <a:xfrm>
+            <a:off x="9253728" y="4087368"/>
+            <a:ext cx="2368296" cy="457200"/>
+          </a:xfrm>
+          <a:prstGeom prst="rect">
+            <a:avLst/>
+          </a:prstGeom>
+          <a:noFill/>
+          <a:ln/>
+        </p:spPr>
+        <p:txBody>
+          <a:bodyPr wrap="square" lIns="0" tIns="0" rIns="0" bIns="0" rtlCol="0" anchor="ctr"/>
+          <a:lstStyle/>
+          <a:p>
+            <a:pPr indent="0" marL="0">
+              <a:buNone/>
+            </a:pPr>
+            <a:r>
+              <a:rPr lang="en-US" sz="1150" b="1" dirty="0">
+                <a:solidFill>
+                  <a:srgbClr val="1E2761"/>
+                </a:solidFill>
+                <a:latin typeface="Calibri" pitchFamily="34" charset="0"/>
+                <a:ea typeface="Calibri" pitchFamily="34" charset="-122"/>
+                <a:cs typeface="Calibri" pitchFamily="34" charset="-120"/>
+              </a:rPr>
+              <a:t>Combo (Batch+Aug)</a:t>
+            </a:r>
+            <a:endParaRPr lang="en-US" sz="1150" dirty="0"/>
+          </a:p>
+        </p:txBody>
+      </p:sp>
+      <p:sp>
+        <p:nvSpPr>
+          <p:cNvPr id="43" name="Text 41"/>
+          <p:cNvSpPr txBox="1"/>
+          <p:nvPr/>
+        </p:nvSpPr>
+        <p:spPr>
+          <a:xfrm>
+            <a:off x="9253728" y="4507992"/>
+            <a:ext cx="2368296" cy="384048"/>
+          </a:xfrm>
+          <a:prstGeom prst="rect">
+            <a:avLst/>
+          </a:prstGeom>
+          <a:noFill/>
+          <a:ln/>
+        </p:spPr>
+        <p:txBody>
+          <a:bodyPr wrap="square" lIns="0" tIns="0" rIns="0" bIns="0" rtlCol="0" anchor="ctr"/>
+          <a:lstStyle/>
+          <a:p>
+            <a:pPr indent="0" marL="0">
+              <a:buNone/>
+            </a:pPr>
+            <a:r>
+              <a:rPr lang="en-US" sz="950" dirty="0">
+                <a:solidFill>
+                  <a:srgbClr val="555B6E"/>
+                </a:solidFill>
+                <a:latin typeface="Calibri" pitchFamily="34" charset="0"/>
+                <a:ea typeface="Calibri" pitchFamily="34" charset="-122"/>
+                <a:cs typeface="Calibri" pitchFamily="34" charset="-120"/>
+              </a:rPr>
+              <a:t>Balanced batch + stochastic aug.</a:t>
+            </a:r>
+            <a:endParaRPr lang="en-US" sz="950" dirty="0"/>
+          </a:p>
+        </p:txBody>
+      </p:sp>
+      <p:sp>
+        <p:nvSpPr>
+          <p:cNvPr id="44" name="Text 42"/>
           <p:cNvSpPr txBox="1"/>
           <p:nvPr/>
         </p:nvSpPr>
         <p:spPr>
           <a:xfrm>
             <a:off x="457200" y="6473952"/>
-            <a:ext cx="8229600" cy="274320"/>
+            <a:ext cx="9144000" cy="274320"/>
           </a:xfrm>
           <a:prstGeom prst="rect">
             <a:avLst/>
@@ -13050,7 +15159,7 @@
                 <a:ea typeface="Calibri" pitchFamily="34" charset="-122"/>
                 <a:cs typeface="Calibri" pitchFamily="34" charset="-120"/>
               </a:rPr>
-              <a:t>Group 11 · Data Balancing and Augmentation Strategies for Hotspot Detection</a:t>
+              <a:t>Group 11 (DA3 Revision) · Data Balancing and Augmentation Strategies for Hotspot Detection</a:t>
             </a:r>
             <a:endParaRPr lang="en-US" sz="900" dirty="0"/>
           </a:p>
@@ -13058,7 +15167,7 @@
       </p:sp>
       <p:sp>
         <p:nvSpPr>
-          <p:cNvPr id="34" name="Text 32"/>
+          <p:cNvPr id="45" name="Text 43"/>
           <p:cNvSpPr txBox="1"/>
           <p:nvPr/>
         </p:nvSpPr>
@@ -13160,7 +15269,7 @@
                 <a:ea typeface="Cambria" pitchFamily="34" charset="-122"/>
                 <a:cs typeface="Cambria" pitchFamily="34" charset="-120"/>
               </a:rPr>
-              <a:t>Experimental Protocol</a:t>
+              <a:t>Experimental Protocol (Revised)</a:t>
             </a:r>
             <a:endParaRPr lang="en-US" sz="3000" dirty="0"/>
           </a:p>
@@ -13175,11 +15284,11 @@
         <p:spPr>
           <a:xfrm>
             <a:off x="548640" y="1828800"/>
-            <a:ext cx="2606040" cy="1737360"/>
+            <a:ext cx="2606040" cy="1920240"/>
           </a:xfrm>
           <a:prstGeom prst="roundRect">
             <a:avLst>
-              <a:gd name="adj" fmla="val 4211"/>
+              <a:gd name="adj" fmla="val 3810"/>
             </a:avLst>
           </a:prstGeom>
           <a:solidFill>
@@ -13260,7 +15369,7 @@
                 <a:ea typeface="Calibri" pitchFamily="34" charset="-122"/>
                 <a:cs typeface="Calibri" pitchFamily="34" charset="-120"/>
               </a:rPr>
-              <a:t>Preprocess</a:t>
+              <a:t>Val. Split</a:t>
             </a:r>
             <a:endParaRPr lang="en-US" sz="1400" dirty="0"/>
           </a:p>
@@ -13275,7 +15384,7 @@
         <p:spPr>
           <a:xfrm>
             <a:off x="731520" y="2788920"/>
-            <a:ext cx="2240280" cy="731520"/>
+            <a:ext cx="2240280" cy="868680"/>
           </a:xfrm>
           <a:prstGeom prst="rect">
             <a:avLst/>
@@ -13299,7 +15408,7 @@
                 <a:ea typeface="Calibri" pitchFamily="34" charset="-122"/>
                 <a:cs typeface="Calibri" pitchFamily="34" charset="-120"/>
               </a:rPr>
-              <a:t>Resize all PNGs to 64×64 grayscale, cache per benchmark</a:t>
+              <a:t>15% of training data carved out; fixed split seed shared by every strategy/seed</a:t>
             </a:r>
             <a:endParaRPr lang="en-US" sz="1000" dirty="0"/>
           </a:p>
@@ -13313,7 +15422,7 @@
         </p:nvSpPr>
         <p:spPr>
           <a:xfrm>
-            <a:off x="3154680" y="2423160"/>
+            <a:off x="3154680" y="2560320"/>
             <a:ext cx="228600" cy="457200"/>
           </a:xfrm>
           <a:prstGeom prst="rect">
@@ -13353,15 +15462,15 @@
         <p:spPr>
           <a:xfrm>
             <a:off x="3383280" y="1828800"/>
-            <a:ext cx="2606040" cy="1737360"/>
+            <a:ext cx="2606040" cy="1920240"/>
           </a:xfrm>
           <a:prstGeom prst="roundRect">
             <a:avLst>
-              <a:gd name="adj" fmla="val 4211"/>
+              <a:gd name="adj" fmla="val 3810"/>
             </a:avLst>
           </a:prstGeom>
           <a:solidFill>
-            <a:srgbClr val="1E2761"/>
+            <a:srgbClr val="E63946"/>
           </a:solidFill>
           <a:ln/>
         </p:spPr>
@@ -13438,7 +15547,7 @@
                 <a:ea typeface="Calibri" pitchFamily="34" charset="-122"/>
                 <a:cs typeface="Calibri" pitchFamily="34" charset="-120"/>
               </a:rPr>
-              <a:t>Train</a:t>
+              <a:t>Equal Steps</a:t>
             </a:r>
             <a:endParaRPr lang="en-US" sz="1400" dirty="0"/>
           </a:p>
@@ -13453,7 +15562,7 @@
         <p:spPr>
           <a:xfrm>
             <a:off x="3566160" y="2788920"/>
-            <a:ext cx="2240280" cy="731520"/>
+            <a:ext cx="2240280" cy="868680"/>
           </a:xfrm>
           <a:prstGeom prst="rect">
             <a:avLst/>
@@ -13477,7 +15586,7 @@
                 <a:ea typeface="Calibri" pitchFamily="34" charset="-122"/>
                 <a:cs typeface="Calibri" pitchFamily="34" charset="-120"/>
               </a:rPr>
-              <a:t>8 epochs, fixed seed, per (benchmark × strategy) pair — test split never touched</a:t>
+              <a:t>Every strategy trains for the same gradient-update budget per benchmark, not epochs</a:t>
             </a:r>
             <a:endParaRPr lang="en-US" sz="1000" dirty="0"/>
           </a:p>
@@ -13491,7 +15600,7 @@
         </p:nvSpPr>
         <p:spPr>
           <a:xfrm>
-            <a:off x="5989320" y="2423160"/>
+            <a:off x="5989320" y="2560320"/>
             <a:ext cx="228600" cy="457200"/>
           </a:xfrm>
           <a:prstGeom prst="rect">
@@ -13531,15 +15640,15 @@
         <p:spPr>
           <a:xfrm>
             <a:off x="6217920" y="1828800"/>
-            <a:ext cx="2606040" cy="1737360"/>
+            <a:ext cx="2606040" cy="1920240"/>
           </a:xfrm>
           <a:prstGeom prst="roundRect">
             <a:avLst>
-              <a:gd name="adj" fmla="val 4211"/>
+              <a:gd name="adj" fmla="val 3810"/>
             </a:avLst>
           </a:prstGeom>
           <a:solidFill>
-            <a:srgbClr val="1E2761"/>
+            <a:srgbClr val="E63946"/>
           </a:solidFill>
           <a:ln/>
         </p:spPr>
@@ -13616,7 +15725,7 @@
                 <a:ea typeface="Calibri" pitchFamily="34" charset="-122"/>
                 <a:cs typeface="Calibri" pitchFamily="34" charset="-120"/>
               </a:rPr>
-              <a:t>Evaluate</a:t>
+              <a:t>3 Seeds</a:t>
             </a:r>
             <a:endParaRPr lang="en-US" sz="1400" dirty="0"/>
           </a:p>
@@ -13631,7 +15740,7 @@
         <p:spPr>
           <a:xfrm>
             <a:off x="6400800" y="2788920"/>
-            <a:ext cx="2240280" cy="731520"/>
+            <a:ext cx="2240280" cy="868680"/>
           </a:xfrm>
           <a:prstGeom prst="rect">
             <a:avLst/>
@@ -13655,7 +15764,7 @@
                 <a:ea typeface="Calibri" pitchFamily="34" charset="-122"/>
                 <a:cs typeface="Calibri" pitchFamily="34" charset="-120"/>
               </a:rPr>
-              <a:t>Balanced Acc., Precision, Recall, Specificity, F1, full confusion matrix</a:t>
+              <a:t>42, 123, 2024: checkpoint picked on validation; test touched once</a:t>
             </a:r>
             <a:endParaRPr lang="en-US" sz="1000" dirty="0"/>
           </a:p>
@@ -13669,7 +15778,7 @@
         </p:nvSpPr>
         <p:spPr>
           <a:xfrm>
-            <a:off x="8823960" y="2423160"/>
+            <a:off x="8823960" y="2560320"/>
             <a:ext cx="228600" cy="457200"/>
           </a:xfrm>
           <a:prstGeom prst="rect">
@@ -13709,11 +15818,11 @@
         <p:spPr>
           <a:xfrm>
             <a:off x="9052560" y="1828800"/>
-            <a:ext cx="2606040" cy="1737360"/>
+            <a:ext cx="2606040" cy="1920240"/>
           </a:xfrm>
           <a:prstGeom prst="roundRect">
             <a:avLst>
-              <a:gd name="adj" fmla="val 4211"/>
+              <a:gd name="adj" fmla="val 3810"/>
             </a:avLst>
           </a:prstGeom>
           <a:solidFill>
@@ -13794,7 +15903,7 @@
                 <a:ea typeface="Calibri" pitchFamily="34" charset="-122"/>
                 <a:cs typeface="Calibri" pitchFamily="34" charset="-120"/>
               </a:rPr>
-              <a:t>Ablate</a:t>
+              <a:t>PR-AUC + Sig. Test</a:t>
             </a:r>
             <a:endParaRPr lang="en-US" sz="1400" dirty="0"/>
           </a:p>
@@ -13809,7 +15918,7 @@
         <p:spPr>
           <a:xfrm>
             <a:off x="9235440" y="2788920"/>
-            <a:ext cx="2240280" cy="731520"/>
+            <a:ext cx="2240280" cy="868680"/>
           </a:xfrm>
           <a:prstGeom prst="rect">
             <a:avLst/>
@@ -13833,7 +15942,7 @@
                 <a:ea typeface="Calibri" pitchFamily="34" charset="-122"/>
                 <a:cs typeface="Calibri" pitchFamily="34" charset="-120"/>
               </a:rPr>
-              <a:t>Sweep target HS:NHS ratio {0.1, 0.25, 0.5, 0.75, 1.0} for 3 strategies × 5 benchmarks</a:t>
+              <a:t>Threshold-free ranking metric + paired t-test / Wilcoxon, α=0.05</a:t>
             </a:r>
             <a:endParaRPr lang="en-US" sz="1000" dirty="0"/>
           </a:p>
@@ -13847,7 +15956,7 @@
         </p:nvSpPr>
         <p:spPr>
           <a:xfrm>
-            <a:off x="548640" y="4023360"/>
+            <a:off x="548640" y="4114800"/>
             <a:ext cx="11064240" cy="457200"/>
           </a:xfrm>
           <a:prstGeom prst="rect">
@@ -13864,7 +15973,7 @@
               <a:buNone/>
             </a:pPr>
             <a:r>
-              <a:rPr lang="en-US" sz="1350" b="1" dirty="0">
+              <a:rPr lang="en-US" sz="1300" b="1" dirty="0">
                 <a:solidFill>
                   <a:srgbClr val="1E2761"/>
                 </a:solidFill>
@@ -13878,7 +15987,7 @@
               <a:buNone/>
             </a:pPr>
             <a:r>
-              <a:rPr lang="en-US" sz="1350" dirty="0">
+              <a:rPr lang="en-US" sz="1300" dirty="0">
                 <a:solidFill>
                   <a:srgbClr val="555B6E"/>
                 </a:solidFill>
@@ -13886,13 +15995,13 @@
                 <a:ea typeface="Calibri" pitchFamily="34" charset="-122"/>
                 <a:cs typeface="Calibri" pitchFamily="34" charset="-120"/>
               </a:rPr>
-              <a:t>5 benchmarks × 6 strategies = 30 main runs, + 3 strategies × 5 ratios × 5 benchmarks = 75 ablation runs  </a:t>
-            </a:r>
-            <a:pPr indent="0" marL="0">
-              <a:buNone/>
-            </a:pPr>
-            <a:r>
-              <a:rPr lang="en-US" sz="1350" i="1" dirty="0">
+              <a:t>5 benchmarks × 8 strategies × 3 seeds = 120 main runs, + 75 ratio-ablation runs + 9 learning-curve runs  </a:t>
+            </a:r>
+            <a:pPr indent="0" marL="0">
+              <a:buNone/>
+            </a:pPr>
+            <a:r>
+              <a:rPr lang="en-US" sz="1300" i="1" dirty="0">
                 <a:solidFill>
                   <a:srgbClr val="555B6E"/>
                 </a:solidFill>
@@ -13900,9 +16009,9 @@
                 <a:ea typeface="Calibri" pitchFamily="34" charset="-122"/>
                 <a:cs typeface="Calibri" pitchFamily="34" charset="-120"/>
               </a:rPr>
-              <a:t>(105 total training runs)</a:t>
-            </a:r>
-            <a:endParaRPr lang="en-US" sz="1350" dirty="0"/>
+              <a:t>(204 total training runs, vs. 30 in DA2)</a:t>
+            </a:r>
+            <a:endParaRPr lang="en-US" sz="1300" dirty="0"/>
           </a:p>
         </p:txBody>
       </p:sp>
@@ -13914,7 +16023,7 @@
         </p:nvSpPr>
         <p:spPr>
           <a:xfrm>
-            <a:off x="548640" y="4663440"/>
+            <a:off x="548640" y="4754880"/>
             <a:ext cx="11064240" cy="822960"/>
           </a:xfrm>
           <a:prstGeom prst="rect">
@@ -13939,7 +16048,7 @@
                 <a:ea typeface="Calibri" pitchFamily="34" charset="-122"/>
                 <a:cs typeface="Calibri" pitchFamily="34" charset="-120"/>
               </a:rPr>
-              <a:t>Key rule: balancing/augmentation is applied only to the training split. Every test split stays in its natural, imbalanced form so reported metrics reflect real deployment conditions.</a:t>
+              <a:t>Key fix: DA2 trained every strategy for a fixed 8 epochs, but RUS's smaller resampled dataset meant far fewer actual gradient updates per epoch than ROS. That confound is now removed.</a:t>
             </a:r>
             <a:endParaRPr lang="en-US" sz="1300" dirty="0"/>
           </a:p>
@@ -13954,7 +16063,7 @@
         <p:spPr>
           <a:xfrm>
             <a:off x="457200" y="6473952"/>
-            <a:ext cx="8229600" cy="274320"/>
+            <a:ext cx="9144000" cy="274320"/>
           </a:xfrm>
           <a:prstGeom prst="rect">
             <a:avLst/>
@@ -13978,7 +16087,7 @@
                 <a:ea typeface="Calibri" pitchFamily="34" charset="-122"/>
                 <a:cs typeface="Calibri" pitchFamily="34" charset="-120"/>
               </a:rPr>
-              <a:t>Group 11 · Data Balancing and Augmentation Strategies for Hotspot Detection</a:t>
+              <a:t>Group 11 (DA3 Revision) · Data Balancing and Augmentation Strategies for Hotspot Detection</a:t>
             </a:r>
             <a:endParaRPr lang="en-US" sz="900" dirty="0"/>
           </a:p>
@@ -14088,7 +16197,7 @@
                 <a:ea typeface="Cambria" pitchFamily="34" charset="-122"/>
                 <a:cs typeface="Cambria" pitchFamily="34" charset="-120"/>
               </a:rPr>
-              <a:t>Results: Average Performance Across All 5 Benchmarks</a:t>
+              <a:t>Results: Average Performance (5 Benchmarks × 3 Seeds)</a:t>
             </a:r>
             <a:endParaRPr lang="en-US" sz="3000" dirty="0"/>
           </a:p>
@@ -14119,7 +16228,7 @@
         <p:spPr>
           <a:xfrm>
             <a:off x="457200" y="6473952"/>
-            <a:ext cx="8229600" cy="274320"/>
+            <a:ext cx="9144000" cy="274320"/>
           </a:xfrm>
           <a:prstGeom prst="rect">
             <a:avLst/>
@@ -14143,7 +16252,7 @@
                 <a:ea typeface="Calibri" pitchFamily="34" charset="-122"/>
                 <a:cs typeface="Calibri" pitchFamily="34" charset="-120"/>
               </a:rPr>
-              <a:t>Group 11 · Data Balancing and Augmentation Strategies for Hotspot Detection</a:t>
+              <a:t>Group 11 (DA3 Revision) · Data Balancing and Augmentation Strategies for Hotspot Detection</a:t>
             </a:r>
             <a:endParaRPr lang="en-US" sz="900" dirty="0"/>
           </a:p>

--- a/report/slides.pptx
+++ b/report/slides.pptx
@@ -4263,7 +4263,7 @@
                 <a:ea typeface="Calibri" pitchFamily="34" charset="-122"/>
                 <a:cs typeface="Calibri" pitchFamily="34" charset="-120"/>
               </a:rPr>
-              <a:t>Code: https://github.com/&lt;your-github-username&gt;/Lithography-Hotspot-Detection-G11</a:t>
+              <a:t>Code: https://github.com/Nukebyt/Data-Balancing-For-Hotspot-Detection</a:t>
             </a:r>
             <a:endParaRPr lang="en-US" sz="1100" dirty="0"/>
           </a:p>
@@ -9114,7 +9114,7 @@
                 <a:ea typeface="Calibri" pitchFamily="34" charset="-122"/>
                 <a:cs typeface="Calibri" pitchFamily="34" charset="-120"/>
               </a:rPr>
-              <a:t>https://github.com/&lt;your-github-username&gt;/Lithography-Hotspot-Detection-G11</a:t>
+              <a:t>https://github.com/Nukebyt/Data-Balancing-For-Hotspot-Detection</a:t>
             </a:r>
             <a:endParaRPr lang="en-US" sz="1500" dirty="0"/>
           </a:p>
